--- a/docs/Presentation_methode_Kenza.pptx
+++ b/docs/Presentation_methode_Kenza.pptx
@@ -10776,7 +10776,7 @@
                 <a:cs typeface="Arial"/>
                 <a:sym typeface="Arial"/>
               </a:rPr>
-              <a:t>Paramètres modifiables</a:t>
+              <a:t>Paramètres modifiables — noms actuels ; la capture ci-contre montre les anciens</a:t>
             </a:r>
             <a:endParaRPr b="0" i="0" sz="1500" u="none" cap="none" strike="noStrike">
               <a:solidFill>
@@ -11146,7 +11146,7 @@
                 <a:cs typeface="Arial"/>
                 <a:sym typeface="Arial"/>
               </a:rPr>
-              <a:t>Métrique de performance</a:t>
+              <a:t>Métriques recalculées — la capture ci-contre date de la version antérieure</a:t>
             </a:r>
             <a:endParaRPr b="0" i="0" sz="1500" u="none" cap="none" strike="noStrike">
               <a:solidFill>

--- a/docs/Presentation_methode_Kenza.pptx
+++ b/docs/Presentation_methode_Kenza.pptx
@@ -9971,7 +9971,7 @@
                 <a:cs typeface="Arial"/>
                 <a:sym typeface="Arial"/>
               </a:rPr>
-              <a:t>Haut: chargement du fichier, aperçu des données, statistiques.</a:t>
+              <a:t>Panneau gauche, de haut en bas : chargement du fichier, période d'entraînement, choix du modèle.</a:t>
             </a:r>
             <a:endParaRPr b="0" i="0" sz="1400" u="none" cap="none" strike="noStrike">
               <a:solidFill>
@@ -10011,7 +10011,7 @@
                 <a:cs typeface="Arial"/>
                 <a:sym typeface="Arial"/>
               </a:rPr>
-              <a:t>Centre : paramètres du modèle (période, horizon, croissance, options avancées).</a:t>
+              <a:t>Puis l'horizon de prévision et les paramètres du modèle, générés d'après ses métadonnées.</a:t>
             </a:r>
             <a:endParaRPr b="0" i="0" sz="1400" u="none" cap="none" strike="noStrike">
               <a:solidFill>
@@ -10051,7 +10051,7 @@
                 <a:cs typeface="Arial"/>
                 <a:sym typeface="Arial"/>
               </a:rPr>
-              <a:t>Bas : bouton « Lancer la prévision », onglets résultats.</a:t>
+              <a:t>En bas : « Lancer le modèle » et la barre de statut. Panneau droit : onglets « Modèle unique » et « Comparaison ».</a:t>
             </a:r>
             <a:endParaRPr b="0" i="0" sz="1400" u="none" cap="none" strike="noStrike">
               <a:solidFill>
@@ -26356,7 +26356,7 @@
                 <a:cs typeface="Arial"/>
                 <a:sym typeface="Arial"/>
               </a:rPr>
-              <a:t>Développée par Daniel Sallier (Aéroports de Paris, Airbus, etc.). .</a:t>
+              <a:t>Développée par Daniel Sallier (Aéroports de Paris, Airbus).</a:t>
             </a:r>
             <a:endParaRPr b="0" i="0" sz="1500" u="none" cap="none" strike="noStrike">
               <a:solidFill>
@@ -27085,7 +27085,7 @@
                 <a:cs typeface="Arial"/>
                 <a:sym typeface="Arial"/>
               </a:rPr>
-              <a:t>Prix </a:t>
+              <a:t>Prix relatif</a:t>
             </a:r>
             <a:r>
               <a:rPr b="1" lang="en-US" sz="1550">
@@ -27093,7 +27093,7 @@
                   <a:srgbClr val="17324D"/>
                 </a:solidFill>
               </a:rPr>
-              <a:t>absolu</a:t>
+              <a:t/>
             </a:r>
             <a:endParaRPr b="0" i="0" sz="1600" u="none" cap="none" strike="noStrike">
               <a:solidFill>
@@ -27464,7 +27464,7 @@
                 <a:cs typeface="Arial"/>
                 <a:sym typeface="Arial"/>
               </a:rPr>
-              <a:t>Prix </a:t>
+              <a:t>Prix relatif très bas → saturation  ·  Prix relatif très élevé → demande nulle</a:t>
             </a:r>
             <a:r>
               <a:rPr lang="en-US" sz="1350">
@@ -27472,7 +27472,7 @@
                   <a:srgbClr val="2F3A44"/>
                 </a:solidFill>
               </a:rPr>
-              <a:t>absolu </a:t>
+              <a:t/>
             </a:r>
             <a:r>
               <a:rPr b="0" i="0" lang="en-US" sz="1350" u="none" cap="none" strike="noStrike">
@@ -27484,7 +27484,7 @@
                 <a:cs typeface="Arial"/>
                 <a:sym typeface="Arial"/>
               </a:rPr>
-              <a:t>très bas -&gt; saturation  ·  Prix </a:t>
+              <a:t/>
             </a:r>
             <a:r>
               <a:rPr lang="en-US" sz="1350">
@@ -27492,7 +27492,7 @@
                   <a:srgbClr val="2F3A44"/>
                 </a:solidFill>
               </a:rPr>
-              <a:t>absolu très</a:t>
+              <a:t/>
             </a:r>
             <a:r>
               <a:rPr b="0" i="0" lang="en-US" sz="1350" u="none" cap="none" strike="noStrike">
@@ -27504,7 +27504,7 @@
                 <a:cs typeface="Arial"/>
                 <a:sym typeface="Arial"/>
               </a:rPr>
-              <a:t> élevé -&gt; demande nulle </a:t>
+              <a:t/>
             </a:r>
             <a:endParaRPr b="0" i="0" sz="1350" u="none" cap="none" strike="noStrike">
               <a:solidFill>
@@ -27540,7 +27540,7 @@
                   <a:srgbClr val="2F3A44"/>
                 </a:solidFill>
               </a:rPr>
-              <a:t>K</a:t>
+              <a:t>K₁ : constante agrégée, multiplicateur de la population (0,8193)</a:t>
             </a:r>
             <a:r>
               <a:rPr baseline="-25000" lang="en-US" sz="1350">
@@ -27548,7 +27548,7 @@
                   <a:srgbClr val="2F3A44"/>
                 </a:solidFill>
               </a:rPr>
-              <a:t>1</a:t>
+              <a:t/>
             </a:r>
             <a:r>
               <a:rPr lang="en-US" sz="1350">
@@ -27556,7 +27556,7 @@
                   <a:srgbClr val="2F3A44"/>
                 </a:solidFill>
               </a:rPr>
-              <a:t> : proportion de gens voyageant</a:t>
+              <a:t/>
             </a:r>
             <a:endParaRPr sz="1350">
               <a:solidFill>
@@ -27588,7 +27588,7 @@
                   <a:srgbClr val="2F3A44"/>
                 </a:solidFill>
               </a:rPr>
-              <a:t>K</a:t>
+              <a:t>K₂ : facteur d'échelle du prix normalisé (30)</a:t>
             </a:r>
             <a:r>
               <a:rPr baseline="-25000" lang="en-US" sz="1350">
@@ -27596,7 +27596,7 @@
                   <a:srgbClr val="2F3A44"/>
                 </a:solidFill>
               </a:rPr>
-              <a:t>2</a:t>
+              <a:t/>
             </a:r>
             <a:r>
               <a:rPr lang="en-US" sz="1350">
@@ -27604,7 +27604,7 @@
                   <a:srgbClr val="2F3A44"/>
                 </a:solidFill>
               </a:rPr>
-              <a:t>: autre coefficient xxx</a:t>
+              <a:t/>
             </a:r>
             <a:endParaRPr sz="1350">
               <a:solidFill>
@@ -28003,7 +28003,7 @@
                 <a:cs typeface="Arial"/>
                 <a:sym typeface="Arial"/>
               </a:rPr>
-              <a:t>avec a ∈ [0;1], b &gt; 0, c &lt; 0, d &gt; 0</a:t>
+              <a:t>avec a &gt; 0, b &gt; 0, c &lt; 0, d &gt; 0 ; F* est bornée à [0;1] (a = 1,1572 en référence)</a:t>
             </a:r>
             <a:endParaRPr b="0" i="0" sz="1400" u="none" cap="none" strike="noStrike">
               <a:solidFill>

--- a/docs/Presentation_methode_Kenza.pptx
+++ b/docs/Presentation_methode_Kenza.pptx
@@ -25,6 +25,7 @@
     <p:sldId id="270" r:id="rId20"/>
     <p:sldId id="271" r:id="rId21"/>
     <p:sldId id="272" r:id="rId22"/>
+    <p:sldId id="277" r:id="rId44"/>
     <p:sldId id="273" r:id="rId23"/>
     <p:sldId id="274" r:id="rId24"/>
     <p:sldId id="275" r:id="rId25"/>
@@ -9528,7 +9529,7 @@
                 <a:cs typeface="Arial"/>
                 <a:sym typeface="Arial"/>
               </a:rPr>
-              <a:t>État : fonctionnel et audité — 253 tests de non-régression, parité vérifiée avec le classeur Excel de référence</a:t>
+              <a:t>État : fonctionnel et audité — 253 tests de non-régression ; écart au classeur Excel de 3 à 11 % selon la variante, sauf Kenza indexé (41,7 %, non expliqué à ce jour)</a:t>
             </a:r>
             <a:endParaRPr b="0" i="0" sz="1400" u="none" cap="none" strike="noStrike">
               <a:solidFill>
@@ -14066,7 +14067,7 @@
         <p:spPr>
           <a:xfrm>
             <a:off x="457200" y="1600200"/>
-            <a:ext cx="11247120" cy="548640"/>
+            <a:ext cx="11247120" cy="438912"/>
           </a:xfrm>
           <a:prstGeom prst="rect">
             <a:avLst/>
@@ -14125,7 +14126,7 @@
         <p:spPr>
           <a:xfrm>
             <a:off x="457200" y="1600200"/>
-            <a:ext cx="2926080" cy="548640"/>
+            <a:ext cx="2926080" cy="438912"/>
           </a:xfrm>
           <a:prstGeom prst="rect">
             <a:avLst/>
@@ -14191,7 +14192,7 @@
         <p:spPr>
           <a:xfrm>
             <a:off x="3383280" y="1600200"/>
-            <a:ext cx="1645920" cy="548640"/>
+            <a:ext cx="1645920" cy="438912"/>
           </a:xfrm>
           <a:prstGeom prst="rect">
             <a:avLst/>
@@ -14257,7 +14258,7 @@
         <p:spPr>
           <a:xfrm>
             <a:off x="5029200" y="1600200"/>
-            <a:ext cx="1645920" cy="548640"/>
+            <a:ext cx="1645920" cy="438912"/>
           </a:xfrm>
           <a:prstGeom prst="rect">
             <a:avLst/>
@@ -14323,7 +14324,7 @@
         <p:spPr>
           <a:xfrm>
             <a:off x="6675120" y="1600200"/>
-            <a:ext cx="1645920" cy="548640"/>
+            <a:ext cx="1645920" cy="438912"/>
           </a:xfrm>
           <a:prstGeom prst="rect">
             <a:avLst/>
@@ -14389,7 +14390,7 @@
         <p:spPr>
           <a:xfrm>
             <a:off x="8321040" y="1600200"/>
-            <a:ext cx="1371600" cy="548640"/>
+            <a:ext cx="1371600" cy="438912"/>
           </a:xfrm>
           <a:prstGeom prst="rect">
             <a:avLst/>
@@ -14455,7 +14456,7 @@
         <p:spPr>
           <a:xfrm>
             <a:off x="9692640" y="1600200"/>
-            <a:ext cx="2011680" cy="548640"/>
+            <a:ext cx="2011680" cy="438912"/>
           </a:xfrm>
           <a:prstGeom prst="rect">
             <a:avLst/>
@@ -14520,8 +14521,8 @@
         </p:nvSpPr>
         <p:spPr>
           <a:xfrm>
-            <a:off x="457200" y="2148840"/>
-            <a:ext cx="11247120" cy="548640"/>
+            <a:off x="457200" y="2039112"/>
+            <a:ext cx="11247120" cy="438912"/>
           </a:xfrm>
           <a:prstGeom prst="rect">
             <a:avLst/>
@@ -14579,8 +14580,8 @@
         </p:nvSpPr>
         <p:spPr>
           <a:xfrm>
-            <a:off x="457200" y="2148840"/>
-            <a:ext cx="2926080" cy="548640"/>
+            <a:off x="457200" y="2039112"/>
+            <a:ext cx="2926080" cy="438912"/>
           </a:xfrm>
           <a:prstGeom prst="rect">
             <a:avLst/>
@@ -14645,8 +14646,8 @@
         </p:nvSpPr>
         <p:spPr>
           <a:xfrm>
-            <a:off x="3383280" y="2148840"/>
-            <a:ext cx="1645920" cy="548640"/>
+            <a:off x="3383280" y="2039112"/>
+            <a:ext cx="1645920" cy="438912"/>
           </a:xfrm>
           <a:prstGeom prst="rect">
             <a:avLst/>
@@ -14689,7 +14690,7 @@
                 <a:cs typeface="Arial"/>
                 <a:sym typeface="Arial"/>
               </a:rPr>
-              <a:t>77 264</a:t>
+              <a:t>10 498</a:t>
             </a:r>
             <a:endParaRPr b="0" i="0" sz="1300" u="none" cap="none" strike="noStrike">
               <a:solidFill>
@@ -14711,8 +14712,8 @@
         </p:nvSpPr>
         <p:spPr>
           <a:xfrm>
-            <a:off x="5029200" y="2148840"/>
-            <a:ext cx="1645920" cy="548640"/>
+            <a:off x="5029200" y="2039112"/>
+            <a:ext cx="1645920" cy="438912"/>
           </a:xfrm>
           <a:prstGeom prst="rect">
             <a:avLst/>
@@ -14755,7 +14756,7 @@
                 <a:cs typeface="Arial"/>
                 <a:sym typeface="Arial"/>
               </a:rPr>
-              <a:t>65 000</a:t>
+              <a:t>8 356</a:t>
             </a:r>
             <a:endParaRPr b="0" i="0" sz="1300" u="none" cap="none" strike="noStrike">
               <a:solidFill>
@@ -14777,8 +14778,8 @@
         </p:nvSpPr>
         <p:spPr>
           <a:xfrm>
-            <a:off x="6675120" y="2148840"/>
-            <a:ext cx="1645920" cy="548640"/>
+            <a:off x="6675120" y="2039112"/>
+            <a:ext cx="1645920" cy="438912"/>
           </a:xfrm>
           <a:prstGeom prst="rect">
             <a:avLst/>
@@ -14821,7 +14822,7 @@
                 <a:cs typeface="Arial"/>
                 <a:sym typeface="Arial"/>
               </a:rPr>
-              <a:t>75,8 %</a:t>
+              <a:t>9,6 %</a:t>
             </a:r>
             <a:endParaRPr b="0" i="0" sz="1300" u="none" cap="none" strike="noStrike">
               <a:solidFill>
@@ -14843,8 +14844,8 @@
         </p:nvSpPr>
         <p:spPr>
           <a:xfrm>
-            <a:off x="8321040" y="2148840"/>
-            <a:ext cx="1371600" cy="548640"/>
+            <a:off x="8321040" y="2039112"/>
+            <a:ext cx="1371600" cy="438912"/>
           </a:xfrm>
           <a:prstGeom prst="rect">
             <a:avLst/>
@@ -14887,7 +14888,7 @@
                 <a:cs typeface="Arial"/>
                 <a:sym typeface="Arial"/>
               </a:rPr>
-              <a:t>-55,6</a:t>
+              <a:t>-0,05</a:t>
             </a:r>
             <a:endParaRPr b="0" i="0" sz="1300" u="none" cap="none" strike="noStrike">
               <a:solidFill>
@@ -14909,8 +14910,8 @@
         </p:nvSpPr>
         <p:spPr>
           <a:xfrm>
-            <a:off x="9692640" y="2148840"/>
-            <a:ext cx="2011680" cy="548640"/>
+            <a:off x="9692640" y="2039112"/>
+            <a:ext cx="2011680" cy="438912"/>
           </a:xfrm>
           <a:prstGeom prst="rect">
             <a:avLst/>
@@ -14953,7 +14954,7 @@
                 <a:cs typeface="Arial"/>
                 <a:sym typeface="Arial"/>
               </a:rPr>
-              <a:t>-49,0</a:t>
+              <a:t>+0,33</a:t>
             </a:r>
             <a:endParaRPr b="0" i="0" sz="1300" u="none" cap="none" strike="noStrike">
               <a:solidFill>
@@ -14975,8 +14976,8 @@
         </p:nvSpPr>
         <p:spPr>
           <a:xfrm>
-            <a:off x="457200" y="2697480"/>
-            <a:ext cx="11247120" cy="548640"/>
+            <a:off x="457200" y="2478024"/>
+            <a:ext cx="11247120" cy="438912"/>
           </a:xfrm>
           <a:prstGeom prst="rect">
             <a:avLst/>
@@ -15034,8 +15035,8 @@
         </p:nvSpPr>
         <p:spPr>
           <a:xfrm>
-            <a:off x="457200" y="2697480"/>
-            <a:ext cx="2926080" cy="548640"/>
+            <a:off x="457200" y="2478024"/>
+            <a:ext cx="2926080" cy="438912"/>
           </a:xfrm>
           <a:prstGeom prst="rect">
             <a:avLst/>
@@ -15100,8 +15101,8 @@
         </p:nvSpPr>
         <p:spPr>
           <a:xfrm>
-            <a:off x="3383280" y="2697480"/>
-            <a:ext cx="1645920" cy="548640"/>
+            <a:off x="3383280" y="2478024"/>
+            <a:ext cx="1645920" cy="438912"/>
           </a:xfrm>
           <a:prstGeom prst="rect">
             <a:avLst/>
@@ -15166,8 +15167,8 @@
         </p:nvSpPr>
         <p:spPr>
           <a:xfrm>
-            <a:off x="5029200" y="2697480"/>
-            <a:ext cx="1645920" cy="548640"/>
+            <a:off x="5029200" y="2478024"/>
+            <a:ext cx="1645920" cy="438912"/>
           </a:xfrm>
           <a:prstGeom prst="rect">
             <a:avLst/>
@@ -15232,8 +15233,8 @@
         </p:nvSpPr>
         <p:spPr>
           <a:xfrm>
-            <a:off x="6675120" y="2697480"/>
-            <a:ext cx="1645920" cy="548640"/>
+            <a:off x="6675120" y="2478024"/>
+            <a:ext cx="1645920" cy="438912"/>
           </a:xfrm>
           <a:prstGeom prst="rect">
             <a:avLst/>
@@ -15298,8 +15299,8 @@
         </p:nvSpPr>
         <p:spPr>
           <a:xfrm>
-            <a:off x="8321040" y="2697480"/>
-            <a:ext cx="1371600" cy="548640"/>
+            <a:off x="8321040" y="2478024"/>
+            <a:ext cx="1371600" cy="438912"/>
           </a:xfrm>
           <a:prstGeom prst="rect">
             <a:avLst/>
@@ -15364,8 +15365,8 @@
         </p:nvSpPr>
         <p:spPr>
           <a:xfrm>
-            <a:off x="9692640" y="2697480"/>
-            <a:ext cx="2011680" cy="548640"/>
+            <a:off x="9692640" y="2478024"/>
+            <a:ext cx="2011680" cy="438912"/>
           </a:xfrm>
           <a:prstGeom prst="rect">
             <a:avLst/>
@@ -15430,8 +15431,8 @@
         </p:nvSpPr>
         <p:spPr>
           <a:xfrm>
-            <a:off x="457200" y="3246120"/>
-            <a:ext cx="11247120" cy="548640"/>
+            <a:off x="457200" y="2916936"/>
+            <a:ext cx="11247120" cy="438912"/>
           </a:xfrm>
           <a:prstGeom prst="rect">
             <a:avLst/>
@@ -15489,8 +15490,8 @@
         </p:nvSpPr>
         <p:spPr>
           <a:xfrm>
-            <a:off x="457200" y="3246120"/>
-            <a:ext cx="2926080" cy="548640"/>
+            <a:off x="457200" y="2916936"/>
+            <a:ext cx="2926080" cy="438912"/>
           </a:xfrm>
           <a:prstGeom prst="rect">
             <a:avLst/>
@@ -15555,8 +15556,8 @@
         </p:nvSpPr>
         <p:spPr>
           <a:xfrm>
-            <a:off x="3383280" y="3246120"/>
-            <a:ext cx="1645920" cy="548640"/>
+            <a:off x="3383280" y="2916936"/>
+            <a:ext cx="1645920" cy="438912"/>
           </a:xfrm>
           <a:prstGeom prst="rect">
             <a:avLst/>
@@ -15621,8 +15622,8 @@
         </p:nvSpPr>
         <p:spPr>
           <a:xfrm>
-            <a:off x="5029200" y="3246120"/>
-            <a:ext cx="1645920" cy="548640"/>
+            <a:off x="5029200" y="2916936"/>
+            <a:ext cx="1645920" cy="438912"/>
           </a:xfrm>
           <a:prstGeom prst="rect">
             <a:avLst/>
@@ -15687,8 +15688,8 @@
         </p:nvSpPr>
         <p:spPr>
           <a:xfrm>
-            <a:off x="6675120" y="3246120"/>
-            <a:ext cx="1645920" cy="548640"/>
+            <a:off x="6675120" y="2916936"/>
+            <a:ext cx="1645920" cy="438912"/>
           </a:xfrm>
           <a:prstGeom prst="rect">
             <a:avLst/>
@@ -15753,8 +15754,8 @@
         </p:nvSpPr>
         <p:spPr>
           <a:xfrm>
-            <a:off x="8321040" y="3246120"/>
-            <a:ext cx="1371600" cy="548640"/>
+            <a:off x="8321040" y="2916936"/>
+            <a:ext cx="1371600" cy="438912"/>
           </a:xfrm>
           <a:prstGeom prst="rect">
             <a:avLst/>
@@ -15819,8 +15820,8 @@
         </p:nvSpPr>
         <p:spPr>
           <a:xfrm>
-            <a:off x="9692640" y="3246120"/>
-            <a:ext cx="2011680" cy="548640"/>
+            <a:off x="9692640" y="2916936"/>
+            <a:ext cx="2011680" cy="438912"/>
           </a:xfrm>
           <a:prstGeom prst="rect">
             <a:avLst/>
@@ -15864,6 +15865,461 @@
                 <a:sym typeface="Arial"/>
               </a:rPr>
               <a:t>+0,78</a:t>
+            </a:r>
+            <a:endParaRPr b="0" i="0" sz="1300" u="none" cap="none" strike="noStrike">
+              <a:solidFill>
+                <a:schemeClr val="dk1"/>
+              </a:solidFill>
+              <a:latin typeface="Calibri"/>
+              <a:ea typeface="Calibri"/>
+              <a:cs typeface="Calibri"/>
+              <a:sym typeface="Calibri"/>
+            </a:endParaRPr>
+          </a:p>
+        </p:txBody>
+      </p:sp>
+      <p:sp>
+        <p:nvSpPr>
+          <p:cNvPr id="394" name="Google Shape;382;p15"/>
+          <p:cNvSpPr/>
+          <p:nvPr/>
+        </p:nvSpPr>
+        <p:spPr>
+          <a:xfrm>
+            <a:off x="457200" y="3355848"/>
+            <a:ext cx="11247120" cy="438912"/>
+          </a:xfrm>
+          <a:prstGeom prst="rect">
+            <a:avLst/>
+          </a:prstGeom>
+          <a:solidFill>
+            <a:srgbClr val="E5EFF3"/>
+          </a:solidFill>
+          <a:ln>
+            <a:noFill/>
+          </a:ln>
+        </p:spPr>
+        <p:txBody>
+          <a:bodyPr anchorCtr="0" anchor="ctr" bIns="91425" lIns="91425" spcFirstLastPara="1" rIns="91425" wrap="square" tIns="91425">
+            <a:noAutofit/>
+          </a:bodyPr>
+          <a:lstStyle/>
+          <a:p>
+            <a:pPr indent="0" lvl="0" marL="0" marR="0" rtl="0" algn="l">
+              <a:lnSpc>
+                <a:spcPct val="100000"/>
+              </a:lnSpc>
+              <a:spcBef>
+                <a:spcPts val="0"/>
+              </a:spcBef>
+              <a:spcAft>
+                <a:spcPts val="0"/>
+              </a:spcAft>
+              <a:buClr>
+                <a:srgbClr val="000000"/>
+              </a:buClr>
+              <a:buSzPts val="1400"/>
+              <a:buFont typeface="Arial"/>
+              <a:buNone/>
+            </a:pPr>
+            <a:r>
+              <a:t/>
+            </a:r>
+            <a:endParaRPr b="0" i="0" sz="1400" u="none" cap="none" strike="noStrike">
+              <a:solidFill>
+                <a:srgbClr val="000000"/>
+              </a:solidFill>
+              <a:latin typeface="Arial"/>
+              <a:ea typeface="Arial"/>
+              <a:cs typeface="Arial"/>
+              <a:sym typeface="Arial"/>
+            </a:endParaRPr>
+          </a:p>
+        </p:txBody>
+      </p:sp>
+      <p:sp>
+        <p:nvSpPr>
+          <p:cNvPr id="395" name="Google Shape;383;p15"/>
+          <p:cNvSpPr/>
+          <p:nvPr/>
+        </p:nvSpPr>
+        <p:spPr>
+          <a:xfrm>
+            <a:off x="457200" y="3355848"/>
+            <a:ext cx="2926080" cy="438912"/>
+          </a:xfrm>
+          <a:prstGeom prst="rect">
+            <a:avLst/>
+          </a:prstGeom>
+          <a:noFill/>
+          <a:ln>
+            <a:noFill/>
+          </a:ln>
+        </p:spPr>
+        <p:txBody>
+          <a:bodyPr anchorCtr="0" anchor="ctr" bIns="27425" lIns="54850" spcFirstLastPara="1" rIns="54850" wrap="square" tIns="27425">
+            <a:noAutofit/>
+          </a:bodyPr>
+          <a:lstStyle/>
+          <a:p>
+            <a:pPr indent="0" lvl="0" marL="0" marR="0" rtl="0" algn="ctr">
+              <a:lnSpc>
+                <a:spcPct val="100000"/>
+              </a:lnSpc>
+              <a:spcBef>
+                <a:spcPts val="0"/>
+              </a:spcBef>
+              <a:spcAft>
+                <a:spcPts val="0"/>
+              </a:spcAft>
+              <a:buClr>
+                <a:srgbClr val="1F2937"/>
+              </a:buClr>
+              <a:buSzPts val="1300"/>
+              <a:buFont typeface="Calibri"/>
+              <a:buNone/>
+            </a:pPr>
+            <a:r>
+              <a:rPr b="0" i="0" lang="en-US" sz="1240" u="none" cap="none" strike="noStrike">
+                <a:solidFill>
+                  <a:srgbClr val="2F3A44"/>
+                </a:solidFill>
+                <a:latin typeface="Arial"/>
+                <a:ea typeface="Arial"/>
+                <a:cs typeface="Arial"/>
+                <a:sym typeface="Arial"/>
+              </a:rPr>
+              <a:t>Kenza simplifié indexé</a:t>
+            </a:r>
+            <a:endParaRPr b="0" i="0" sz="1300" u="none" cap="none" strike="noStrike">
+              <a:solidFill>
+                <a:schemeClr val="dk1"/>
+              </a:solidFill>
+              <a:latin typeface="Calibri"/>
+              <a:ea typeface="Calibri"/>
+              <a:cs typeface="Calibri"/>
+              <a:sym typeface="Calibri"/>
+            </a:endParaRPr>
+          </a:p>
+        </p:txBody>
+      </p:sp>
+      <p:sp>
+        <p:nvSpPr>
+          <p:cNvPr id="396" name="Google Shape;384;p15"/>
+          <p:cNvSpPr/>
+          <p:nvPr/>
+        </p:nvSpPr>
+        <p:spPr>
+          <a:xfrm>
+            <a:off x="3383280" y="3355848"/>
+            <a:ext cx="1645920" cy="438912"/>
+          </a:xfrm>
+          <a:prstGeom prst="rect">
+            <a:avLst/>
+          </a:prstGeom>
+          <a:noFill/>
+          <a:ln>
+            <a:noFill/>
+          </a:ln>
+        </p:spPr>
+        <p:txBody>
+          <a:bodyPr anchorCtr="0" anchor="ctr" bIns="27425" lIns="54850" spcFirstLastPara="1" rIns="54850" wrap="square" tIns="27425">
+            <a:noAutofit/>
+          </a:bodyPr>
+          <a:lstStyle/>
+          <a:p>
+            <a:pPr indent="0" lvl="0" marL="0" marR="0" rtl="0" algn="ctr">
+              <a:lnSpc>
+                <a:spcPct val="100000"/>
+              </a:lnSpc>
+              <a:spcBef>
+                <a:spcPts val="0"/>
+              </a:spcBef>
+              <a:spcAft>
+                <a:spcPts val="0"/>
+              </a:spcAft>
+              <a:buClr>
+                <a:srgbClr val="1F2937"/>
+              </a:buClr>
+              <a:buSzPts val="1300"/>
+              <a:buFont typeface="Calibri"/>
+              <a:buNone/>
+            </a:pPr>
+            <a:r>
+              <a:rPr b="0" i="0" lang="en-US" sz="1240" u="none" cap="none" strike="noStrike">
+                <a:solidFill>
+                  <a:srgbClr val="2F3A44"/>
+                </a:solidFill>
+                <a:latin typeface="Arial"/>
+                <a:ea typeface="Arial"/>
+                <a:cs typeface="Arial"/>
+                <a:sym typeface="Arial"/>
+              </a:rPr>
+              <a:t>8 540</a:t>
+            </a:r>
+            <a:endParaRPr b="0" i="0" sz="1300" u="none" cap="none" strike="noStrike">
+              <a:solidFill>
+                <a:schemeClr val="dk1"/>
+              </a:solidFill>
+              <a:latin typeface="Calibri"/>
+              <a:ea typeface="Calibri"/>
+              <a:cs typeface="Calibri"/>
+              <a:sym typeface="Calibri"/>
+            </a:endParaRPr>
+          </a:p>
+        </p:txBody>
+      </p:sp>
+      <p:sp>
+        <p:nvSpPr>
+          <p:cNvPr id="397" name="Google Shape;385;p15"/>
+          <p:cNvSpPr/>
+          <p:nvPr/>
+        </p:nvSpPr>
+        <p:spPr>
+          <a:xfrm>
+            <a:off x="5029200" y="3355848"/>
+            <a:ext cx="1645920" cy="438912"/>
+          </a:xfrm>
+          <a:prstGeom prst="rect">
+            <a:avLst/>
+          </a:prstGeom>
+          <a:noFill/>
+          <a:ln>
+            <a:noFill/>
+          </a:ln>
+        </p:spPr>
+        <p:txBody>
+          <a:bodyPr anchorCtr="0" anchor="ctr" bIns="27425" lIns="54850" spcFirstLastPara="1" rIns="54850" wrap="square" tIns="27425">
+            <a:noAutofit/>
+          </a:bodyPr>
+          <a:lstStyle/>
+          <a:p>
+            <a:pPr indent="0" lvl="0" marL="0" marR="0" rtl="0" algn="ctr">
+              <a:lnSpc>
+                <a:spcPct val="100000"/>
+              </a:lnSpc>
+              <a:spcBef>
+                <a:spcPts val="0"/>
+              </a:spcBef>
+              <a:spcAft>
+                <a:spcPts val="0"/>
+              </a:spcAft>
+              <a:buClr>
+                <a:srgbClr val="1F2937"/>
+              </a:buClr>
+              <a:buSzPts val="1300"/>
+              <a:buFont typeface="Calibri"/>
+              <a:buNone/>
+            </a:pPr>
+            <a:r>
+              <a:rPr b="0" i="0" lang="en-US" sz="1240" u="none" cap="none" strike="noStrike">
+                <a:solidFill>
+                  <a:srgbClr val="2F3A44"/>
+                </a:solidFill>
+                <a:latin typeface="Arial"/>
+                <a:ea typeface="Arial"/>
+                <a:cs typeface="Arial"/>
+                <a:sym typeface="Arial"/>
+              </a:rPr>
+              <a:t>6 660</a:t>
+            </a:r>
+            <a:endParaRPr b="0" i="0" sz="1300" u="none" cap="none" strike="noStrike">
+              <a:solidFill>
+                <a:schemeClr val="dk1"/>
+              </a:solidFill>
+              <a:latin typeface="Calibri"/>
+              <a:ea typeface="Calibri"/>
+              <a:cs typeface="Calibri"/>
+              <a:sym typeface="Calibri"/>
+            </a:endParaRPr>
+          </a:p>
+        </p:txBody>
+      </p:sp>
+      <p:sp>
+        <p:nvSpPr>
+          <p:cNvPr id="398" name="Google Shape;386;p15"/>
+          <p:cNvSpPr/>
+          <p:nvPr/>
+        </p:nvSpPr>
+        <p:spPr>
+          <a:xfrm>
+            <a:off x="6675120" y="3355848"/>
+            <a:ext cx="1645920" cy="438912"/>
+          </a:xfrm>
+          <a:prstGeom prst="rect">
+            <a:avLst/>
+          </a:prstGeom>
+          <a:noFill/>
+          <a:ln>
+            <a:noFill/>
+          </a:ln>
+        </p:spPr>
+        <p:txBody>
+          <a:bodyPr anchorCtr="0" anchor="ctr" bIns="27425" lIns="54850" spcFirstLastPara="1" rIns="54850" wrap="square" tIns="27425">
+            <a:noAutofit/>
+          </a:bodyPr>
+          <a:lstStyle/>
+          <a:p>
+            <a:pPr indent="0" lvl="0" marL="0" marR="0" rtl="0" algn="ctr">
+              <a:lnSpc>
+                <a:spcPct val="100000"/>
+              </a:lnSpc>
+              <a:spcBef>
+                <a:spcPts val="0"/>
+              </a:spcBef>
+              <a:spcAft>
+                <a:spcPts val="0"/>
+              </a:spcAft>
+              <a:buClr>
+                <a:srgbClr val="1F2937"/>
+              </a:buClr>
+              <a:buSzPts val="1300"/>
+              <a:buFont typeface="Calibri"/>
+              <a:buNone/>
+            </a:pPr>
+            <a:r>
+              <a:rPr b="0" i="0" lang="en-US" sz="1240" u="none" cap="none" strike="noStrike">
+                <a:solidFill>
+                  <a:srgbClr val="2F3A44"/>
+                </a:solidFill>
+                <a:latin typeface="Arial"/>
+                <a:ea typeface="Arial"/>
+                <a:cs typeface="Arial"/>
+                <a:sym typeface="Arial"/>
+              </a:rPr>
+              <a:t>7,6 %</a:t>
+            </a:r>
+            <a:endParaRPr b="0" i="0" sz="1300" u="none" cap="none" strike="noStrike">
+              <a:solidFill>
+                <a:schemeClr val="dk1"/>
+              </a:solidFill>
+              <a:latin typeface="Calibri"/>
+              <a:ea typeface="Calibri"/>
+              <a:cs typeface="Calibri"/>
+              <a:sym typeface="Calibri"/>
+            </a:endParaRPr>
+          </a:p>
+        </p:txBody>
+      </p:sp>
+      <p:sp>
+        <p:nvSpPr>
+          <p:cNvPr id="399" name="Google Shape;387;p15"/>
+          <p:cNvSpPr/>
+          <p:nvPr/>
+        </p:nvSpPr>
+        <p:spPr>
+          <a:xfrm>
+            <a:off x="8321040" y="3355848"/>
+            <a:ext cx="1371600" cy="438912"/>
+          </a:xfrm>
+          <a:prstGeom prst="rect">
+            <a:avLst/>
+          </a:prstGeom>
+          <a:noFill/>
+          <a:ln>
+            <a:noFill/>
+          </a:ln>
+        </p:spPr>
+        <p:txBody>
+          <a:bodyPr anchorCtr="0" anchor="ctr" bIns="27425" lIns="54850" spcFirstLastPara="1" rIns="54850" wrap="square" tIns="27425">
+            <a:noAutofit/>
+          </a:bodyPr>
+          <a:lstStyle/>
+          <a:p>
+            <a:pPr indent="0" lvl="0" marL="0" marR="0" rtl="0" algn="ctr">
+              <a:lnSpc>
+                <a:spcPct val="100000"/>
+              </a:lnSpc>
+              <a:spcBef>
+                <a:spcPts val="0"/>
+              </a:spcBef>
+              <a:spcAft>
+                <a:spcPts val="0"/>
+              </a:spcAft>
+              <a:buClr>
+                <a:srgbClr val="1F2937"/>
+              </a:buClr>
+              <a:buSzPts val="1300"/>
+              <a:buFont typeface="Calibri"/>
+              <a:buNone/>
+            </a:pPr>
+            <a:r>
+              <a:rPr b="0" i="0" lang="en-US" sz="1240" u="none" cap="none" strike="noStrike">
+                <a:solidFill>
+                  <a:srgbClr val="2F3A44"/>
+                </a:solidFill>
+                <a:latin typeface="Arial"/>
+                <a:ea typeface="Arial"/>
+                <a:cs typeface="Arial"/>
+                <a:sym typeface="Arial"/>
+              </a:rPr>
+              <a:t>+0,31</a:t>
+            </a:r>
+            <a:endParaRPr b="0" i="0" sz="1300" u="none" cap="none" strike="noStrike">
+              <a:solidFill>
+                <a:schemeClr val="dk1"/>
+              </a:solidFill>
+              <a:latin typeface="Calibri"/>
+              <a:ea typeface="Calibri"/>
+              <a:cs typeface="Calibri"/>
+              <a:sym typeface="Calibri"/>
+            </a:endParaRPr>
+          </a:p>
+        </p:txBody>
+      </p:sp>
+      <p:sp>
+        <p:nvSpPr>
+          <p:cNvPr id="400" name="Google Shape;388;p15"/>
+          <p:cNvSpPr/>
+          <p:nvPr/>
+        </p:nvSpPr>
+        <p:spPr>
+          <a:xfrm>
+            <a:off x="9692640" y="3355848"/>
+            <a:ext cx="2011680" cy="438912"/>
+          </a:xfrm>
+          <a:prstGeom prst="rect">
+            <a:avLst/>
+          </a:prstGeom>
+          <a:noFill/>
+          <a:ln>
+            <a:noFill/>
+          </a:ln>
+        </p:spPr>
+        <p:txBody>
+          <a:bodyPr anchorCtr="0" anchor="ctr" bIns="27425" lIns="54850" spcFirstLastPara="1" rIns="54850" wrap="square" tIns="27425">
+            <a:noAutofit/>
+          </a:bodyPr>
+          <a:lstStyle/>
+          <a:p>
+            <a:pPr indent="0" lvl="0" marL="0" marR="0" rtl="0" algn="ctr">
+              <a:lnSpc>
+                <a:spcPct val="100000"/>
+              </a:lnSpc>
+              <a:spcBef>
+                <a:spcPts val="0"/>
+              </a:spcBef>
+              <a:spcAft>
+                <a:spcPts val="0"/>
+              </a:spcAft>
+              <a:buClr>
+                <a:srgbClr val="1F2937"/>
+              </a:buClr>
+              <a:buSzPts val="1300"/>
+              <a:buFont typeface="Calibri"/>
+              <a:buNone/>
+            </a:pPr>
+            <a:r>
+              <a:rPr b="0" i="0" lang="en-US" sz="1240" u="none" cap="none" strike="noStrike">
+                <a:solidFill>
+                  <a:srgbClr val="2F3A44"/>
+                </a:solidFill>
+                <a:latin typeface="Arial"/>
+                <a:ea typeface="Arial"/>
+                <a:cs typeface="Arial"/>
+                <a:sym typeface="Arial"/>
+              </a:rPr>
+              <a:t>+0,88</a:t>
             </a:r>
             <a:endParaRPr b="0" i="0" sz="1300" u="none" cap="none" strike="noStrike">
               <a:solidFill>
@@ -16128,7 +16584,7 @@
                 <a:cs typeface="Arial"/>
                 <a:sym typeface="Arial"/>
               </a:rPr>
-              <a:t>Calage 1990-2011, validation 2012-2019. Hors échantillon, les variantes indexées dominent nettement et Kenza simplifié diverge. Un score « sur historique » ne classe pas les modèles : Kenza indexé y affiche un R² de 1 sans qu'il mesure quoi que ce soit. Le choix final dépendra des données disponibles (prix ou non) et des besoins de scénarios.</a:t>
+              <a:t>Calage 1990-2011, validation 2012-2019. Hors échantillon, les variantes indexées dominent nettement ; Kenza simplifié, sur les coefficients calibrés du classeur Excel, ne fait pas mieux que la moyenne (R² ≈ 0). Un score « sur historique » ne classe pas les modèles : Kenza indexé y affiche un R² de 1 sans qu'il mesure quoi que ce soit. Le choix final dépendra des données disponibles (prix ou non) et des besoins de scénarios.</a:t>
             </a:r>
             <a:endParaRPr b="0" i="0" sz="1400" u="none" cap="none" strike="noStrike">
               <a:solidFill>
@@ -22014,6 +22470,3205 @@
       <p:sp>
         <p:nvSpPr>
           <p:cNvPr id="475" name="Google Shape;475;p20"/>
+          <p:cNvSpPr txBox="1"/>
+          <p:nvPr>
+            <p:ph idx="12" type="sldNum"/>
+          </p:nvPr>
+        </p:nvSpPr>
+        <p:spPr>
+          <a:xfrm>
+            <a:off x="11409045" y="6333134"/>
+            <a:ext cx="731700" cy="525000"/>
+          </a:xfrm>
+          <a:prstGeom prst="rect">
+            <a:avLst/>
+          </a:prstGeom>
+        </p:spPr>
+        <p:txBody>
+          <a:bodyPr anchorCtr="0" anchor="t" bIns="91425" lIns="91425" spcFirstLastPara="1" rIns="91425" wrap="square" tIns="91425">
+            <a:noAutofit/>
+          </a:bodyPr>
+          <a:lstStyle/>
+          <a:p>
+            <a:pPr indent="0" lvl="0" marL="0" rtl="0" algn="r">
+              <a:spcBef>
+                <a:spcPts val="0"/>
+              </a:spcBef>
+              <a:spcAft>
+                <a:spcPts val="0"/>
+              </a:spcAft>
+              <a:buNone/>
+            </a:pPr>
+            <a:fld id="{00000000-1234-1234-1234-123412341234}" type="slidenum">
+              <a:rPr lang="en-US"/>
+              <a:t>‹#›</a:t>
+            </a:fld>
+            <a:endParaRPr/>
+          </a:p>
+        </p:txBody>
+      </p:sp>
+    </p:spTree>
+  </p:cSld>
+  <p:clrMapOvr>
+    <a:masterClrMapping/>
+  </p:clrMapOvr>
+</p:sld>
+</file>
+
+<file path=ppt/slides/slide22.xml><?xml version="1.0" encoding="utf-8"?>
+<p:sld xmlns:a="http://schemas.openxmlformats.org/drawingml/2006/main" xmlns:r="http://schemas.openxmlformats.org/officeDocument/2006/relationships" xmlns:mc="http://schemas.openxmlformats.org/markup-compatibility/2006" xmlns:mv="urn:schemas-microsoft-com:mac:vml" xmlns:p="http://schemas.openxmlformats.org/presentationml/2006/main" xmlns:c="http://schemas.openxmlformats.org/drawingml/2006/chart" xmlns:dgm="http://schemas.openxmlformats.org/drawingml/2006/diagram" xmlns:o="urn:schemas-microsoft-com:office:office" xmlns:v="urn:schemas-microsoft-com:vml" xmlns:pvml="urn:schemas-microsoft-com:office:powerpoint" xmlns:com="http://schemas.openxmlformats.org/drawingml/2006/compatibility" xmlns:p14="http://schemas.microsoft.com/office/powerpoint/2010/main" xmlns:p15="http://schemas.microsoft.com/office/powerpoint/2012/main" xmlns:ahyp="http://schemas.microsoft.com/office/drawing/2018/hyperlinkcolor">
+  <p:cSld>
+    <p:bg>
+      <p:bgPr>
+        <a:solidFill>
+          <a:srgbClr val="FFFFFF"/>
+        </a:solidFill>
+      </p:bgPr>
+    </p:bg>
+    <p:spTree>
+      <p:nvGrpSpPr>
+        <p:cNvPr id="351" name="Shape 351"/>
+        <p:cNvGrpSpPr/>
+        <p:nvPr/>
+      </p:nvGrpSpPr>
+      <p:grpSpPr>
+        <a:xfrm>
+          <a:off x="0" y="0"/>
+          <a:ext cx="0" cy="0"/>
+          <a:chOff x="0" y="0"/>
+          <a:chExt cx="0" cy="0"/>
+        </a:xfrm>
+      </p:grpSpPr>
+      <p:sp>
+        <p:nvSpPr>
+          <p:cNvPr id="352" name="Google Shape;352;p15"/>
+          <p:cNvSpPr/>
+          <p:nvPr/>
+        </p:nvSpPr>
+        <p:spPr>
+          <a:xfrm>
+            <a:off x="457200" y="228600"/>
+            <a:ext cx="10972800" cy="274320"/>
+          </a:xfrm>
+          <a:prstGeom prst="rect">
+            <a:avLst/>
+          </a:prstGeom>
+          <a:noFill/>
+          <a:ln>
+            <a:noFill/>
+          </a:ln>
+        </p:spPr>
+        <p:txBody>
+          <a:bodyPr anchorCtr="0" anchor="ctr" bIns="27425" lIns="54850" spcFirstLastPara="1" rIns="54850" wrap="square" tIns="27425">
+            <a:noAutofit/>
+          </a:bodyPr>
+          <a:lstStyle/>
+          <a:p>
+            <a:pPr indent="0" lvl="0" marL="0" marR="0" rtl="0" algn="l">
+              <a:lnSpc>
+                <a:spcPct val="100000"/>
+              </a:lnSpc>
+              <a:spcBef>
+                <a:spcPts val="0"/>
+              </a:spcBef>
+              <a:spcAft>
+                <a:spcPts val="0"/>
+              </a:spcAft>
+              <a:buClr>
+                <a:srgbClr val="C9A227"/>
+              </a:buClr>
+              <a:buSzPts val="1200"/>
+              <a:buFont typeface="Calibri"/>
+              <a:buNone/>
+            </a:pPr>
+            <a:r>
+              <a:rPr b="1" i="0" lang="en-US" sz="1050" u="none" cap="none" strike="noStrike">
+                <a:solidFill>
+                  <a:srgbClr val="2B6F7F"/>
+                </a:solidFill>
+                <a:latin typeface="Arial"/>
+                <a:ea typeface="Arial"/>
+                <a:cs typeface="Arial"/>
+                <a:sym typeface="Arial"/>
+              </a:rPr>
+              <a:t>06  ·  VARIANTES</a:t>
+            </a:r>
+            <a:endParaRPr b="0" i="0" sz="1200" u="none" cap="none" strike="noStrike">
+              <a:solidFill>
+                <a:schemeClr val="dk1"/>
+              </a:solidFill>
+              <a:latin typeface="Calibri"/>
+              <a:ea typeface="Calibri"/>
+              <a:cs typeface="Calibri"/>
+              <a:sym typeface="Calibri"/>
+            </a:endParaRPr>
+          </a:p>
+        </p:txBody>
+      </p:sp>
+      <p:sp>
+        <p:nvSpPr>
+          <p:cNvPr id="353" name="Google Shape;353;p15"/>
+          <p:cNvSpPr/>
+          <p:nvPr/>
+        </p:nvSpPr>
+        <p:spPr>
+          <a:xfrm>
+            <a:off x="457200" y="502920"/>
+            <a:ext cx="10972800" cy="457200"/>
+          </a:xfrm>
+          <a:prstGeom prst="rect">
+            <a:avLst/>
+          </a:prstGeom>
+          <a:noFill/>
+          <a:ln>
+            <a:noFill/>
+          </a:ln>
+        </p:spPr>
+        <p:txBody>
+          <a:bodyPr anchorCtr="0" anchor="ctr" bIns="27425" lIns="54850" spcFirstLastPara="1" rIns="54850" wrap="square" tIns="27425">
+            <a:noAutofit/>
+          </a:bodyPr>
+          <a:lstStyle/>
+          <a:p>
+            <a:pPr indent="0" lvl="0" marL="0" marR="0" rtl="0" algn="l">
+              <a:lnSpc>
+                <a:spcPct val="100000"/>
+              </a:lnSpc>
+              <a:spcBef>
+                <a:spcPts val="0"/>
+              </a:spcBef>
+              <a:spcAft>
+                <a:spcPts val="0"/>
+              </a:spcAft>
+              <a:buClr>
+                <a:srgbClr val="021F47"/>
+              </a:buClr>
+              <a:buSzPts val="2800"/>
+              <a:buFont typeface="Arial"/>
+              <a:buNone/>
+            </a:pPr>
+            <a:r>
+              <a:rPr b="1" i="0" lang="en-US" sz="2700" u="none" cap="none" strike="noStrike">
+                <a:solidFill>
+                  <a:srgbClr val="17324D"/>
+                </a:solidFill>
+                <a:latin typeface="Arial"/>
+                <a:ea typeface="Arial"/>
+                <a:cs typeface="Arial"/>
+                <a:sym typeface="Arial"/>
+              </a:rPr>
+              <a:t>Validation croisée : backtest glissant</a:t>
+            </a:r>
+            <a:endParaRPr b="0" i="0" sz="2800" u="none" cap="none" strike="noStrike">
+              <a:solidFill>
+                <a:schemeClr val="dk1"/>
+              </a:solidFill>
+              <a:latin typeface="Calibri"/>
+              <a:ea typeface="Calibri"/>
+              <a:cs typeface="Calibri"/>
+              <a:sym typeface="Calibri"/>
+            </a:endParaRPr>
+          </a:p>
+        </p:txBody>
+      </p:sp>
+      <p:sp>
+        <p:nvSpPr>
+          <p:cNvPr id="354" name="Google Shape;354;p15"/>
+          <p:cNvSpPr/>
+          <p:nvPr/>
+        </p:nvSpPr>
+        <p:spPr>
+          <a:xfrm>
+            <a:off x="457200" y="1143000"/>
+            <a:ext cx="11247120" cy="457200"/>
+          </a:xfrm>
+          <a:prstGeom prst="rect">
+            <a:avLst/>
+          </a:prstGeom>
+          <a:solidFill>
+            <a:srgbClr val="E5EFF3"/>
+          </a:solidFill>
+          <a:ln>
+            <a:noFill/>
+          </a:ln>
+        </p:spPr>
+        <p:txBody>
+          <a:bodyPr anchorCtr="0" anchor="ctr" bIns="91425" lIns="91425" spcFirstLastPara="1" rIns="91425" wrap="square" tIns="91425">
+            <a:noAutofit/>
+          </a:bodyPr>
+          <a:lstStyle/>
+          <a:p>
+            <a:pPr indent="0" lvl="0" marL="0" marR="0" rtl="0" algn="l">
+              <a:lnSpc>
+                <a:spcPct val="100000"/>
+              </a:lnSpc>
+              <a:spcBef>
+                <a:spcPts val="0"/>
+              </a:spcBef>
+              <a:spcAft>
+                <a:spcPts val="0"/>
+              </a:spcAft>
+              <a:buClr>
+                <a:srgbClr val="000000"/>
+              </a:buClr>
+              <a:buSzPts val="1400"/>
+              <a:buFont typeface="Arial"/>
+              <a:buNone/>
+            </a:pPr>
+            <a:r>
+              <a:t/>
+            </a:r>
+            <a:endParaRPr b="0" i="0" sz="1400" u="none" cap="none" strike="noStrike">
+              <a:solidFill>
+                <a:srgbClr val="000000"/>
+              </a:solidFill>
+              <a:latin typeface="Arial"/>
+              <a:ea typeface="Arial"/>
+              <a:cs typeface="Arial"/>
+              <a:sym typeface="Arial"/>
+            </a:endParaRPr>
+          </a:p>
+        </p:txBody>
+      </p:sp>
+      <p:sp>
+        <p:nvSpPr>
+          <p:cNvPr id="355" name="Google Shape;355;p15"/>
+          <p:cNvSpPr/>
+          <p:nvPr/>
+        </p:nvSpPr>
+        <p:spPr>
+          <a:xfrm>
+            <a:off x="457200" y="1188720"/>
+            <a:ext cx="2926080" cy="365760"/>
+          </a:xfrm>
+          <a:prstGeom prst="rect">
+            <a:avLst/>
+          </a:prstGeom>
+          <a:noFill/>
+          <a:ln>
+            <a:noFill/>
+          </a:ln>
+        </p:spPr>
+        <p:txBody>
+          <a:bodyPr anchorCtr="0" anchor="ctr" bIns="27425" lIns="54850" spcFirstLastPara="1" rIns="54850" wrap="square" tIns="27425">
+            <a:noAutofit/>
+          </a:bodyPr>
+          <a:lstStyle/>
+          <a:p>
+            <a:pPr indent="0" lvl="0" marL="0" marR="0" rtl="0" algn="ctr">
+              <a:lnSpc>
+                <a:spcPct val="100000"/>
+              </a:lnSpc>
+              <a:spcBef>
+                <a:spcPts val="0"/>
+              </a:spcBef>
+              <a:spcAft>
+                <a:spcPts val="0"/>
+              </a:spcAft>
+              <a:buClr>
+                <a:srgbClr val="FFFFFF"/>
+              </a:buClr>
+              <a:buSzPts val="1300"/>
+              <a:buFont typeface="Calibri"/>
+              <a:buNone/>
+            </a:pPr>
+            <a:r>
+              <a:rPr b="1" i="0" lang="en-US" sz="1280" u="none" cap="none" strike="noStrike">
+                <a:solidFill>
+                  <a:srgbClr val="17324D"/>
+                </a:solidFill>
+                <a:latin typeface="Arial"/>
+                <a:ea typeface="Arial"/>
+                <a:cs typeface="Arial"/>
+                <a:sym typeface="Arial"/>
+              </a:rPr>
+              <a:t>Modèle</a:t>
+            </a:r>
+            <a:endParaRPr b="0" i="0" sz="1300" u="none" cap="none" strike="noStrike">
+              <a:solidFill>
+                <a:schemeClr val="dk1"/>
+              </a:solidFill>
+              <a:latin typeface="Calibri"/>
+              <a:ea typeface="Calibri"/>
+              <a:cs typeface="Calibri"/>
+              <a:sym typeface="Calibri"/>
+            </a:endParaRPr>
+          </a:p>
+        </p:txBody>
+      </p:sp>
+      <p:sp>
+        <p:nvSpPr>
+          <p:cNvPr id="356" name="Google Shape;356;p15"/>
+          <p:cNvSpPr/>
+          <p:nvPr/>
+        </p:nvSpPr>
+        <p:spPr>
+          <a:xfrm>
+            <a:off x="3383280" y="1188720"/>
+            <a:ext cx="1645920" cy="365760"/>
+          </a:xfrm>
+          <a:prstGeom prst="rect">
+            <a:avLst/>
+          </a:prstGeom>
+          <a:noFill/>
+          <a:ln>
+            <a:noFill/>
+          </a:ln>
+        </p:spPr>
+        <p:txBody>
+          <a:bodyPr anchorCtr="0" anchor="ctr" bIns="27425" lIns="54850" spcFirstLastPara="1" rIns="54850" wrap="square" tIns="27425">
+            <a:noAutofit/>
+          </a:bodyPr>
+          <a:lstStyle/>
+          <a:p>
+            <a:pPr indent="0" lvl="0" marL="0" marR="0" rtl="0" algn="ctr">
+              <a:lnSpc>
+                <a:spcPct val="100000"/>
+              </a:lnSpc>
+              <a:spcBef>
+                <a:spcPts val="0"/>
+              </a:spcBef>
+              <a:spcAft>
+                <a:spcPts val="0"/>
+              </a:spcAft>
+              <a:buClr>
+                <a:srgbClr val="FFFFFF"/>
+              </a:buClr>
+              <a:buSzPts val="1300"/>
+              <a:buFont typeface="Calibri"/>
+              <a:buNone/>
+            </a:pPr>
+            <a:r>
+              <a:rPr b="1" i="0" lang="en-US" sz="1280" u="none" cap="none" strike="noStrike">
+                <a:solidFill>
+                  <a:srgbClr val="17324D"/>
+                </a:solidFill>
+                <a:latin typeface="Arial"/>
+                <a:ea typeface="Arial"/>
+                <a:cs typeface="Arial"/>
+                <a:sym typeface="Arial"/>
+              </a:rPr>
+              <a:t>RMSE</a:t>
+            </a:r>
+            <a:endParaRPr b="0" i="0" sz="1300" u="none" cap="none" strike="noStrike">
+              <a:solidFill>
+                <a:schemeClr val="dk1"/>
+              </a:solidFill>
+              <a:latin typeface="Calibri"/>
+              <a:ea typeface="Calibri"/>
+              <a:cs typeface="Calibri"/>
+              <a:sym typeface="Calibri"/>
+            </a:endParaRPr>
+          </a:p>
+        </p:txBody>
+      </p:sp>
+      <p:sp>
+        <p:nvSpPr>
+          <p:cNvPr id="357" name="Google Shape;357;p15"/>
+          <p:cNvSpPr/>
+          <p:nvPr/>
+        </p:nvSpPr>
+        <p:spPr>
+          <a:xfrm>
+            <a:off x="5029200" y="1188720"/>
+            <a:ext cx="1645920" cy="365760"/>
+          </a:xfrm>
+          <a:prstGeom prst="rect">
+            <a:avLst/>
+          </a:prstGeom>
+          <a:noFill/>
+          <a:ln>
+            <a:noFill/>
+          </a:ln>
+        </p:spPr>
+        <p:txBody>
+          <a:bodyPr anchorCtr="0" anchor="ctr" bIns="27425" lIns="54850" spcFirstLastPara="1" rIns="54850" wrap="square" tIns="27425">
+            <a:noAutofit/>
+          </a:bodyPr>
+          <a:lstStyle/>
+          <a:p>
+            <a:pPr indent="0" lvl="0" marL="0" marR="0" rtl="0" algn="ctr">
+              <a:lnSpc>
+                <a:spcPct val="100000"/>
+              </a:lnSpc>
+              <a:spcBef>
+                <a:spcPts val="0"/>
+              </a:spcBef>
+              <a:spcAft>
+                <a:spcPts val="0"/>
+              </a:spcAft>
+              <a:buClr>
+                <a:srgbClr val="FFFFFF"/>
+              </a:buClr>
+              <a:buSzPts val="1300"/>
+              <a:buFont typeface="Calibri"/>
+              <a:buNone/>
+            </a:pPr>
+            <a:r>
+              <a:rPr b="1" i="0" lang="en-US" sz="1280" u="none" cap="none" strike="noStrike">
+                <a:solidFill>
+                  <a:srgbClr val="17324D"/>
+                </a:solidFill>
+                <a:latin typeface="Arial"/>
+                <a:ea typeface="Arial"/>
+                <a:cs typeface="Arial"/>
+                <a:sym typeface="Arial"/>
+              </a:rPr>
+              <a:t>MAE</a:t>
+            </a:r>
+            <a:endParaRPr b="0" i="0" sz="1300" u="none" cap="none" strike="noStrike">
+              <a:solidFill>
+                <a:schemeClr val="dk1"/>
+              </a:solidFill>
+              <a:latin typeface="Calibri"/>
+              <a:ea typeface="Calibri"/>
+              <a:cs typeface="Calibri"/>
+              <a:sym typeface="Calibri"/>
+            </a:endParaRPr>
+          </a:p>
+        </p:txBody>
+      </p:sp>
+      <p:sp>
+        <p:nvSpPr>
+          <p:cNvPr id="358" name="Google Shape;358;p15"/>
+          <p:cNvSpPr/>
+          <p:nvPr/>
+        </p:nvSpPr>
+        <p:spPr>
+          <a:xfrm>
+            <a:off x="6675120" y="1188720"/>
+            <a:ext cx="1645920" cy="365760"/>
+          </a:xfrm>
+          <a:prstGeom prst="rect">
+            <a:avLst/>
+          </a:prstGeom>
+          <a:noFill/>
+          <a:ln>
+            <a:noFill/>
+          </a:ln>
+        </p:spPr>
+        <p:txBody>
+          <a:bodyPr anchorCtr="0" anchor="ctr" bIns="27425" lIns="54850" spcFirstLastPara="1" rIns="54850" wrap="square" tIns="27425">
+            <a:noAutofit/>
+          </a:bodyPr>
+          <a:lstStyle/>
+          <a:p>
+            <a:pPr indent="0" lvl="0" marL="0" marR="0" rtl="0" algn="ctr">
+              <a:lnSpc>
+                <a:spcPct val="100000"/>
+              </a:lnSpc>
+              <a:spcBef>
+                <a:spcPts val="0"/>
+              </a:spcBef>
+              <a:spcAft>
+                <a:spcPts val="0"/>
+              </a:spcAft>
+              <a:buClr>
+                <a:srgbClr val="FFFFFF"/>
+              </a:buClr>
+              <a:buSzPts val="1300"/>
+              <a:buFont typeface="Calibri"/>
+              <a:buNone/>
+            </a:pPr>
+            <a:r>
+              <a:rPr b="1" i="0" lang="en-US" sz="1280" u="none" cap="none" strike="noStrike">
+                <a:solidFill>
+                  <a:srgbClr val="17324D"/>
+                </a:solidFill>
+                <a:latin typeface="Arial"/>
+                <a:ea typeface="Arial"/>
+                <a:cs typeface="Arial"/>
+                <a:sym typeface="Arial"/>
+              </a:rPr>
+              <a:t>MAPE</a:t>
+            </a:r>
+            <a:endParaRPr b="0" i="0" sz="1300" u="none" cap="none" strike="noStrike">
+              <a:solidFill>
+                <a:schemeClr val="dk1"/>
+              </a:solidFill>
+              <a:latin typeface="Calibri"/>
+              <a:ea typeface="Calibri"/>
+              <a:cs typeface="Calibri"/>
+              <a:sym typeface="Calibri"/>
+            </a:endParaRPr>
+          </a:p>
+        </p:txBody>
+      </p:sp>
+      <p:sp>
+        <p:nvSpPr>
+          <p:cNvPr id="359" name="Google Shape;359;p15"/>
+          <p:cNvSpPr/>
+          <p:nvPr/>
+        </p:nvSpPr>
+        <p:spPr>
+          <a:xfrm>
+            <a:off x="8321040" y="1188720"/>
+            <a:ext cx="1371600" cy="365760"/>
+          </a:xfrm>
+          <a:prstGeom prst="rect">
+            <a:avLst/>
+          </a:prstGeom>
+          <a:noFill/>
+          <a:ln>
+            <a:noFill/>
+          </a:ln>
+        </p:spPr>
+        <p:txBody>
+          <a:bodyPr anchorCtr="0" anchor="ctr" bIns="27425" lIns="54850" spcFirstLastPara="1" rIns="54850" wrap="square" tIns="27425">
+            <a:noAutofit/>
+          </a:bodyPr>
+          <a:lstStyle/>
+          <a:p>
+            <a:pPr indent="0" lvl="0" marL="0" marR="0" rtl="0" algn="ctr">
+              <a:lnSpc>
+                <a:spcPct val="100000"/>
+              </a:lnSpc>
+              <a:spcBef>
+                <a:spcPts val="0"/>
+              </a:spcBef>
+              <a:spcAft>
+                <a:spcPts val="0"/>
+              </a:spcAft>
+              <a:buClr>
+                <a:srgbClr val="FFFFFF"/>
+              </a:buClr>
+              <a:buSzPts val="1300"/>
+              <a:buFont typeface="Calibri"/>
+              <a:buNone/>
+            </a:pPr>
+            <a:r>
+              <a:rPr b="1" i="0" lang="en-US" sz="1280" u="none" cap="none" strike="noStrike">
+                <a:solidFill>
+                  <a:srgbClr val="17324D"/>
+                </a:solidFill>
+                <a:latin typeface="Arial"/>
+                <a:ea typeface="Arial"/>
+                <a:cs typeface="Arial"/>
+                <a:sym typeface="Arial"/>
+              </a:rPr>
+              <a:t>R² glissant</a:t>
+            </a:r>
+            <a:endParaRPr b="0" i="0" sz="1300" u="none" cap="none" strike="noStrike">
+              <a:solidFill>
+                <a:schemeClr val="dk1"/>
+              </a:solidFill>
+              <a:latin typeface="Calibri"/>
+              <a:ea typeface="Calibri"/>
+              <a:cs typeface="Calibri"/>
+              <a:sym typeface="Calibri"/>
+            </a:endParaRPr>
+          </a:p>
+        </p:txBody>
+      </p:sp>
+      <p:sp>
+        <p:nvSpPr>
+          <p:cNvPr id="360" name="Google Shape;360;p15"/>
+          <p:cNvSpPr/>
+          <p:nvPr/>
+        </p:nvSpPr>
+        <p:spPr>
+          <a:xfrm>
+            <a:off x="9692640" y="1188720"/>
+            <a:ext cx="2011680" cy="365760"/>
+          </a:xfrm>
+          <a:prstGeom prst="rect">
+            <a:avLst/>
+          </a:prstGeom>
+          <a:noFill/>
+          <a:ln>
+            <a:noFill/>
+          </a:ln>
+        </p:spPr>
+        <p:txBody>
+          <a:bodyPr anchorCtr="0" anchor="ctr" bIns="27425" lIns="54850" spcFirstLastPara="1" rIns="54850" wrap="square" tIns="27425">
+            <a:noAutofit/>
+          </a:bodyPr>
+          <a:lstStyle/>
+          <a:p>
+            <a:pPr indent="0" lvl="0" marL="0" marR="0" rtl="0" algn="ctr">
+              <a:lnSpc>
+                <a:spcPct val="100000"/>
+              </a:lnSpc>
+              <a:spcBef>
+                <a:spcPts val="0"/>
+              </a:spcBef>
+              <a:spcAft>
+                <a:spcPts val="0"/>
+              </a:spcAft>
+              <a:buClr>
+                <a:srgbClr val="FFFFFF"/>
+              </a:buClr>
+              <a:buSzPts val="1300"/>
+              <a:buFont typeface="Calibri"/>
+              <a:buNone/>
+            </a:pPr>
+            <a:r>
+              <a:rPr b="1" i="0" lang="en-US" sz="1280" u="none" cap="none" strike="noStrike">
+                <a:solidFill>
+                  <a:srgbClr val="17324D"/>
+                </a:solidFill>
+                <a:latin typeface="Arial"/>
+                <a:ea typeface="Arial"/>
+                <a:cs typeface="Arial"/>
+                <a:sym typeface="Arial"/>
+              </a:rPr>
+              <a:t>R² 1 coupure</a:t>
+            </a:r>
+            <a:endParaRPr b="0" i="0" sz="1300" u="none" cap="none" strike="noStrike">
+              <a:solidFill>
+                <a:schemeClr val="dk1"/>
+              </a:solidFill>
+              <a:latin typeface="Calibri"/>
+              <a:ea typeface="Calibri"/>
+              <a:cs typeface="Calibri"/>
+              <a:sym typeface="Calibri"/>
+            </a:endParaRPr>
+          </a:p>
+        </p:txBody>
+      </p:sp>
+      <p:sp>
+        <p:nvSpPr>
+          <p:cNvPr id="361" name="Google Shape;361;p15"/>
+          <p:cNvSpPr/>
+          <p:nvPr/>
+        </p:nvSpPr>
+        <p:spPr>
+          <a:xfrm>
+            <a:off x="457200" y="1600200"/>
+            <a:ext cx="11247120" cy="438912"/>
+          </a:xfrm>
+          <a:prstGeom prst="rect">
+            <a:avLst/>
+          </a:prstGeom>
+          <a:solidFill>
+            <a:srgbClr val="E5EFF3"/>
+          </a:solidFill>
+          <a:ln>
+            <a:noFill/>
+          </a:ln>
+        </p:spPr>
+        <p:txBody>
+          <a:bodyPr anchorCtr="0" anchor="ctr" bIns="91425" lIns="91425" spcFirstLastPara="1" rIns="91425" wrap="square" tIns="91425">
+            <a:noAutofit/>
+          </a:bodyPr>
+          <a:lstStyle/>
+          <a:p>
+            <a:pPr indent="0" lvl="0" marL="0" marR="0" rtl="0" algn="l">
+              <a:lnSpc>
+                <a:spcPct val="100000"/>
+              </a:lnSpc>
+              <a:spcBef>
+                <a:spcPts val="0"/>
+              </a:spcBef>
+              <a:spcAft>
+                <a:spcPts val="0"/>
+              </a:spcAft>
+              <a:buClr>
+                <a:srgbClr val="000000"/>
+              </a:buClr>
+              <a:buSzPts val="1400"/>
+              <a:buFont typeface="Arial"/>
+              <a:buNone/>
+            </a:pPr>
+            <a:r>
+              <a:t/>
+            </a:r>
+            <a:endParaRPr b="0" i="0" sz="1400" u="none" cap="none" strike="noStrike">
+              <a:solidFill>
+                <a:srgbClr val="000000"/>
+              </a:solidFill>
+              <a:latin typeface="Arial"/>
+              <a:ea typeface="Arial"/>
+              <a:cs typeface="Arial"/>
+              <a:sym typeface="Arial"/>
+            </a:endParaRPr>
+          </a:p>
+        </p:txBody>
+      </p:sp>
+      <p:sp>
+        <p:nvSpPr>
+          <p:cNvPr id="362" name="Google Shape;362;p15"/>
+          <p:cNvSpPr/>
+          <p:nvPr/>
+        </p:nvSpPr>
+        <p:spPr>
+          <a:xfrm>
+            <a:off x="457200" y="1600200"/>
+            <a:ext cx="2926080" cy="438912"/>
+          </a:xfrm>
+          <a:prstGeom prst="rect">
+            <a:avLst/>
+          </a:prstGeom>
+          <a:noFill/>
+          <a:ln>
+            <a:noFill/>
+          </a:ln>
+        </p:spPr>
+        <p:txBody>
+          <a:bodyPr anchorCtr="0" anchor="ctr" bIns="27425" lIns="54850" spcFirstLastPara="1" rIns="54850" wrap="square" tIns="27425">
+            <a:noAutofit/>
+          </a:bodyPr>
+          <a:lstStyle/>
+          <a:p>
+            <a:pPr indent="0" lvl="0" marL="0" marR="0" rtl="0" algn="ctr">
+              <a:lnSpc>
+                <a:spcPct val="100000"/>
+              </a:lnSpc>
+              <a:spcBef>
+                <a:spcPts val="0"/>
+              </a:spcBef>
+              <a:spcAft>
+                <a:spcPts val="0"/>
+              </a:spcAft>
+              <a:buClr>
+                <a:srgbClr val="1F2937"/>
+              </a:buClr>
+              <a:buSzPts val="1300"/>
+              <a:buFont typeface="Calibri"/>
+              <a:buNone/>
+            </a:pPr>
+            <a:r>
+              <a:rPr b="0" i="0" lang="en-US" sz="1240" u="none" cap="none" strike="noStrike">
+                <a:solidFill>
+                  <a:srgbClr val="2F3A44"/>
+                </a:solidFill>
+                <a:latin typeface="Arial"/>
+                <a:ea typeface="Arial"/>
+                <a:cs typeface="Arial"/>
+                <a:sym typeface="Arial"/>
+              </a:rPr>
+              <a:t>Kenza complet</a:t>
+            </a:r>
+            <a:endParaRPr b="0" i="0" sz="1300" u="none" cap="none" strike="noStrike">
+              <a:solidFill>
+                <a:schemeClr val="dk1"/>
+              </a:solidFill>
+              <a:latin typeface="Calibri"/>
+              <a:ea typeface="Calibri"/>
+              <a:cs typeface="Calibri"/>
+              <a:sym typeface="Calibri"/>
+            </a:endParaRPr>
+          </a:p>
+        </p:txBody>
+      </p:sp>
+      <p:sp>
+        <p:nvSpPr>
+          <p:cNvPr id="363" name="Google Shape;363;p15"/>
+          <p:cNvSpPr/>
+          <p:nvPr/>
+        </p:nvSpPr>
+        <p:spPr>
+          <a:xfrm>
+            <a:off x="3383280" y="1600200"/>
+            <a:ext cx="1645920" cy="438912"/>
+          </a:xfrm>
+          <a:prstGeom prst="rect">
+            <a:avLst/>
+          </a:prstGeom>
+          <a:noFill/>
+          <a:ln>
+            <a:noFill/>
+          </a:ln>
+        </p:spPr>
+        <p:txBody>
+          <a:bodyPr anchorCtr="0" anchor="ctr" bIns="27425" lIns="54850" spcFirstLastPara="1" rIns="54850" wrap="square" tIns="27425">
+            <a:noAutofit/>
+          </a:bodyPr>
+          <a:lstStyle/>
+          <a:p>
+            <a:pPr indent="0" lvl="0" marL="0" marR="0" rtl="0" algn="ctr">
+              <a:lnSpc>
+                <a:spcPct val="100000"/>
+              </a:lnSpc>
+              <a:spcBef>
+                <a:spcPts val="0"/>
+              </a:spcBef>
+              <a:spcAft>
+                <a:spcPts val="0"/>
+              </a:spcAft>
+              <a:buClr>
+                <a:srgbClr val="1F2937"/>
+              </a:buClr>
+              <a:buSzPts val="1300"/>
+              <a:buFont typeface="Calibri"/>
+              <a:buNone/>
+            </a:pPr>
+            <a:r>
+              <a:rPr b="0" i="0" lang="en-US" sz="1240" u="none" cap="none" strike="noStrike">
+                <a:solidFill>
+                  <a:srgbClr val="2F3A44"/>
+                </a:solidFill>
+                <a:latin typeface="Arial"/>
+                <a:ea typeface="Arial"/>
+                <a:cs typeface="Arial"/>
+                <a:sym typeface="Arial"/>
+              </a:rPr>
+              <a:t>6 932</a:t>
+            </a:r>
+            <a:endParaRPr b="0" i="0" sz="1300" u="none" cap="none" strike="noStrike">
+              <a:solidFill>
+                <a:schemeClr val="dk1"/>
+              </a:solidFill>
+              <a:latin typeface="Calibri"/>
+              <a:ea typeface="Calibri"/>
+              <a:cs typeface="Calibri"/>
+              <a:sym typeface="Calibri"/>
+            </a:endParaRPr>
+          </a:p>
+        </p:txBody>
+      </p:sp>
+      <p:sp>
+        <p:nvSpPr>
+          <p:cNvPr id="364" name="Google Shape;364;p15"/>
+          <p:cNvSpPr/>
+          <p:nvPr/>
+        </p:nvSpPr>
+        <p:spPr>
+          <a:xfrm>
+            <a:off x="5029200" y="1600200"/>
+            <a:ext cx="1645920" cy="438912"/>
+          </a:xfrm>
+          <a:prstGeom prst="rect">
+            <a:avLst/>
+          </a:prstGeom>
+          <a:noFill/>
+          <a:ln>
+            <a:noFill/>
+          </a:ln>
+        </p:spPr>
+        <p:txBody>
+          <a:bodyPr anchorCtr="0" anchor="ctr" bIns="27425" lIns="54850" spcFirstLastPara="1" rIns="54850" wrap="square" tIns="27425">
+            <a:noAutofit/>
+          </a:bodyPr>
+          <a:lstStyle/>
+          <a:p>
+            <a:pPr indent="0" lvl="0" marL="0" marR="0" rtl="0" algn="ctr">
+              <a:lnSpc>
+                <a:spcPct val="100000"/>
+              </a:lnSpc>
+              <a:spcBef>
+                <a:spcPts val="0"/>
+              </a:spcBef>
+              <a:spcAft>
+                <a:spcPts val="0"/>
+              </a:spcAft>
+              <a:buClr>
+                <a:srgbClr val="1F2937"/>
+              </a:buClr>
+              <a:buSzPts val="1300"/>
+              <a:buFont typeface="Calibri"/>
+              <a:buNone/>
+            </a:pPr>
+            <a:r>
+              <a:rPr b="0" i="0" lang="en-US" sz="1240" u="none" cap="none" strike="noStrike">
+                <a:solidFill>
+                  <a:srgbClr val="2F3A44"/>
+                </a:solidFill>
+                <a:latin typeface="Arial"/>
+                <a:ea typeface="Arial"/>
+                <a:cs typeface="Arial"/>
+                <a:sym typeface="Arial"/>
+              </a:rPr>
+              <a:t>4 806</a:t>
+            </a:r>
+            <a:endParaRPr b="0" i="0" sz="1300" u="none" cap="none" strike="noStrike">
+              <a:solidFill>
+                <a:schemeClr val="dk1"/>
+              </a:solidFill>
+              <a:latin typeface="Calibri"/>
+              <a:ea typeface="Calibri"/>
+              <a:cs typeface="Calibri"/>
+              <a:sym typeface="Calibri"/>
+            </a:endParaRPr>
+          </a:p>
+        </p:txBody>
+      </p:sp>
+      <p:sp>
+        <p:nvSpPr>
+          <p:cNvPr id="365" name="Google Shape;365;p15"/>
+          <p:cNvSpPr/>
+          <p:nvPr/>
+        </p:nvSpPr>
+        <p:spPr>
+          <a:xfrm>
+            <a:off x="6675120" y="1600200"/>
+            <a:ext cx="1645920" cy="438912"/>
+          </a:xfrm>
+          <a:prstGeom prst="rect">
+            <a:avLst/>
+          </a:prstGeom>
+          <a:noFill/>
+          <a:ln>
+            <a:noFill/>
+          </a:ln>
+        </p:spPr>
+        <p:txBody>
+          <a:bodyPr anchorCtr="0" anchor="ctr" bIns="27425" lIns="54850" spcFirstLastPara="1" rIns="54850" wrap="square" tIns="27425">
+            <a:noAutofit/>
+          </a:bodyPr>
+          <a:lstStyle/>
+          <a:p>
+            <a:pPr indent="0" lvl="0" marL="0" marR="0" rtl="0" algn="ctr">
+              <a:lnSpc>
+                <a:spcPct val="100000"/>
+              </a:lnSpc>
+              <a:spcBef>
+                <a:spcPts val="0"/>
+              </a:spcBef>
+              <a:spcAft>
+                <a:spcPts val="0"/>
+              </a:spcAft>
+              <a:buClr>
+                <a:srgbClr val="1F2937"/>
+              </a:buClr>
+              <a:buSzPts val="1300"/>
+              <a:buFont typeface="Calibri"/>
+              <a:buNone/>
+            </a:pPr>
+            <a:r>
+              <a:rPr b="0" i="0" lang="en-US" sz="1240" u="none" cap="none" strike="noStrike">
+                <a:solidFill>
+                  <a:srgbClr val="2F3A44"/>
+                </a:solidFill>
+                <a:latin typeface="Arial"/>
+                <a:ea typeface="Arial"/>
+                <a:cs typeface="Arial"/>
+                <a:sym typeface="Arial"/>
+              </a:rPr>
+              <a:t>6,3 %</a:t>
+            </a:r>
+            <a:endParaRPr b="0" i="0" sz="1300" u="none" cap="none" strike="noStrike">
+              <a:solidFill>
+                <a:schemeClr val="dk1"/>
+              </a:solidFill>
+              <a:latin typeface="Calibri"/>
+              <a:ea typeface="Calibri"/>
+              <a:cs typeface="Calibri"/>
+              <a:sym typeface="Calibri"/>
+            </a:endParaRPr>
+          </a:p>
+        </p:txBody>
+      </p:sp>
+      <p:sp>
+        <p:nvSpPr>
+          <p:cNvPr id="366" name="Google Shape;366;p15"/>
+          <p:cNvSpPr/>
+          <p:nvPr/>
+        </p:nvSpPr>
+        <p:spPr>
+          <a:xfrm>
+            <a:off x="8321040" y="1600200"/>
+            <a:ext cx="1371600" cy="438912"/>
+          </a:xfrm>
+          <a:prstGeom prst="rect">
+            <a:avLst/>
+          </a:prstGeom>
+          <a:noFill/>
+          <a:ln>
+            <a:noFill/>
+          </a:ln>
+        </p:spPr>
+        <p:txBody>
+          <a:bodyPr anchorCtr="0" anchor="ctr" bIns="27425" lIns="54850" spcFirstLastPara="1" rIns="54850" wrap="square" tIns="27425">
+            <a:noAutofit/>
+          </a:bodyPr>
+          <a:lstStyle/>
+          <a:p>
+            <a:pPr indent="0" lvl="0" marL="0" marR="0" rtl="0" algn="ctr">
+              <a:lnSpc>
+                <a:spcPct val="100000"/>
+              </a:lnSpc>
+              <a:spcBef>
+                <a:spcPts val="0"/>
+              </a:spcBef>
+              <a:spcAft>
+                <a:spcPts val="0"/>
+              </a:spcAft>
+              <a:buClr>
+                <a:srgbClr val="1F2937"/>
+              </a:buClr>
+              <a:buSzPts val="1300"/>
+              <a:buFont typeface="Calibri"/>
+              <a:buNone/>
+            </a:pPr>
+            <a:r>
+              <a:rPr b="0" i="0" lang="en-US" sz="1240" u="none" cap="none" strike="noStrike">
+                <a:solidFill>
+                  <a:srgbClr val="2F3A44"/>
+                </a:solidFill>
+                <a:latin typeface="Arial"/>
+                <a:ea typeface="Arial"/>
+                <a:cs typeface="Arial"/>
+                <a:sym typeface="Arial"/>
+              </a:rPr>
+              <a:t>+0,60</a:t>
+            </a:r>
+            <a:endParaRPr b="0" i="0" sz="1300" u="none" cap="none" strike="noStrike">
+              <a:solidFill>
+                <a:schemeClr val="dk1"/>
+              </a:solidFill>
+              <a:latin typeface="Calibri"/>
+              <a:ea typeface="Calibri"/>
+              <a:cs typeface="Calibri"/>
+              <a:sym typeface="Calibri"/>
+            </a:endParaRPr>
+          </a:p>
+        </p:txBody>
+      </p:sp>
+      <p:sp>
+        <p:nvSpPr>
+          <p:cNvPr id="367" name="Google Shape;367;p15"/>
+          <p:cNvSpPr/>
+          <p:nvPr/>
+        </p:nvSpPr>
+        <p:spPr>
+          <a:xfrm>
+            <a:off x="9692640" y="1600200"/>
+            <a:ext cx="2011680" cy="438912"/>
+          </a:xfrm>
+          <a:prstGeom prst="rect">
+            <a:avLst/>
+          </a:prstGeom>
+          <a:noFill/>
+          <a:ln>
+            <a:noFill/>
+          </a:ln>
+        </p:spPr>
+        <p:txBody>
+          <a:bodyPr anchorCtr="0" anchor="ctr" bIns="27425" lIns="54850" spcFirstLastPara="1" rIns="54850" wrap="square" tIns="27425">
+            <a:noAutofit/>
+          </a:bodyPr>
+          <a:lstStyle/>
+          <a:p>
+            <a:pPr indent="0" lvl="0" marL="0" marR="0" rtl="0" algn="ctr">
+              <a:lnSpc>
+                <a:spcPct val="100000"/>
+              </a:lnSpc>
+              <a:spcBef>
+                <a:spcPts val="0"/>
+              </a:spcBef>
+              <a:spcAft>
+                <a:spcPts val="0"/>
+              </a:spcAft>
+              <a:buClr>
+                <a:srgbClr val="1F2937"/>
+              </a:buClr>
+              <a:buSzPts val="1300"/>
+              <a:buFont typeface="Calibri"/>
+              <a:buNone/>
+            </a:pPr>
+            <a:r>
+              <a:rPr b="0" i="0" lang="en-US" sz="1240" u="none" cap="none" strike="noStrike">
+                <a:solidFill>
+                  <a:srgbClr val="2F3A44"/>
+                </a:solidFill>
+                <a:latin typeface="Arial"/>
+                <a:ea typeface="Arial"/>
+                <a:cs typeface="Arial"/>
+                <a:sym typeface="Arial"/>
+              </a:rPr>
+              <a:t>-0,82</a:t>
+            </a:r>
+            <a:endParaRPr b="0" i="0" sz="1300" u="none" cap="none" strike="noStrike">
+              <a:solidFill>
+                <a:schemeClr val="dk1"/>
+              </a:solidFill>
+              <a:latin typeface="Calibri"/>
+              <a:ea typeface="Calibri"/>
+              <a:cs typeface="Calibri"/>
+              <a:sym typeface="Calibri"/>
+            </a:endParaRPr>
+          </a:p>
+        </p:txBody>
+      </p:sp>
+      <p:sp>
+        <p:nvSpPr>
+          <p:cNvPr id="368" name="Google Shape;368;p15"/>
+          <p:cNvSpPr/>
+          <p:nvPr/>
+        </p:nvSpPr>
+        <p:spPr>
+          <a:xfrm>
+            <a:off x="457200" y="2039112"/>
+            <a:ext cx="11247120" cy="438912"/>
+          </a:xfrm>
+          <a:prstGeom prst="rect">
+            <a:avLst/>
+          </a:prstGeom>
+          <a:solidFill>
+            <a:srgbClr val="FFFFFF"/>
+          </a:solidFill>
+          <a:ln>
+            <a:noFill/>
+          </a:ln>
+        </p:spPr>
+        <p:txBody>
+          <a:bodyPr anchorCtr="0" anchor="ctr" bIns="91425" lIns="91425" spcFirstLastPara="1" rIns="91425" wrap="square" tIns="91425">
+            <a:noAutofit/>
+          </a:bodyPr>
+          <a:lstStyle/>
+          <a:p>
+            <a:pPr indent="0" lvl="0" marL="0" marR="0" rtl="0" algn="l">
+              <a:lnSpc>
+                <a:spcPct val="100000"/>
+              </a:lnSpc>
+              <a:spcBef>
+                <a:spcPts val="0"/>
+              </a:spcBef>
+              <a:spcAft>
+                <a:spcPts val="0"/>
+              </a:spcAft>
+              <a:buClr>
+                <a:srgbClr val="000000"/>
+              </a:buClr>
+              <a:buSzPts val="1400"/>
+              <a:buFont typeface="Arial"/>
+              <a:buNone/>
+            </a:pPr>
+            <a:r>
+              <a:t/>
+            </a:r>
+            <a:endParaRPr b="0" i="0" sz="1400" u="none" cap="none" strike="noStrike">
+              <a:solidFill>
+                <a:srgbClr val="000000"/>
+              </a:solidFill>
+              <a:latin typeface="Arial"/>
+              <a:ea typeface="Arial"/>
+              <a:cs typeface="Arial"/>
+              <a:sym typeface="Arial"/>
+            </a:endParaRPr>
+          </a:p>
+        </p:txBody>
+      </p:sp>
+      <p:sp>
+        <p:nvSpPr>
+          <p:cNvPr id="369" name="Google Shape;369;p15"/>
+          <p:cNvSpPr/>
+          <p:nvPr/>
+        </p:nvSpPr>
+        <p:spPr>
+          <a:xfrm>
+            <a:off x="457200" y="2039112"/>
+            <a:ext cx="2926080" cy="438912"/>
+          </a:xfrm>
+          <a:prstGeom prst="rect">
+            <a:avLst/>
+          </a:prstGeom>
+          <a:noFill/>
+          <a:ln>
+            <a:noFill/>
+          </a:ln>
+        </p:spPr>
+        <p:txBody>
+          <a:bodyPr anchorCtr="0" anchor="ctr" bIns="27425" lIns="54850" spcFirstLastPara="1" rIns="54850" wrap="square" tIns="27425">
+            <a:noAutofit/>
+          </a:bodyPr>
+          <a:lstStyle/>
+          <a:p>
+            <a:pPr indent="0" lvl="0" marL="0" marR="0" rtl="0" algn="ctr">
+              <a:lnSpc>
+                <a:spcPct val="100000"/>
+              </a:lnSpc>
+              <a:spcBef>
+                <a:spcPts val="0"/>
+              </a:spcBef>
+              <a:spcAft>
+                <a:spcPts val="0"/>
+              </a:spcAft>
+              <a:buClr>
+                <a:srgbClr val="1F2937"/>
+              </a:buClr>
+              <a:buSzPts val="1300"/>
+              <a:buFont typeface="Calibri"/>
+              <a:buNone/>
+            </a:pPr>
+            <a:r>
+              <a:rPr b="0" i="0" lang="en-US" sz="1240" u="none" cap="none" strike="noStrike">
+                <a:solidFill>
+                  <a:srgbClr val="2F3A44"/>
+                </a:solidFill>
+                <a:latin typeface="Arial"/>
+                <a:ea typeface="Arial"/>
+                <a:cs typeface="Arial"/>
+                <a:sym typeface="Arial"/>
+              </a:rPr>
+              <a:t>Kenza simplifié</a:t>
+            </a:r>
+            <a:endParaRPr b="0" i="0" sz="1300" u="none" cap="none" strike="noStrike">
+              <a:solidFill>
+                <a:schemeClr val="dk1"/>
+              </a:solidFill>
+              <a:latin typeface="Calibri"/>
+              <a:ea typeface="Calibri"/>
+              <a:cs typeface="Calibri"/>
+              <a:sym typeface="Calibri"/>
+            </a:endParaRPr>
+          </a:p>
+        </p:txBody>
+      </p:sp>
+      <p:sp>
+        <p:nvSpPr>
+          <p:cNvPr id="370" name="Google Shape;370;p15"/>
+          <p:cNvSpPr/>
+          <p:nvPr/>
+        </p:nvSpPr>
+        <p:spPr>
+          <a:xfrm>
+            <a:off x="3383280" y="2039112"/>
+            <a:ext cx="1645920" cy="438912"/>
+          </a:xfrm>
+          <a:prstGeom prst="rect">
+            <a:avLst/>
+          </a:prstGeom>
+          <a:noFill/>
+          <a:ln>
+            <a:noFill/>
+          </a:ln>
+        </p:spPr>
+        <p:txBody>
+          <a:bodyPr anchorCtr="0" anchor="ctr" bIns="27425" lIns="54850" spcFirstLastPara="1" rIns="54850" wrap="square" tIns="27425">
+            <a:noAutofit/>
+          </a:bodyPr>
+          <a:lstStyle/>
+          <a:p>
+            <a:pPr indent="0" lvl="0" marL="0" marR="0" rtl="0" algn="ctr">
+              <a:lnSpc>
+                <a:spcPct val="100000"/>
+              </a:lnSpc>
+              <a:spcBef>
+                <a:spcPts val="0"/>
+              </a:spcBef>
+              <a:spcAft>
+                <a:spcPts val="0"/>
+              </a:spcAft>
+              <a:buClr>
+                <a:srgbClr val="1F2937"/>
+              </a:buClr>
+              <a:buSzPts val="1300"/>
+              <a:buFont typeface="Calibri"/>
+              <a:buNone/>
+            </a:pPr>
+            <a:r>
+              <a:rPr b="0" i="0" lang="en-US" sz="1240" u="none" cap="none" strike="noStrike">
+                <a:solidFill>
+                  <a:srgbClr val="2F3A44"/>
+                </a:solidFill>
+                <a:latin typeface="Arial"/>
+                <a:ea typeface="Arial"/>
+                <a:cs typeface="Arial"/>
+                <a:sym typeface="Arial"/>
+              </a:rPr>
+              <a:t>5 994</a:t>
+            </a:r>
+            <a:endParaRPr b="0" i="0" sz="1300" u="none" cap="none" strike="noStrike">
+              <a:solidFill>
+                <a:schemeClr val="dk1"/>
+              </a:solidFill>
+              <a:latin typeface="Calibri"/>
+              <a:ea typeface="Calibri"/>
+              <a:cs typeface="Calibri"/>
+              <a:sym typeface="Calibri"/>
+            </a:endParaRPr>
+          </a:p>
+        </p:txBody>
+      </p:sp>
+      <p:sp>
+        <p:nvSpPr>
+          <p:cNvPr id="371" name="Google Shape;371;p15"/>
+          <p:cNvSpPr/>
+          <p:nvPr/>
+        </p:nvSpPr>
+        <p:spPr>
+          <a:xfrm>
+            <a:off x="5029200" y="2039112"/>
+            <a:ext cx="1645920" cy="438912"/>
+          </a:xfrm>
+          <a:prstGeom prst="rect">
+            <a:avLst/>
+          </a:prstGeom>
+          <a:noFill/>
+          <a:ln>
+            <a:noFill/>
+          </a:ln>
+        </p:spPr>
+        <p:txBody>
+          <a:bodyPr anchorCtr="0" anchor="ctr" bIns="27425" lIns="54850" spcFirstLastPara="1" rIns="54850" wrap="square" tIns="27425">
+            <a:noAutofit/>
+          </a:bodyPr>
+          <a:lstStyle/>
+          <a:p>
+            <a:pPr indent="0" lvl="0" marL="0" marR="0" rtl="0" algn="ctr">
+              <a:lnSpc>
+                <a:spcPct val="100000"/>
+              </a:lnSpc>
+              <a:spcBef>
+                <a:spcPts val="0"/>
+              </a:spcBef>
+              <a:spcAft>
+                <a:spcPts val="0"/>
+              </a:spcAft>
+              <a:buClr>
+                <a:srgbClr val="1F2937"/>
+              </a:buClr>
+              <a:buSzPts val="1300"/>
+              <a:buFont typeface="Calibri"/>
+              <a:buNone/>
+            </a:pPr>
+            <a:r>
+              <a:rPr b="0" i="0" lang="en-US" sz="1240" u="none" cap="none" strike="noStrike">
+                <a:solidFill>
+                  <a:srgbClr val="2F3A44"/>
+                </a:solidFill>
+                <a:latin typeface="Arial"/>
+                <a:ea typeface="Arial"/>
+                <a:cs typeface="Arial"/>
+                <a:sym typeface="Arial"/>
+              </a:rPr>
+              <a:t>4 351</a:t>
+            </a:r>
+            <a:endParaRPr b="0" i="0" sz="1300" u="none" cap="none" strike="noStrike">
+              <a:solidFill>
+                <a:schemeClr val="dk1"/>
+              </a:solidFill>
+              <a:latin typeface="Calibri"/>
+              <a:ea typeface="Calibri"/>
+              <a:cs typeface="Calibri"/>
+              <a:sym typeface="Calibri"/>
+            </a:endParaRPr>
+          </a:p>
+        </p:txBody>
+      </p:sp>
+      <p:sp>
+        <p:nvSpPr>
+          <p:cNvPr id="372" name="Google Shape;372;p15"/>
+          <p:cNvSpPr/>
+          <p:nvPr/>
+        </p:nvSpPr>
+        <p:spPr>
+          <a:xfrm>
+            <a:off x="6675120" y="2039112"/>
+            <a:ext cx="1645920" cy="438912"/>
+          </a:xfrm>
+          <a:prstGeom prst="rect">
+            <a:avLst/>
+          </a:prstGeom>
+          <a:noFill/>
+          <a:ln>
+            <a:noFill/>
+          </a:ln>
+        </p:spPr>
+        <p:txBody>
+          <a:bodyPr anchorCtr="0" anchor="ctr" bIns="27425" lIns="54850" spcFirstLastPara="1" rIns="54850" wrap="square" tIns="27425">
+            <a:noAutofit/>
+          </a:bodyPr>
+          <a:lstStyle/>
+          <a:p>
+            <a:pPr indent="0" lvl="0" marL="0" marR="0" rtl="0" algn="ctr">
+              <a:lnSpc>
+                <a:spcPct val="100000"/>
+              </a:lnSpc>
+              <a:spcBef>
+                <a:spcPts val="0"/>
+              </a:spcBef>
+              <a:spcAft>
+                <a:spcPts val="0"/>
+              </a:spcAft>
+              <a:buClr>
+                <a:srgbClr val="1F2937"/>
+              </a:buClr>
+              <a:buSzPts val="1300"/>
+              <a:buFont typeface="Calibri"/>
+              <a:buNone/>
+            </a:pPr>
+            <a:r>
+              <a:rPr b="0" i="0" lang="en-US" sz="1240" u="none" cap="none" strike="noStrike">
+                <a:solidFill>
+                  <a:srgbClr val="2F3A44"/>
+                </a:solidFill>
+                <a:latin typeface="Arial"/>
+                <a:ea typeface="Arial"/>
+                <a:cs typeface="Arial"/>
+                <a:sym typeface="Arial"/>
+              </a:rPr>
+              <a:t>5,7 %</a:t>
+            </a:r>
+            <a:endParaRPr b="0" i="0" sz="1300" u="none" cap="none" strike="noStrike">
+              <a:solidFill>
+                <a:schemeClr val="dk1"/>
+              </a:solidFill>
+              <a:latin typeface="Calibri"/>
+              <a:ea typeface="Calibri"/>
+              <a:cs typeface="Calibri"/>
+              <a:sym typeface="Calibri"/>
+            </a:endParaRPr>
+          </a:p>
+        </p:txBody>
+      </p:sp>
+      <p:sp>
+        <p:nvSpPr>
+          <p:cNvPr id="373" name="Google Shape;373;p15"/>
+          <p:cNvSpPr/>
+          <p:nvPr/>
+        </p:nvSpPr>
+        <p:spPr>
+          <a:xfrm>
+            <a:off x="8321040" y="2039112"/>
+            <a:ext cx="1371600" cy="438912"/>
+          </a:xfrm>
+          <a:prstGeom prst="rect">
+            <a:avLst/>
+          </a:prstGeom>
+          <a:noFill/>
+          <a:ln>
+            <a:noFill/>
+          </a:ln>
+        </p:spPr>
+        <p:txBody>
+          <a:bodyPr anchorCtr="0" anchor="ctr" bIns="27425" lIns="54850" spcFirstLastPara="1" rIns="54850" wrap="square" tIns="27425">
+            <a:noAutofit/>
+          </a:bodyPr>
+          <a:lstStyle/>
+          <a:p>
+            <a:pPr indent="0" lvl="0" marL="0" marR="0" rtl="0" algn="ctr">
+              <a:lnSpc>
+                <a:spcPct val="100000"/>
+              </a:lnSpc>
+              <a:spcBef>
+                <a:spcPts val="0"/>
+              </a:spcBef>
+              <a:spcAft>
+                <a:spcPts val="0"/>
+              </a:spcAft>
+              <a:buClr>
+                <a:srgbClr val="1F2937"/>
+              </a:buClr>
+              <a:buSzPts val="1300"/>
+              <a:buFont typeface="Calibri"/>
+              <a:buNone/>
+            </a:pPr>
+            <a:r>
+              <a:rPr b="0" i="0" lang="en-US" sz="1240" u="none" cap="none" strike="noStrike">
+                <a:solidFill>
+                  <a:srgbClr val="2F3A44"/>
+                </a:solidFill>
+                <a:latin typeface="Arial"/>
+                <a:ea typeface="Arial"/>
+                <a:cs typeface="Arial"/>
+                <a:sym typeface="Arial"/>
+              </a:rPr>
+              <a:t>+0,70</a:t>
+            </a:r>
+            <a:endParaRPr b="0" i="0" sz="1300" u="none" cap="none" strike="noStrike">
+              <a:solidFill>
+                <a:schemeClr val="dk1"/>
+              </a:solidFill>
+              <a:latin typeface="Calibri"/>
+              <a:ea typeface="Calibri"/>
+              <a:cs typeface="Calibri"/>
+              <a:sym typeface="Calibri"/>
+            </a:endParaRPr>
+          </a:p>
+        </p:txBody>
+      </p:sp>
+      <p:sp>
+        <p:nvSpPr>
+          <p:cNvPr id="374" name="Google Shape;374;p15"/>
+          <p:cNvSpPr/>
+          <p:nvPr/>
+        </p:nvSpPr>
+        <p:spPr>
+          <a:xfrm>
+            <a:off x="9692640" y="2039112"/>
+            <a:ext cx="2011680" cy="438912"/>
+          </a:xfrm>
+          <a:prstGeom prst="rect">
+            <a:avLst/>
+          </a:prstGeom>
+          <a:noFill/>
+          <a:ln>
+            <a:noFill/>
+          </a:ln>
+        </p:spPr>
+        <p:txBody>
+          <a:bodyPr anchorCtr="0" anchor="ctr" bIns="27425" lIns="54850" spcFirstLastPara="1" rIns="54850" wrap="square" tIns="27425">
+            <a:noAutofit/>
+          </a:bodyPr>
+          <a:lstStyle/>
+          <a:p>
+            <a:pPr indent="0" lvl="0" marL="0" marR="0" rtl="0" algn="ctr">
+              <a:lnSpc>
+                <a:spcPct val="100000"/>
+              </a:lnSpc>
+              <a:spcBef>
+                <a:spcPts val="0"/>
+              </a:spcBef>
+              <a:spcAft>
+                <a:spcPts val="0"/>
+              </a:spcAft>
+              <a:buClr>
+                <a:srgbClr val="1F2937"/>
+              </a:buClr>
+              <a:buSzPts val="1300"/>
+              <a:buFont typeface="Calibri"/>
+              <a:buNone/>
+            </a:pPr>
+            <a:r>
+              <a:rPr b="0" i="0" lang="en-US" sz="1240" u="none" cap="none" strike="noStrike">
+                <a:solidFill>
+                  <a:srgbClr val="2F3A44"/>
+                </a:solidFill>
+                <a:latin typeface="Arial"/>
+                <a:ea typeface="Arial"/>
+                <a:cs typeface="Arial"/>
+                <a:sym typeface="Arial"/>
+              </a:rPr>
+              <a:t>-0,05</a:t>
+            </a:r>
+            <a:endParaRPr b="0" i="0" sz="1300" u="none" cap="none" strike="noStrike">
+              <a:solidFill>
+                <a:schemeClr val="dk1"/>
+              </a:solidFill>
+              <a:latin typeface="Calibri"/>
+              <a:ea typeface="Calibri"/>
+              <a:cs typeface="Calibri"/>
+              <a:sym typeface="Calibri"/>
+            </a:endParaRPr>
+          </a:p>
+        </p:txBody>
+      </p:sp>
+      <p:sp>
+        <p:nvSpPr>
+          <p:cNvPr id="375" name="Google Shape;375;p15"/>
+          <p:cNvSpPr/>
+          <p:nvPr/>
+        </p:nvSpPr>
+        <p:spPr>
+          <a:xfrm>
+            <a:off x="457200" y="2478024"/>
+            <a:ext cx="11247120" cy="438912"/>
+          </a:xfrm>
+          <a:prstGeom prst="rect">
+            <a:avLst/>
+          </a:prstGeom>
+          <a:solidFill>
+            <a:srgbClr val="EDF4F7"/>
+          </a:solidFill>
+          <a:ln>
+            <a:noFill/>
+          </a:ln>
+        </p:spPr>
+        <p:txBody>
+          <a:bodyPr anchorCtr="0" anchor="ctr" bIns="91425" lIns="91425" spcFirstLastPara="1" rIns="91425" wrap="square" tIns="91425">
+            <a:noAutofit/>
+          </a:bodyPr>
+          <a:lstStyle/>
+          <a:p>
+            <a:pPr indent="0" lvl="0" marL="0" marR="0" rtl="0" algn="l">
+              <a:lnSpc>
+                <a:spcPct val="100000"/>
+              </a:lnSpc>
+              <a:spcBef>
+                <a:spcPts val="0"/>
+              </a:spcBef>
+              <a:spcAft>
+                <a:spcPts val="0"/>
+              </a:spcAft>
+              <a:buClr>
+                <a:srgbClr val="000000"/>
+              </a:buClr>
+              <a:buSzPts val="1400"/>
+              <a:buFont typeface="Arial"/>
+              <a:buNone/>
+            </a:pPr>
+            <a:r>
+              <a:t/>
+            </a:r>
+            <a:endParaRPr b="0" i="0" sz="1400" u="none" cap="none" strike="noStrike">
+              <a:solidFill>
+                <a:srgbClr val="000000"/>
+              </a:solidFill>
+              <a:latin typeface="Arial"/>
+              <a:ea typeface="Arial"/>
+              <a:cs typeface="Arial"/>
+              <a:sym typeface="Arial"/>
+            </a:endParaRPr>
+          </a:p>
+        </p:txBody>
+      </p:sp>
+      <p:sp>
+        <p:nvSpPr>
+          <p:cNvPr id="376" name="Google Shape;376;p15"/>
+          <p:cNvSpPr/>
+          <p:nvPr/>
+        </p:nvSpPr>
+        <p:spPr>
+          <a:xfrm>
+            <a:off x="457200" y="2478024"/>
+            <a:ext cx="2926080" cy="438912"/>
+          </a:xfrm>
+          <a:prstGeom prst="rect">
+            <a:avLst/>
+          </a:prstGeom>
+          <a:noFill/>
+          <a:ln>
+            <a:noFill/>
+          </a:ln>
+        </p:spPr>
+        <p:txBody>
+          <a:bodyPr anchorCtr="0" anchor="ctr" bIns="27425" lIns="54850" spcFirstLastPara="1" rIns="54850" wrap="square" tIns="27425">
+            <a:noAutofit/>
+          </a:bodyPr>
+          <a:lstStyle/>
+          <a:p>
+            <a:pPr indent="0" lvl="0" marL="0" marR="0" rtl="0" algn="l">
+              <a:lnSpc>
+                <a:spcPct val="100000"/>
+              </a:lnSpc>
+              <a:spcBef>
+                <a:spcPts val="0"/>
+              </a:spcBef>
+              <a:spcAft>
+                <a:spcPts val="0"/>
+              </a:spcAft>
+              <a:buClr>
+                <a:srgbClr val="1F2937"/>
+              </a:buClr>
+              <a:buSzPts val="1300"/>
+              <a:buFont typeface="Calibri"/>
+              <a:buNone/>
+            </a:pPr>
+            <a:r>
+              <a:rPr b="1" i="0" lang="en-US" sz="1240" u="none" cap="none" strike="noStrike">
+                <a:solidFill>
+                  <a:srgbClr val="17324D"/>
+                </a:solidFill>
+                <a:latin typeface="Arial"/>
+                <a:ea typeface="Arial"/>
+                <a:cs typeface="Arial"/>
+                <a:sym typeface="Arial"/>
+              </a:rPr>
+              <a:t>Kenza indexé</a:t>
+            </a:r>
+            <a:endParaRPr b="0" i="0" sz="1300" u="none" cap="none" strike="noStrike">
+              <a:solidFill>
+                <a:schemeClr val="dk1"/>
+              </a:solidFill>
+              <a:latin typeface="Calibri"/>
+              <a:ea typeface="Calibri"/>
+              <a:cs typeface="Calibri"/>
+              <a:sym typeface="Calibri"/>
+            </a:endParaRPr>
+          </a:p>
+        </p:txBody>
+      </p:sp>
+      <p:sp>
+        <p:nvSpPr>
+          <p:cNvPr id="377" name="Google Shape;377;p15"/>
+          <p:cNvSpPr/>
+          <p:nvPr/>
+        </p:nvSpPr>
+        <p:spPr>
+          <a:xfrm>
+            <a:off x="3383280" y="2478024"/>
+            <a:ext cx="1645920" cy="438912"/>
+          </a:xfrm>
+          <a:prstGeom prst="rect">
+            <a:avLst/>
+          </a:prstGeom>
+          <a:noFill/>
+          <a:ln>
+            <a:noFill/>
+          </a:ln>
+        </p:spPr>
+        <p:txBody>
+          <a:bodyPr anchorCtr="0" anchor="ctr" bIns="27425" lIns="54850" spcFirstLastPara="1" rIns="54850" wrap="square" tIns="27425">
+            <a:noAutofit/>
+          </a:bodyPr>
+          <a:lstStyle/>
+          <a:p>
+            <a:pPr indent="0" lvl="0" marL="0" marR="0" rtl="0" algn="ctr">
+              <a:lnSpc>
+                <a:spcPct val="100000"/>
+              </a:lnSpc>
+              <a:spcBef>
+                <a:spcPts val="0"/>
+              </a:spcBef>
+              <a:spcAft>
+                <a:spcPts val="0"/>
+              </a:spcAft>
+              <a:buClr>
+                <a:srgbClr val="1F2937"/>
+              </a:buClr>
+              <a:buSzPts val="1300"/>
+              <a:buFont typeface="Calibri"/>
+              <a:buNone/>
+            </a:pPr>
+            <a:r>
+              <a:rPr b="0" i="0" lang="en-US" sz="1240" u="none" cap="none" strike="noStrike">
+                <a:solidFill>
+                  <a:srgbClr val="2F3A44"/>
+                </a:solidFill>
+                <a:latin typeface="Arial"/>
+                <a:ea typeface="Arial"/>
+                <a:cs typeface="Arial"/>
+                <a:sym typeface="Arial"/>
+              </a:rPr>
+              <a:t>5 330</a:t>
+            </a:r>
+            <a:endParaRPr b="0" i="0" sz="1300" u="none" cap="none" strike="noStrike">
+              <a:solidFill>
+                <a:schemeClr val="dk1"/>
+              </a:solidFill>
+              <a:latin typeface="Calibri"/>
+              <a:ea typeface="Calibri"/>
+              <a:cs typeface="Calibri"/>
+              <a:sym typeface="Calibri"/>
+            </a:endParaRPr>
+          </a:p>
+        </p:txBody>
+      </p:sp>
+      <p:sp>
+        <p:nvSpPr>
+          <p:cNvPr id="378" name="Google Shape;378;p15"/>
+          <p:cNvSpPr/>
+          <p:nvPr/>
+        </p:nvSpPr>
+        <p:spPr>
+          <a:xfrm>
+            <a:off x="5029200" y="2478024"/>
+            <a:ext cx="1645920" cy="438912"/>
+          </a:xfrm>
+          <a:prstGeom prst="rect">
+            <a:avLst/>
+          </a:prstGeom>
+          <a:noFill/>
+          <a:ln>
+            <a:noFill/>
+          </a:ln>
+        </p:spPr>
+        <p:txBody>
+          <a:bodyPr anchorCtr="0" anchor="ctr" bIns="27425" lIns="54850" spcFirstLastPara="1" rIns="54850" wrap="square" tIns="27425">
+            <a:noAutofit/>
+          </a:bodyPr>
+          <a:lstStyle/>
+          <a:p>
+            <a:pPr indent="0" lvl="0" marL="0" marR="0" rtl="0" algn="ctr">
+              <a:lnSpc>
+                <a:spcPct val="100000"/>
+              </a:lnSpc>
+              <a:spcBef>
+                <a:spcPts val="0"/>
+              </a:spcBef>
+              <a:spcAft>
+                <a:spcPts val="0"/>
+              </a:spcAft>
+              <a:buClr>
+                <a:srgbClr val="1F2937"/>
+              </a:buClr>
+              <a:buSzPts val="1300"/>
+              <a:buFont typeface="Calibri"/>
+              <a:buNone/>
+            </a:pPr>
+            <a:r>
+              <a:rPr b="0" i="0" lang="en-US" sz="1240" u="none" cap="none" strike="noStrike">
+                <a:solidFill>
+                  <a:srgbClr val="2F3A44"/>
+                </a:solidFill>
+                <a:latin typeface="Arial"/>
+                <a:ea typeface="Arial"/>
+                <a:cs typeface="Arial"/>
+                <a:sym typeface="Arial"/>
+              </a:rPr>
+              <a:t>4 115</a:t>
+            </a:r>
+            <a:endParaRPr b="0" i="0" sz="1300" u="none" cap="none" strike="noStrike">
+              <a:solidFill>
+                <a:schemeClr val="dk1"/>
+              </a:solidFill>
+              <a:latin typeface="Calibri"/>
+              <a:ea typeface="Calibri"/>
+              <a:cs typeface="Calibri"/>
+              <a:sym typeface="Calibri"/>
+            </a:endParaRPr>
+          </a:p>
+        </p:txBody>
+      </p:sp>
+      <p:sp>
+        <p:nvSpPr>
+          <p:cNvPr id="379" name="Google Shape;379;p15"/>
+          <p:cNvSpPr/>
+          <p:nvPr/>
+        </p:nvSpPr>
+        <p:spPr>
+          <a:xfrm>
+            <a:off x="6675120" y="2478024"/>
+            <a:ext cx="1645920" cy="438912"/>
+          </a:xfrm>
+          <a:prstGeom prst="rect">
+            <a:avLst/>
+          </a:prstGeom>
+          <a:noFill/>
+          <a:ln>
+            <a:noFill/>
+          </a:ln>
+        </p:spPr>
+        <p:txBody>
+          <a:bodyPr anchorCtr="0" anchor="ctr" bIns="27425" lIns="54850" spcFirstLastPara="1" rIns="54850" wrap="square" tIns="27425">
+            <a:noAutofit/>
+          </a:bodyPr>
+          <a:lstStyle/>
+          <a:p>
+            <a:pPr indent="0" lvl="0" marL="0" marR="0" rtl="0" algn="ctr">
+              <a:lnSpc>
+                <a:spcPct val="100000"/>
+              </a:lnSpc>
+              <a:spcBef>
+                <a:spcPts val="0"/>
+              </a:spcBef>
+              <a:spcAft>
+                <a:spcPts val="0"/>
+              </a:spcAft>
+              <a:buClr>
+                <a:srgbClr val="1F2937"/>
+              </a:buClr>
+              <a:buSzPts val="1300"/>
+              <a:buFont typeface="Calibri"/>
+              <a:buNone/>
+            </a:pPr>
+            <a:r>
+              <a:rPr b="0" i="0" lang="en-US" sz="1240" u="none" cap="none" strike="noStrike">
+                <a:solidFill>
+                  <a:srgbClr val="2F3A44"/>
+                </a:solidFill>
+                <a:latin typeface="Arial"/>
+                <a:ea typeface="Arial"/>
+                <a:cs typeface="Arial"/>
+                <a:sym typeface="Arial"/>
+              </a:rPr>
+              <a:t>5,5 %</a:t>
+            </a:r>
+            <a:endParaRPr b="0" i="0" sz="1300" u="none" cap="none" strike="noStrike">
+              <a:solidFill>
+                <a:schemeClr val="dk1"/>
+              </a:solidFill>
+              <a:latin typeface="Calibri"/>
+              <a:ea typeface="Calibri"/>
+              <a:cs typeface="Calibri"/>
+              <a:sym typeface="Calibri"/>
+            </a:endParaRPr>
+          </a:p>
+        </p:txBody>
+      </p:sp>
+      <p:sp>
+        <p:nvSpPr>
+          <p:cNvPr id="380" name="Google Shape;380;p15"/>
+          <p:cNvSpPr/>
+          <p:nvPr/>
+        </p:nvSpPr>
+        <p:spPr>
+          <a:xfrm>
+            <a:off x="8321040" y="2478024"/>
+            <a:ext cx="1371600" cy="438912"/>
+          </a:xfrm>
+          <a:prstGeom prst="rect">
+            <a:avLst/>
+          </a:prstGeom>
+          <a:noFill/>
+          <a:ln>
+            <a:noFill/>
+          </a:ln>
+        </p:spPr>
+        <p:txBody>
+          <a:bodyPr anchorCtr="0" anchor="ctr" bIns="27425" lIns="54850" spcFirstLastPara="1" rIns="54850" wrap="square" tIns="27425">
+            <a:noAutofit/>
+          </a:bodyPr>
+          <a:lstStyle/>
+          <a:p>
+            <a:pPr indent="0" lvl="0" marL="0" marR="0" rtl="0" algn="ctr">
+              <a:lnSpc>
+                <a:spcPct val="100000"/>
+              </a:lnSpc>
+              <a:spcBef>
+                <a:spcPts val="0"/>
+              </a:spcBef>
+              <a:spcAft>
+                <a:spcPts val="0"/>
+              </a:spcAft>
+              <a:buClr>
+                <a:srgbClr val="1F2937"/>
+              </a:buClr>
+              <a:buSzPts val="1300"/>
+              <a:buFont typeface="Calibri"/>
+              <a:buNone/>
+            </a:pPr>
+            <a:r>
+              <a:rPr b="0" i="0" lang="en-US" sz="1240" u="none" cap="none" strike="noStrike">
+                <a:solidFill>
+                  <a:srgbClr val="2F3A44"/>
+                </a:solidFill>
+                <a:latin typeface="Arial"/>
+                <a:ea typeface="Arial"/>
+                <a:cs typeface="Arial"/>
+                <a:sym typeface="Arial"/>
+              </a:rPr>
+              <a:t>+0,77</a:t>
+            </a:r>
+            <a:endParaRPr b="0" i="0" sz="1300" u="none" cap="none" strike="noStrike">
+              <a:solidFill>
+                <a:schemeClr val="dk1"/>
+              </a:solidFill>
+              <a:latin typeface="Calibri"/>
+              <a:ea typeface="Calibri"/>
+              <a:cs typeface="Calibri"/>
+              <a:sym typeface="Calibri"/>
+            </a:endParaRPr>
+          </a:p>
+        </p:txBody>
+      </p:sp>
+      <p:sp>
+        <p:nvSpPr>
+          <p:cNvPr id="381" name="Google Shape;381;p15"/>
+          <p:cNvSpPr/>
+          <p:nvPr/>
+        </p:nvSpPr>
+        <p:spPr>
+          <a:xfrm>
+            <a:off x="9692640" y="2478024"/>
+            <a:ext cx="2011680" cy="438912"/>
+          </a:xfrm>
+          <a:prstGeom prst="rect">
+            <a:avLst/>
+          </a:prstGeom>
+          <a:noFill/>
+          <a:ln>
+            <a:noFill/>
+          </a:ln>
+        </p:spPr>
+        <p:txBody>
+          <a:bodyPr anchorCtr="0" anchor="ctr" bIns="27425" lIns="54850" spcFirstLastPara="1" rIns="54850" wrap="square" tIns="27425">
+            <a:noAutofit/>
+          </a:bodyPr>
+          <a:lstStyle/>
+          <a:p>
+            <a:pPr indent="0" lvl="0" marL="0" marR="0" rtl="0" algn="ctr">
+              <a:lnSpc>
+                <a:spcPct val="100000"/>
+              </a:lnSpc>
+              <a:spcBef>
+                <a:spcPts val="0"/>
+              </a:spcBef>
+              <a:spcAft>
+                <a:spcPts val="0"/>
+              </a:spcAft>
+              <a:buClr>
+                <a:srgbClr val="1F2937"/>
+              </a:buClr>
+              <a:buSzPts val="1300"/>
+              <a:buFont typeface="Calibri"/>
+              <a:buNone/>
+            </a:pPr>
+            <a:r>
+              <a:rPr b="0" i="0" lang="en-US" sz="1240" u="none" cap="none" strike="noStrike">
+                <a:solidFill>
+                  <a:srgbClr val="2F3A44"/>
+                </a:solidFill>
+                <a:latin typeface="Arial"/>
+                <a:ea typeface="Arial"/>
+                <a:cs typeface="Arial"/>
+                <a:sym typeface="Arial"/>
+              </a:rPr>
+              <a:t>+0,66</a:t>
+            </a:r>
+            <a:endParaRPr b="0" i="0" sz="1300" u="none" cap="none" strike="noStrike">
+              <a:solidFill>
+                <a:schemeClr val="dk1"/>
+              </a:solidFill>
+              <a:latin typeface="Calibri"/>
+              <a:ea typeface="Calibri"/>
+              <a:cs typeface="Calibri"/>
+              <a:sym typeface="Calibri"/>
+            </a:endParaRPr>
+          </a:p>
+        </p:txBody>
+      </p:sp>
+      <p:sp>
+        <p:nvSpPr>
+          <p:cNvPr id="382" name="Google Shape;382;p15"/>
+          <p:cNvSpPr/>
+          <p:nvPr/>
+        </p:nvSpPr>
+        <p:spPr>
+          <a:xfrm>
+            <a:off x="457200" y="2916936"/>
+            <a:ext cx="11247120" cy="438912"/>
+          </a:xfrm>
+          <a:prstGeom prst="rect">
+            <a:avLst/>
+          </a:prstGeom>
+          <a:solidFill>
+            <a:srgbClr val="FFFFFF"/>
+          </a:solidFill>
+          <a:ln>
+            <a:noFill/>
+          </a:ln>
+        </p:spPr>
+        <p:txBody>
+          <a:bodyPr anchorCtr="0" anchor="ctr" bIns="91425" lIns="91425" spcFirstLastPara="1" rIns="91425" wrap="square" tIns="91425">
+            <a:noAutofit/>
+          </a:bodyPr>
+          <a:lstStyle/>
+          <a:p>
+            <a:pPr indent="0" lvl="0" marL="0" marR="0" rtl="0" algn="l">
+              <a:lnSpc>
+                <a:spcPct val="100000"/>
+              </a:lnSpc>
+              <a:spcBef>
+                <a:spcPts val="0"/>
+              </a:spcBef>
+              <a:spcAft>
+                <a:spcPts val="0"/>
+              </a:spcAft>
+              <a:buClr>
+                <a:srgbClr val="000000"/>
+              </a:buClr>
+              <a:buSzPts val="1400"/>
+              <a:buFont typeface="Arial"/>
+              <a:buNone/>
+            </a:pPr>
+            <a:r>
+              <a:t/>
+            </a:r>
+            <a:endParaRPr b="0" i="0" sz="1400" u="none" cap="none" strike="noStrike">
+              <a:solidFill>
+                <a:srgbClr val="000000"/>
+              </a:solidFill>
+              <a:latin typeface="Arial"/>
+              <a:ea typeface="Arial"/>
+              <a:cs typeface="Arial"/>
+              <a:sym typeface="Arial"/>
+            </a:endParaRPr>
+          </a:p>
+        </p:txBody>
+      </p:sp>
+      <p:sp>
+        <p:nvSpPr>
+          <p:cNvPr id="383" name="Google Shape;383;p15"/>
+          <p:cNvSpPr/>
+          <p:nvPr/>
+        </p:nvSpPr>
+        <p:spPr>
+          <a:xfrm>
+            <a:off x="457200" y="2916936"/>
+            <a:ext cx="2926080" cy="438912"/>
+          </a:xfrm>
+          <a:prstGeom prst="rect">
+            <a:avLst/>
+          </a:prstGeom>
+          <a:noFill/>
+          <a:ln>
+            <a:noFill/>
+          </a:ln>
+        </p:spPr>
+        <p:txBody>
+          <a:bodyPr anchorCtr="0" anchor="ctr" bIns="27425" lIns="54850" spcFirstLastPara="1" rIns="54850" wrap="square" tIns="27425">
+            <a:noAutofit/>
+          </a:bodyPr>
+          <a:lstStyle/>
+          <a:p>
+            <a:pPr indent="0" lvl="0" marL="0" marR="0" rtl="0" algn="ctr">
+              <a:lnSpc>
+                <a:spcPct val="100000"/>
+              </a:lnSpc>
+              <a:spcBef>
+                <a:spcPts val="0"/>
+              </a:spcBef>
+              <a:spcAft>
+                <a:spcPts val="0"/>
+              </a:spcAft>
+              <a:buClr>
+                <a:srgbClr val="1F2937"/>
+              </a:buClr>
+              <a:buSzPts val="1300"/>
+              <a:buFont typeface="Calibri"/>
+              <a:buNone/>
+            </a:pPr>
+            <a:r>
+              <a:rPr b="0" i="0" lang="en-US" sz="1240" u="none" cap="none" strike="noStrike">
+                <a:solidFill>
+                  <a:srgbClr val="2F3A44"/>
+                </a:solidFill>
+                <a:latin typeface="Arial"/>
+                <a:ea typeface="Arial"/>
+                <a:cs typeface="Arial"/>
+                <a:sym typeface="Arial"/>
+              </a:rPr>
+              <a:t>Kenza simplifié combiné</a:t>
+            </a:r>
+            <a:endParaRPr b="0" i="0" sz="1300" u="none" cap="none" strike="noStrike">
+              <a:solidFill>
+                <a:schemeClr val="dk1"/>
+              </a:solidFill>
+              <a:latin typeface="Calibri"/>
+              <a:ea typeface="Calibri"/>
+              <a:cs typeface="Calibri"/>
+              <a:sym typeface="Calibri"/>
+            </a:endParaRPr>
+          </a:p>
+        </p:txBody>
+      </p:sp>
+      <p:sp>
+        <p:nvSpPr>
+          <p:cNvPr id="384" name="Google Shape;384;p15"/>
+          <p:cNvSpPr/>
+          <p:nvPr/>
+        </p:nvSpPr>
+        <p:spPr>
+          <a:xfrm>
+            <a:off x="3383280" y="2916936"/>
+            <a:ext cx="1645920" cy="438912"/>
+          </a:xfrm>
+          <a:prstGeom prst="rect">
+            <a:avLst/>
+          </a:prstGeom>
+          <a:noFill/>
+          <a:ln>
+            <a:noFill/>
+          </a:ln>
+        </p:spPr>
+        <p:txBody>
+          <a:bodyPr anchorCtr="0" anchor="ctr" bIns="27425" lIns="54850" spcFirstLastPara="1" rIns="54850" wrap="square" tIns="27425">
+            <a:noAutofit/>
+          </a:bodyPr>
+          <a:lstStyle/>
+          <a:p>
+            <a:pPr indent="0" lvl="0" marL="0" marR="0" rtl="0" algn="ctr">
+              <a:lnSpc>
+                <a:spcPct val="100000"/>
+              </a:lnSpc>
+              <a:spcBef>
+                <a:spcPts val="0"/>
+              </a:spcBef>
+              <a:spcAft>
+                <a:spcPts val="0"/>
+              </a:spcAft>
+              <a:buClr>
+                <a:srgbClr val="1F2937"/>
+              </a:buClr>
+              <a:buSzPts val="1300"/>
+              <a:buFont typeface="Calibri"/>
+              <a:buNone/>
+            </a:pPr>
+            <a:r>
+              <a:rPr b="0" i="0" lang="en-US" sz="1240" u="none" cap="none" strike="noStrike">
+                <a:solidFill>
+                  <a:srgbClr val="2F3A44"/>
+                </a:solidFill>
+                <a:latin typeface="Arial"/>
+                <a:ea typeface="Arial"/>
+                <a:cs typeface="Arial"/>
+                <a:sym typeface="Arial"/>
+              </a:rPr>
+              <a:t>6 086</a:t>
+            </a:r>
+            <a:endParaRPr b="0" i="0" sz="1300" u="none" cap="none" strike="noStrike">
+              <a:solidFill>
+                <a:schemeClr val="dk1"/>
+              </a:solidFill>
+              <a:latin typeface="Calibri"/>
+              <a:ea typeface="Calibri"/>
+              <a:cs typeface="Calibri"/>
+              <a:sym typeface="Calibri"/>
+            </a:endParaRPr>
+          </a:p>
+        </p:txBody>
+      </p:sp>
+      <p:sp>
+        <p:nvSpPr>
+          <p:cNvPr id="385" name="Google Shape;385;p15"/>
+          <p:cNvSpPr/>
+          <p:nvPr/>
+        </p:nvSpPr>
+        <p:spPr>
+          <a:xfrm>
+            <a:off x="5029200" y="2916936"/>
+            <a:ext cx="1645920" cy="438912"/>
+          </a:xfrm>
+          <a:prstGeom prst="rect">
+            <a:avLst/>
+          </a:prstGeom>
+          <a:noFill/>
+          <a:ln>
+            <a:noFill/>
+          </a:ln>
+        </p:spPr>
+        <p:txBody>
+          <a:bodyPr anchorCtr="0" anchor="ctr" bIns="27425" lIns="54850" spcFirstLastPara="1" rIns="54850" wrap="square" tIns="27425">
+            <a:noAutofit/>
+          </a:bodyPr>
+          <a:lstStyle/>
+          <a:p>
+            <a:pPr indent="0" lvl="0" marL="0" marR="0" rtl="0" algn="ctr">
+              <a:lnSpc>
+                <a:spcPct val="100000"/>
+              </a:lnSpc>
+              <a:spcBef>
+                <a:spcPts val="0"/>
+              </a:spcBef>
+              <a:spcAft>
+                <a:spcPts val="0"/>
+              </a:spcAft>
+              <a:buClr>
+                <a:srgbClr val="1F2937"/>
+              </a:buClr>
+              <a:buSzPts val="1300"/>
+              <a:buFont typeface="Calibri"/>
+              <a:buNone/>
+            </a:pPr>
+            <a:r>
+              <a:rPr b="0" i="0" lang="en-US" sz="1240" u="none" cap="none" strike="noStrike">
+                <a:solidFill>
+                  <a:srgbClr val="2F3A44"/>
+                </a:solidFill>
+                <a:latin typeface="Arial"/>
+                <a:ea typeface="Arial"/>
+                <a:cs typeface="Arial"/>
+                <a:sym typeface="Arial"/>
+              </a:rPr>
+              <a:t>4 742</a:t>
+            </a:r>
+            <a:endParaRPr b="0" i="0" sz="1300" u="none" cap="none" strike="noStrike">
+              <a:solidFill>
+                <a:schemeClr val="dk1"/>
+              </a:solidFill>
+              <a:latin typeface="Calibri"/>
+              <a:ea typeface="Calibri"/>
+              <a:cs typeface="Calibri"/>
+              <a:sym typeface="Calibri"/>
+            </a:endParaRPr>
+          </a:p>
+        </p:txBody>
+      </p:sp>
+      <p:sp>
+        <p:nvSpPr>
+          <p:cNvPr id="386" name="Google Shape;386;p15"/>
+          <p:cNvSpPr/>
+          <p:nvPr/>
+        </p:nvSpPr>
+        <p:spPr>
+          <a:xfrm>
+            <a:off x="6675120" y="2916936"/>
+            <a:ext cx="1645920" cy="438912"/>
+          </a:xfrm>
+          <a:prstGeom prst="rect">
+            <a:avLst/>
+          </a:prstGeom>
+          <a:noFill/>
+          <a:ln>
+            <a:noFill/>
+          </a:ln>
+        </p:spPr>
+        <p:txBody>
+          <a:bodyPr anchorCtr="0" anchor="ctr" bIns="27425" lIns="54850" spcFirstLastPara="1" rIns="54850" wrap="square" tIns="27425">
+            <a:noAutofit/>
+          </a:bodyPr>
+          <a:lstStyle/>
+          <a:p>
+            <a:pPr indent="0" lvl="0" marL="0" marR="0" rtl="0" algn="ctr">
+              <a:lnSpc>
+                <a:spcPct val="100000"/>
+              </a:lnSpc>
+              <a:spcBef>
+                <a:spcPts val="0"/>
+              </a:spcBef>
+              <a:spcAft>
+                <a:spcPts val="0"/>
+              </a:spcAft>
+              <a:buClr>
+                <a:srgbClr val="1F2937"/>
+              </a:buClr>
+              <a:buSzPts val="1300"/>
+              <a:buFont typeface="Calibri"/>
+              <a:buNone/>
+            </a:pPr>
+            <a:r>
+              <a:rPr b="0" i="0" lang="en-US" sz="1240" u="none" cap="none" strike="noStrike">
+                <a:solidFill>
+                  <a:srgbClr val="2F3A44"/>
+                </a:solidFill>
+                <a:latin typeface="Arial"/>
+                <a:ea typeface="Arial"/>
+                <a:cs typeface="Arial"/>
+                <a:sym typeface="Arial"/>
+              </a:rPr>
+              <a:t>6,4 %</a:t>
+            </a:r>
+            <a:endParaRPr b="0" i="0" sz="1300" u="none" cap="none" strike="noStrike">
+              <a:solidFill>
+                <a:schemeClr val="dk1"/>
+              </a:solidFill>
+              <a:latin typeface="Calibri"/>
+              <a:ea typeface="Calibri"/>
+              <a:cs typeface="Calibri"/>
+              <a:sym typeface="Calibri"/>
+            </a:endParaRPr>
+          </a:p>
+        </p:txBody>
+      </p:sp>
+      <p:sp>
+        <p:nvSpPr>
+          <p:cNvPr id="387" name="Google Shape;387;p15"/>
+          <p:cNvSpPr/>
+          <p:nvPr/>
+        </p:nvSpPr>
+        <p:spPr>
+          <a:xfrm>
+            <a:off x="8321040" y="2916936"/>
+            <a:ext cx="1371600" cy="438912"/>
+          </a:xfrm>
+          <a:prstGeom prst="rect">
+            <a:avLst/>
+          </a:prstGeom>
+          <a:noFill/>
+          <a:ln>
+            <a:noFill/>
+          </a:ln>
+        </p:spPr>
+        <p:txBody>
+          <a:bodyPr anchorCtr="0" anchor="ctr" bIns="27425" lIns="54850" spcFirstLastPara="1" rIns="54850" wrap="square" tIns="27425">
+            <a:noAutofit/>
+          </a:bodyPr>
+          <a:lstStyle/>
+          <a:p>
+            <a:pPr indent="0" lvl="0" marL="0" marR="0" rtl="0" algn="ctr">
+              <a:lnSpc>
+                <a:spcPct val="100000"/>
+              </a:lnSpc>
+              <a:spcBef>
+                <a:spcPts val="0"/>
+              </a:spcBef>
+              <a:spcAft>
+                <a:spcPts val="0"/>
+              </a:spcAft>
+              <a:buClr>
+                <a:srgbClr val="1F2937"/>
+              </a:buClr>
+              <a:buSzPts val="1300"/>
+              <a:buFont typeface="Calibri"/>
+              <a:buNone/>
+            </a:pPr>
+            <a:r>
+              <a:rPr b="0" i="0" lang="en-US" sz="1240" u="none" cap="none" strike="noStrike">
+                <a:solidFill>
+                  <a:srgbClr val="2F3A44"/>
+                </a:solidFill>
+                <a:latin typeface="Arial"/>
+                <a:ea typeface="Arial"/>
+                <a:cs typeface="Arial"/>
+                <a:sym typeface="Arial"/>
+              </a:rPr>
+              <a:t>+0,69</a:t>
+            </a:r>
+            <a:endParaRPr b="0" i="0" sz="1300" u="none" cap="none" strike="noStrike">
+              <a:solidFill>
+                <a:schemeClr val="dk1"/>
+              </a:solidFill>
+              <a:latin typeface="Calibri"/>
+              <a:ea typeface="Calibri"/>
+              <a:cs typeface="Calibri"/>
+              <a:sym typeface="Calibri"/>
+            </a:endParaRPr>
+          </a:p>
+        </p:txBody>
+      </p:sp>
+      <p:sp>
+        <p:nvSpPr>
+          <p:cNvPr id="388" name="Google Shape;388;p15"/>
+          <p:cNvSpPr/>
+          <p:nvPr/>
+        </p:nvSpPr>
+        <p:spPr>
+          <a:xfrm>
+            <a:off x="9692640" y="2916936"/>
+            <a:ext cx="2011680" cy="438912"/>
+          </a:xfrm>
+          <a:prstGeom prst="rect">
+            <a:avLst/>
+          </a:prstGeom>
+          <a:noFill/>
+          <a:ln>
+            <a:noFill/>
+          </a:ln>
+        </p:spPr>
+        <p:txBody>
+          <a:bodyPr anchorCtr="0" anchor="ctr" bIns="27425" lIns="54850" spcFirstLastPara="1" rIns="54850" wrap="square" tIns="27425">
+            <a:noAutofit/>
+          </a:bodyPr>
+          <a:lstStyle/>
+          <a:p>
+            <a:pPr indent="0" lvl="0" marL="0" marR="0" rtl="0" algn="ctr">
+              <a:lnSpc>
+                <a:spcPct val="100000"/>
+              </a:lnSpc>
+              <a:spcBef>
+                <a:spcPts val="0"/>
+              </a:spcBef>
+              <a:spcAft>
+                <a:spcPts val="0"/>
+              </a:spcAft>
+              <a:buClr>
+                <a:srgbClr val="1F2937"/>
+              </a:buClr>
+              <a:buSzPts val="1300"/>
+              <a:buFont typeface="Calibri"/>
+              <a:buNone/>
+            </a:pPr>
+            <a:r>
+              <a:rPr b="0" i="0" lang="en-US" sz="1240" u="none" cap="none" strike="noStrike">
+                <a:solidFill>
+                  <a:srgbClr val="2F3A44"/>
+                </a:solidFill>
+                <a:latin typeface="Arial"/>
+                <a:ea typeface="Arial"/>
+                <a:cs typeface="Arial"/>
+                <a:sym typeface="Arial"/>
+              </a:rPr>
+              <a:t>+0,33</a:t>
+            </a:r>
+            <a:endParaRPr b="0" i="0" sz="1300" u="none" cap="none" strike="noStrike">
+              <a:solidFill>
+                <a:schemeClr val="dk1"/>
+              </a:solidFill>
+              <a:latin typeface="Calibri"/>
+              <a:ea typeface="Calibri"/>
+              <a:cs typeface="Calibri"/>
+              <a:sym typeface="Calibri"/>
+            </a:endParaRPr>
+          </a:p>
+        </p:txBody>
+      </p:sp>
+      <p:sp>
+        <p:nvSpPr>
+          <p:cNvPr id="394" name="Google Shape;382;p15"/>
+          <p:cNvSpPr/>
+          <p:nvPr/>
+        </p:nvSpPr>
+        <p:spPr>
+          <a:xfrm>
+            <a:off x="457200" y="3355848"/>
+            <a:ext cx="11247120" cy="438912"/>
+          </a:xfrm>
+          <a:prstGeom prst="rect">
+            <a:avLst/>
+          </a:prstGeom>
+          <a:solidFill>
+            <a:srgbClr val="E5EFF3"/>
+          </a:solidFill>
+          <a:ln>
+            <a:noFill/>
+          </a:ln>
+        </p:spPr>
+        <p:txBody>
+          <a:bodyPr anchorCtr="0" anchor="ctr" bIns="91425" lIns="91425" spcFirstLastPara="1" rIns="91425" wrap="square" tIns="91425">
+            <a:noAutofit/>
+          </a:bodyPr>
+          <a:lstStyle/>
+          <a:p>
+            <a:pPr indent="0" lvl="0" marL="0" marR="0" rtl="0" algn="l">
+              <a:lnSpc>
+                <a:spcPct val="100000"/>
+              </a:lnSpc>
+              <a:spcBef>
+                <a:spcPts val="0"/>
+              </a:spcBef>
+              <a:spcAft>
+                <a:spcPts val="0"/>
+              </a:spcAft>
+              <a:buClr>
+                <a:srgbClr val="000000"/>
+              </a:buClr>
+              <a:buSzPts val="1400"/>
+              <a:buFont typeface="Arial"/>
+              <a:buNone/>
+            </a:pPr>
+            <a:r>
+              <a:t/>
+            </a:r>
+            <a:endParaRPr b="0" i="0" sz="1400" u="none" cap="none" strike="noStrike">
+              <a:solidFill>
+                <a:srgbClr val="000000"/>
+              </a:solidFill>
+              <a:latin typeface="Arial"/>
+              <a:ea typeface="Arial"/>
+              <a:cs typeface="Arial"/>
+              <a:sym typeface="Arial"/>
+            </a:endParaRPr>
+          </a:p>
+        </p:txBody>
+      </p:sp>
+      <p:sp>
+        <p:nvSpPr>
+          <p:cNvPr id="395" name="Google Shape;383;p15"/>
+          <p:cNvSpPr/>
+          <p:nvPr/>
+        </p:nvSpPr>
+        <p:spPr>
+          <a:xfrm>
+            <a:off x="457200" y="3355848"/>
+            <a:ext cx="2926080" cy="438912"/>
+          </a:xfrm>
+          <a:prstGeom prst="rect">
+            <a:avLst/>
+          </a:prstGeom>
+          <a:noFill/>
+          <a:ln>
+            <a:noFill/>
+          </a:ln>
+        </p:spPr>
+        <p:txBody>
+          <a:bodyPr anchorCtr="0" anchor="ctr" bIns="27425" lIns="54850" spcFirstLastPara="1" rIns="54850" wrap="square" tIns="27425">
+            <a:noAutofit/>
+          </a:bodyPr>
+          <a:lstStyle/>
+          <a:p>
+            <a:pPr indent="0" lvl="0" marL="0" marR="0" rtl="0" algn="ctr">
+              <a:lnSpc>
+                <a:spcPct val="100000"/>
+              </a:lnSpc>
+              <a:spcBef>
+                <a:spcPts val="0"/>
+              </a:spcBef>
+              <a:spcAft>
+                <a:spcPts val="0"/>
+              </a:spcAft>
+              <a:buClr>
+                <a:srgbClr val="1F2937"/>
+              </a:buClr>
+              <a:buSzPts val="1300"/>
+              <a:buFont typeface="Calibri"/>
+              <a:buNone/>
+            </a:pPr>
+            <a:r>
+              <a:rPr b="0" i="0" lang="en-US" sz="1240" u="none" cap="none" strike="noStrike">
+                <a:solidFill>
+                  <a:srgbClr val="2F3A44"/>
+                </a:solidFill>
+                <a:latin typeface="Arial"/>
+                <a:ea typeface="Arial"/>
+                <a:cs typeface="Arial"/>
+                <a:sym typeface="Arial"/>
+              </a:rPr>
+              <a:t>Kenza simplifié indexé</a:t>
+            </a:r>
+            <a:endParaRPr b="0" i="0" sz="1300" u="none" cap="none" strike="noStrike">
+              <a:solidFill>
+                <a:schemeClr val="dk1"/>
+              </a:solidFill>
+              <a:latin typeface="Calibri"/>
+              <a:ea typeface="Calibri"/>
+              <a:cs typeface="Calibri"/>
+              <a:sym typeface="Calibri"/>
+            </a:endParaRPr>
+          </a:p>
+        </p:txBody>
+      </p:sp>
+      <p:sp>
+        <p:nvSpPr>
+          <p:cNvPr id="396" name="Google Shape;384;p15"/>
+          <p:cNvSpPr/>
+          <p:nvPr/>
+        </p:nvSpPr>
+        <p:spPr>
+          <a:xfrm>
+            <a:off x="3383280" y="3355848"/>
+            <a:ext cx="1645920" cy="438912"/>
+          </a:xfrm>
+          <a:prstGeom prst="rect">
+            <a:avLst/>
+          </a:prstGeom>
+          <a:noFill/>
+          <a:ln>
+            <a:noFill/>
+          </a:ln>
+        </p:spPr>
+        <p:txBody>
+          <a:bodyPr anchorCtr="0" anchor="ctr" bIns="27425" lIns="54850" spcFirstLastPara="1" rIns="54850" wrap="square" tIns="27425">
+            <a:noAutofit/>
+          </a:bodyPr>
+          <a:lstStyle/>
+          <a:p>
+            <a:pPr indent="0" lvl="0" marL="0" marR="0" rtl="0" algn="ctr">
+              <a:lnSpc>
+                <a:spcPct val="100000"/>
+              </a:lnSpc>
+              <a:spcBef>
+                <a:spcPts val="0"/>
+              </a:spcBef>
+              <a:spcAft>
+                <a:spcPts val="0"/>
+              </a:spcAft>
+              <a:buClr>
+                <a:srgbClr val="1F2937"/>
+              </a:buClr>
+              <a:buSzPts val="1300"/>
+              <a:buFont typeface="Calibri"/>
+              <a:buNone/>
+            </a:pPr>
+            <a:r>
+              <a:rPr b="0" i="0" lang="en-US" sz="1240" u="none" cap="none" strike="noStrike">
+                <a:solidFill>
+                  <a:srgbClr val="2F3A44"/>
+                </a:solidFill>
+                <a:latin typeface="Arial"/>
+                <a:ea typeface="Arial"/>
+                <a:cs typeface="Arial"/>
+                <a:sym typeface="Arial"/>
+              </a:rPr>
+              <a:t>5 555</a:t>
+            </a:r>
+            <a:endParaRPr b="0" i="0" sz="1300" u="none" cap="none" strike="noStrike">
+              <a:solidFill>
+                <a:schemeClr val="dk1"/>
+              </a:solidFill>
+              <a:latin typeface="Calibri"/>
+              <a:ea typeface="Calibri"/>
+              <a:cs typeface="Calibri"/>
+              <a:sym typeface="Calibri"/>
+            </a:endParaRPr>
+          </a:p>
+        </p:txBody>
+      </p:sp>
+      <p:sp>
+        <p:nvSpPr>
+          <p:cNvPr id="397" name="Google Shape;385;p15"/>
+          <p:cNvSpPr/>
+          <p:nvPr/>
+        </p:nvSpPr>
+        <p:spPr>
+          <a:xfrm>
+            <a:off x="5029200" y="3355848"/>
+            <a:ext cx="1645920" cy="438912"/>
+          </a:xfrm>
+          <a:prstGeom prst="rect">
+            <a:avLst/>
+          </a:prstGeom>
+          <a:noFill/>
+          <a:ln>
+            <a:noFill/>
+          </a:ln>
+        </p:spPr>
+        <p:txBody>
+          <a:bodyPr anchorCtr="0" anchor="ctr" bIns="27425" lIns="54850" spcFirstLastPara="1" rIns="54850" wrap="square" tIns="27425">
+            <a:noAutofit/>
+          </a:bodyPr>
+          <a:lstStyle/>
+          <a:p>
+            <a:pPr indent="0" lvl="0" marL="0" marR="0" rtl="0" algn="ctr">
+              <a:lnSpc>
+                <a:spcPct val="100000"/>
+              </a:lnSpc>
+              <a:spcBef>
+                <a:spcPts val="0"/>
+              </a:spcBef>
+              <a:spcAft>
+                <a:spcPts val="0"/>
+              </a:spcAft>
+              <a:buClr>
+                <a:srgbClr val="1F2937"/>
+              </a:buClr>
+              <a:buSzPts val="1300"/>
+              <a:buFont typeface="Calibri"/>
+              <a:buNone/>
+            </a:pPr>
+            <a:r>
+              <a:rPr b="0" i="0" lang="en-US" sz="1240" u="none" cap="none" strike="noStrike">
+                <a:solidFill>
+                  <a:srgbClr val="2F3A44"/>
+                </a:solidFill>
+                <a:latin typeface="Arial"/>
+                <a:ea typeface="Arial"/>
+                <a:cs typeface="Arial"/>
+                <a:sym typeface="Arial"/>
+              </a:rPr>
+              <a:t>4 150</a:t>
+            </a:r>
+            <a:endParaRPr b="0" i="0" sz="1300" u="none" cap="none" strike="noStrike">
+              <a:solidFill>
+                <a:schemeClr val="dk1"/>
+              </a:solidFill>
+              <a:latin typeface="Calibri"/>
+              <a:ea typeface="Calibri"/>
+              <a:cs typeface="Calibri"/>
+              <a:sym typeface="Calibri"/>
+            </a:endParaRPr>
+          </a:p>
+        </p:txBody>
+      </p:sp>
+      <p:sp>
+        <p:nvSpPr>
+          <p:cNvPr id="398" name="Google Shape;386;p15"/>
+          <p:cNvSpPr/>
+          <p:nvPr/>
+        </p:nvSpPr>
+        <p:spPr>
+          <a:xfrm>
+            <a:off x="6675120" y="3355848"/>
+            <a:ext cx="1645920" cy="438912"/>
+          </a:xfrm>
+          <a:prstGeom prst="rect">
+            <a:avLst/>
+          </a:prstGeom>
+          <a:noFill/>
+          <a:ln>
+            <a:noFill/>
+          </a:ln>
+        </p:spPr>
+        <p:txBody>
+          <a:bodyPr anchorCtr="0" anchor="ctr" bIns="27425" lIns="54850" spcFirstLastPara="1" rIns="54850" wrap="square" tIns="27425">
+            <a:noAutofit/>
+          </a:bodyPr>
+          <a:lstStyle/>
+          <a:p>
+            <a:pPr indent="0" lvl="0" marL="0" marR="0" rtl="0" algn="ctr">
+              <a:lnSpc>
+                <a:spcPct val="100000"/>
+              </a:lnSpc>
+              <a:spcBef>
+                <a:spcPts val="0"/>
+              </a:spcBef>
+              <a:spcAft>
+                <a:spcPts val="0"/>
+              </a:spcAft>
+              <a:buClr>
+                <a:srgbClr val="1F2937"/>
+              </a:buClr>
+              <a:buSzPts val="1300"/>
+              <a:buFont typeface="Calibri"/>
+              <a:buNone/>
+            </a:pPr>
+            <a:r>
+              <a:rPr b="0" i="0" lang="en-US" sz="1240" u="none" cap="none" strike="noStrike">
+                <a:solidFill>
+                  <a:srgbClr val="2F3A44"/>
+                </a:solidFill>
+                <a:latin typeface="Arial"/>
+                <a:ea typeface="Arial"/>
+                <a:cs typeface="Arial"/>
+                <a:sym typeface="Arial"/>
+              </a:rPr>
+              <a:t>5,5 %</a:t>
+            </a:r>
+            <a:endParaRPr b="0" i="0" sz="1300" u="none" cap="none" strike="noStrike">
+              <a:solidFill>
+                <a:schemeClr val="dk1"/>
+              </a:solidFill>
+              <a:latin typeface="Calibri"/>
+              <a:ea typeface="Calibri"/>
+              <a:cs typeface="Calibri"/>
+              <a:sym typeface="Calibri"/>
+            </a:endParaRPr>
+          </a:p>
+        </p:txBody>
+      </p:sp>
+      <p:sp>
+        <p:nvSpPr>
+          <p:cNvPr id="399" name="Google Shape;387;p15"/>
+          <p:cNvSpPr/>
+          <p:nvPr/>
+        </p:nvSpPr>
+        <p:spPr>
+          <a:xfrm>
+            <a:off x="8321040" y="3355848"/>
+            <a:ext cx="1371600" cy="438912"/>
+          </a:xfrm>
+          <a:prstGeom prst="rect">
+            <a:avLst/>
+          </a:prstGeom>
+          <a:noFill/>
+          <a:ln>
+            <a:noFill/>
+          </a:ln>
+        </p:spPr>
+        <p:txBody>
+          <a:bodyPr anchorCtr="0" anchor="ctr" bIns="27425" lIns="54850" spcFirstLastPara="1" rIns="54850" wrap="square" tIns="27425">
+            <a:noAutofit/>
+          </a:bodyPr>
+          <a:lstStyle/>
+          <a:p>
+            <a:pPr indent="0" lvl="0" marL="0" marR="0" rtl="0" algn="ctr">
+              <a:lnSpc>
+                <a:spcPct val="100000"/>
+              </a:lnSpc>
+              <a:spcBef>
+                <a:spcPts val="0"/>
+              </a:spcBef>
+              <a:spcAft>
+                <a:spcPts val="0"/>
+              </a:spcAft>
+              <a:buClr>
+                <a:srgbClr val="1F2937"/>
+              </a:buClr>
+              <a:buSzPts val="1300"/>
+              <a:buFont typeface="Calibri"/>
+              <a:buNone/>
+            </a:pPr>
+            <a:r>
+              <a:rPr b="0" i="0" lang="en-US" sz="1240" u="none" cap="none" strike="noStrike">
+                <a:solidFill>
+                  <a:srgbClr val="2F3A44"/>
+                </a:solidFill>
+                <a:latin typeface="Arial"/>
+                <a:ea typeface="Arial"/>
+                <a:cs typeface="Arial"/>
+                <a:sym typeface="Arial"/>
+              </a:rPr>
+              <a:t>+0,75</a:t>
+            </a:r>
+            <a:endParaRPr b="0" i="0" sz="1300" u="none" cap="none" strike="noStrike">
+              <a:solidFill>
+                <a:schemeClr val="dk1"/>
+              </a:solidFill>
+              <a:latin typeface="Calibri"/>
+              <a:ea typeface="Calibri"/>
+              <a:cs typeface="Calibri"/>
+              <a:sym typeface="Calibri"/>
+            </a:endParaRPr>
+          </a:p>
+        </p:txBody>
+      </p:sp>
+      <p:sp>
+        <p:nvSpPr>
+          <p:cNvPr id="400" name="Google Shape;388;p15"/>
+          <p:cNvSpPr/>
+          <p:nvPr/>
+        </p:nvSpPr>
+        <p:spPr>
+          <a:xfrm>
+            <a:off x="9692640" y="3355848"/>
+            <a:ext cx="2011680" cy="438912"/>
+          </a:xfrm>
+          <a:prstGeom prst="rect">
+            <a:avLst/>
+          </a:prstGeom>
+          <a:noFill/>
+          <a:ln>
+            <a:noFill/>
+          </a:ln>
+        </p:spPr>
+        <p:txBody>
+          <a:bodyPr anchorCtr="0" anchor="ctr" bIns="27425" lIns="54850" spcFirstLastPara="1" rIns="54850" wrap="square" tIns="27425">
+            <a:noAutofit/>
+          </a:bodyPr>
+          <a:lstStyle/>
+          <a:p>
+            <a:pPr indent="0" lvl="0" marL="0" marR="0" rtl="0" algn="ctr">
+              <a:lnSpc>
+                <a:spcPct val="100000"/>
+              </a:lnSpc>
+              <a:spcBef>
+                <a:spcPts val="0"/>
+              </a:spcBef>
+              <a:spcAft>
+                <a:spcPts val="0"/>
+              </a:spcAft>
+              <a:buClr>
+                <a:srgbClr val="1F2937"/>
+              </a:buClr>
+              <a:buSzPts val="1300"/>
+              <a:buFont typeface="Calibri"/>
+              <a:buNone/>
+            </a:pPr>
+            <a:r>
+              <a:rPr b="0" i="0" lang="en-US" sz="1240" u="none" cap="none" strike="noStrike">
+                <a:solidFill>
+                  <a:srgbClr val="2F3A44"/>
+                </a:solidFill>
+                <a:latin typeface="Arial"/>
+                <a:ea typeface="Arial"/>
+                <a:cs typeface="Arial"/>
+                <a:sym typeface="Arial"/>
+              </a:rPr>
+              <a:t>+0,31</a:t>
+            </a:r>
+            <a:endParaRPr b="0" i="0" sz="1300" u="none" cap="none" strike="noStrike">
+              <a:solidFill>
+                <a:schemeClr val="dk1"/>
+              </a:solidFill>
+              <a:latin typeface="Calibri"/>
+              <a:ea typeface="Calibri"/>
+              <a:cs typeface="Calibri"/>
+              <a:sym typeface="Calibri"/>
+            </a:endParaRPr>
+          </a:p>
+        </p:txBody>
+      </p:sp>
+      <p:sp>
+        <p:nvSpPr>
+          <p:cNvPr id="389" name="Google Shape;389;p15"/>
+          <p:cNvSpPr/>
+          <p:nvPr/>
+        </p:nvSpPr>
+        <p:spPr>
+          <a:xfrm>
+            <a:off x="457200" y="3931920"/>
+            <a:ext cx="10972800" cy="274320"/>
+          </a:xfrm>
+          <a:prstGeom prst="rect">
+            <a:avLst/>
+          </a:prstGeom>
+          <a:noFill/>
+          <a:ln>
+            <a:noFill/>
+          </a:ln>
+        </p:spPr>
+        <p:txBody>
+          <a:bodyPr anchorCtr="0" anchor="ctr" bIns="27425" lIns="54850" spcFirstLastPara="1" rIns="54850" wrap="square" tIns="27425">
+            <a:noAutofit/>
+          </a:bodyPr>
+          <a:lstStyle/>
+          <a:p>
+            <a:pPr indent="0" lvl="0" marL="0" marR="0" rtl="0" algn="l">
+              <a:lnSpc>
+                <a:spcPct val="100000"/>
+              </a:lnSpc>
+              <a:spcBef>
+                <a:spcPts val="0"/>
+              </a:spcBef>
+              <a:spcAft>
+                <a:spcPts val="0"/>
+              </a:spcAft>
+              <a:buClr>
+                <a:srgbClr val="4B5563"/>
+              </a:buClr>
+              <a:buSzPts val="1200"/>
+              <a:buFont typeface="Calibri"/>
+              <a:buNone/>
+            </a:pPr>
+            <a:r>
+              <a:rPr b="0" i="0" lang="en-US" sz="1050" u="none" cap="none" strike="noStrike">
+                <a:solidFill>
+                  <a:srgbClr val="6F7A84"/>
+                </a:solidFill>
+                <a:latin typeface="Arial"/>
+                <a:ea typeface="Arial"/>
+                <a:cs typeface="Arial"/>
+                <a:sym typeface="Arial"/>
+              </a:rPr>
+              <a:t>Backtest glissant : calage initial de 10 ans, puis toutes les coupures jusqu'en 2019, horizon 5 ans — environ 19 fenêtres. RMSE, MAE et MAPE sont ceux du glissant ; la dernière colonne reprend la diapositive précédente (calage unique 1990-2011, horizon jusqu'à 8 ans).</a:t>
+            </a:r>
+            <a:endParaRPr b="0" i="0" sz="1200" u="none" cap="none" strike="noStrike">
+              <a:solidFill>
+                <a:schemeClr val="dk1"/>
+              </a:solidFill>
+              <a:latin typeface="Calibri"/>
+              <a:ea typeface="Calibri"/>
+              <a:cs typeface="Calibri"/>
+              <a:sym typeface="Calibri"/>
+            </a:endParaRPr>
+          </a:p>
+        </p:txBody>
+      </p:sp>
+      <p:sp>
+        <p:nvSpPr>
+          <p:cNvPr id="390" name="Google Shape;390;p15"/>
+          <p:cNvSpPr/>
+          <p:nvPr/>
+        </p:nvSpPr>
+        <p:spPr>
+          <a:xfrm>
+            <a:off x="457200" y="4389120"/>
+            <a:ext cx="11247120" cy="1463040"/>
+          </a:xfrm>
+          <a:prstGeom prst="roundRect">
+            <a:avLst>
+              <a:gd fmla="val 5000" name="adj"/>
+            </a:avLst>
+          </a:prstGeom>
+          <a:solidFill>
+            <a:srgbClr val="EDF4F7"/>
+          </a:solidFill>
+          <a:ln cap="flat" cmpd="sng" w="9525">
+            <a:solidFill>
+              <a:srgbClr val="D8E1E6"/>
+            </a:solidFill>
+            <a:prstDash val="solid"/>
+            <a:round/>
+            <a:headEnd len="sm" w="sm" type="none"/>
+            <a:tailEnd len="sm" w="sm" type="none"/>
+          </a:ln>
+        </p:spPr>
+        <p:txBody>
+          <a:bodyPr anchorCtr="0" anchor="ctr" bIns="91425" lIns="91425" spcFirstLastPara="1" rIns="91425" wrap="square" tIns="91425">
+            <a:noAutofit/>
+          </a:bodyPr>
+          <a:lstStyle/>
+          <a:p>
+            <a:pPr indent="0" lvl="0" marL="0" marR="0" rtl="0" algn="l">
+              <a:lnSpc>
+                <a:spcPct val="100000"/>
+              </a:lnSpc>
+              <a:spcBef>
+                <a:spcPts val="0"/>
+              </a:spcBef>
+              <a:spcAft>
+                <a:spcPts val="0"/>
+              </a:spcAft>
+              <a:buClr>
+                <a:srgbClr val="000000"/>
+              </a:buClr>
+              <a:buSzPts val="1400"/>
+              <a:buFont typeface="Arial"/>
+              <a:buNone/>
+            </a:pPr>
+            <a:r>
+              <a:t/>
+            </a:r>
+            <a:endParaRPr b="0" i="0" sz="1400" u="none" cap="none" strike="noStrike">
+              <a:solidFill>
+                <a:srgbClr val="000000"/>
+              </a:solidFill>
+              <a:latin typeface="Arial"/>
+              <a:ea typeface="Arial"/>
+              <a:cs typeface="Arial"/>
+              <a:sym typeface="Arial"/>
+            </a:endParaRPr>
+          </a:p>
+        </p:txBody>
+      </p:sp>
+      <p:sp>
+        <p:nvSpPr>
+          <p:cNvPr id="391" name="Google Shape;391;p15"/>
+          <p:cNvSpPr/>
+          <p:nvPr/>
+        </p:nvSpPr>
+        <p:spPr>
+          <a:xfrm>
+            <a:off x="731520" y="4572000"/>
+            <a:ext cx="10698480" cy="274320"/>
+          </a:xfrm>
+          <a:prstGeom prst="rect">
+            <a:avLst/>
+          </a:prstGeom>
+          <a:noFill/>
+          <a:ln>
+            <a:noFill/>
+          </a:ln>
+        </p:spPr>
+        <p:txBody>
+          <a:bodyPr anchorCtr="0" anchor="ctr" bIns="27425" lIns="54850" spcFirstLastPara="1" rIns="54850" wrap="square" tIns="27425">
+            <a:noAutofit/>
+          </a:bodyPr>
+          <a:lstStyle/>
+          <a:p>
+            <a:pPr indent="0" lvl="0" marL="0" marR="0" rtl="0" algn="l">
+              <a:lnSpc>
+                <a:spcPct val="100000"/>
+              </a:lnSpc>
+              <a:spcBef>
+                <a:spcPts val="0"/>
+              </a:spcBef>
+              <a:spcAft>
+                <a:spcPts val="0"/>
+              </a:spcAft>
+              <a:buClr>
+                <a:srgbClr val="034694"/>
+              </a:buClr>
+              <a:buSzPts val="1400"/>
+              <a:buFont typeface="Arial"/>
+              <a:buNone/>
+            </a:pPr>
+            <a:r>
+              <a:rPr b="1" i="0" lang="en-US" sz="1500" u="none" cap="none" strike="noStrike">
+                <a:solidFill>
+                  <a:srgbClr val="17324D"/>
+                </a:solidFill>
+                <a:latin typeface="Arial"/>
+                <a:ea typeface="Arial"/>
+                <a:cs typeface="Arial"/>
+                <a:sym typeface="Arial"/>
+              </a:rPr>
+              <a:t>Interprétation</a:t>
+            </a:r>
+            <a:endParaRPr b="0" i="0" sz="1400" u="none" cap="none" strike="noStrike">
+              <a:solidFill>
+                <a:schemeClr val="dk1"/>
+              </a:solidFill>
+              <a:latin typeface="Calibri"/>
+              <a:ea typeface="Calibri"/>
+              <a:cs typeface="Calibri"/>
+              <a:sym typeface="Calibri"/>
+            </a:endParaRPr>
+          </a:p>
+        </p:txBody>
+      </p:sp>
+      <p:sp>
+        <p:nvSpPr>
+          <p:cNvPr id="392" name="Google Shape;392;p15"/>
+          <p:cNvSpPr/>
+          <p:nvPr/>
+        </p:nvSpPr>
+        <p:spPr>
+          <a:xfrm>
+            <a:off x="731520" y="4937760"/>
+            <a:ext cx="10698480" cy="777240"/>
+          </a:xfrm>
+          <a:prstGeom prst="rect">
+            <a:avLst/>
+          </a:prstGeom>
+          <a:noFill/>
+          <a:ln>
+            <a:noFill/>
+          </a:ln>
+        </p:spPr>
+        <p:txBody>
+          <a:bodyPr anchorCtr="0" anchor="ctr" bIns="27425" lIns="54850" spcFirstLastPara="1" rIns="54850" wrap="square" tIns="27425">
+            <a:noAutofit/>
+          </a:bodyPr>
+          <a:lstStyle/>
+          <a:p>
+            <a:pPr indent="0" lvl="0" marL="0" marR="0" rtl="0" algn="l">
+              <a:lnSpc>
+                <a:spcPct val="115000"/>
+              </a:lnSpc>
+              <a:spcBef>
+                <a:spcPts val="0"/>
+              </a:spcBef>
+              <a:spcAft>
+                <a:spcPts val="0"/>
+              </a:spcAft>
+              <a:buClr>
+                <a:srgbClr val="1F2937"/>
+              </a:buClr>
+              <a:buSzPts val="1400"/>
+              <a:buFont typeface="Calibri"/>
+              <a:buNone/>
+            </a:pPr>
+            <a:r>
+              <a:rPr b="0" i="0" lang="en-US" sz="1280" u="none" cap="none" strike="noStrike">
+                <a:solidFill>
+                  <a:srgbClr val="2F3A44"/>
+                </a:solidFill>
+                <a:latin typeface="Arial"/>
+                <a:ea typeface="Arial"/>
+                <a:cs typeface="Arial"/>
+                <a:sym typeface="Arial"/>
+              </a:rPr>
+              <a:t>Le classement de la diapositive précédente tient à une seule coupure : un calage 1990-2011, puis huit années prédites d'affilée. En moyennant toutes les coupures possibles à horizon 5 ans, les cinq variantes expliquent 60 à 77 % de la variance hors échantillon, pour 5,5 à 6,4 % d'erreur relative moyenne. Les deux mesures sont justes : la seconde est plus robuste, mais porte sur un horizon plus court. Aucune des deux ne juge un modèle sur les données qui l'ont calibré.</a:t>
+            </a:r>
+            <a:endParaRPr b="0" i="0" sz="1400" u="none" cap="none" strike="noStrike">
+              <a:solidFill>
+                <a:schemeClr val="dk1"/>
+              </a:solidFill>
+              <a:latin typeface="Calibri"/>
+              <a:ea typeface="Calibri"/>
+              <a:cs typeface="Calibri"/>
+              <a:sym typeface="Calibri"/>
+            </a:endParaRPr>
+          </a:p>
+        </p:txBody>
+      </p:sp>
+      <p:sp>
+        <p:nvSpPr>
+          <p:cNvPr id="393" name="Google Shape;393;p15"/>
           <p:cNvSpPr txBox="1"/>
           <p:nvPr>
             <p:ph idx="12" type="sldNum"/>

--- a/docs/Presentation_methode_Kenza.pptx
+++ b/docs/Presentation_methode_Kenza.pptx
@@ -28055,8 +28055,8 @@
         </p:nvSpPr>
         <p:spPr>
           <a:xfrm>
-            <a:off x="1279600" y="2842022"/>
-            <a:ext cx="2076600" cy="300300"/>
+            <a:off x="1165007" y="2842025"/>
+            <a:ext cx="2267536" cy="300300"/>
           </a:xfrm>
           <a:prstGeom prst="rect">
             <a:avLst/>

--- a/docs/Presentation_methode_Kenza.pptx
+++ b/docs/Presentation_methode_Kenza.pptx
@@ -25476,7 +25476,7 @@
         <p:spPr>
           <a:xfrm>
             <a:off x="457200" y="4389120"/>
-            <a:ext cx="11247120" cy="1463040"/>
+            <a:ext cx="11247120" cy="1863040"/>
           </a:xfrm>
           <a:prstGeom prst="roundRect">
             <a:avLst>
@@ -25609,7 +25609,7 @@
         <p:spPr>
           <a:xfrm>
             <a:off x="731520" y="4937760"/>
-            <a:ext cx="10698480" cy="777240"/>
+            <a:ext cx="10698480" cy="1177240"/>
           </a:xfrm>
           <a:prstGeom prst="rect">
             <a:avLst/>
@@ -25652,7 +25652,8 @@
                 <a:cs typeface="Arial"/>
                 <a:sym typeface="Arial"/>
               </a:rPr>
-              <a:t>Le classement de la diapositive précédente tient à une seule coupure : un calage 1990-2011, puis huit années prédites d'affilée. En moyennant toutes les coupures possibles à horizon 5 ans, les cinq variantes expliquent 60 à 77 % de la variance hors échantillon, pour 5,5 à 6,4 % d'erreur relative moyenne. Les deux mesures sont justes : la seconde est plus robuste, mais porte sur un horizon plus court. Aucune des deux ne juge un modèle sur les données qui l'ont calibré.</a:t>
+              <a:t>Le classement de la diapositive précédente tient à une seule coupure : un calage 1990-2011, puis huit années prédites d'affilée. En moyennant toutes les coupures possibles à horizon 5 ans, les cinq variantes expliquent 60 à 77 % de la variance hors échantillon, pour 5,5 à 6,4 % d'erreur relative moyenne. La seconde mesure est plus robuste, mais porte sur un horizon plus court.
+Réserve : sur ce jeu synthétique, le trafic 2012-2019 croît de 5,0 % par an quand la population avance de 0,7 % et le PIB par habitant de 1,25 %. Aucun modèle fondé sur ces moteurs ne peut suivre — ces R² mesurent donc d'abord l'écart entre une trajectoire fabriquée et ses propres régresseurs.</a:t>
             </a:r>
             <a:endParaRPr b="0" i="0" sz="1400" u="none" cap="none" strike="noStrike">
               <a:solidFill>

--- a/docs/Presentation_methode_Kenza.pptx
+++ b/docs/Presentation_methode_Kenza.pptx
@@ -13671,7 +13671,7 @@
         <p:spPr>
           <a:xfrm>
             <a:off x="457200" y="1188720"/>
-            <a:ext cx="2926080" cy="365760"/>
+            <a:ext cx="2560320" cy="365760"/>
           </a:xfrm>
           <a:prstGeom prst="rect">
             <a:avLst/>
@@ -13736,8 +13736,8 @@
         </p:nvSpPr>
         <p:spPr>
           <a:xfrm>
-            <a:off x="3383280" y="1188720"/>
-            <a:ext cx="1645920" cy="365760"/>
+            <a:off x="3017520" y="1188720"/>
+            <a:ext cx="1447800" cy="365760"/>
           </a:xfrm>
           <a:prstGeom prst="rect">
             <a:avLst/>
@@ -13802,8 +13802,8 @@
         </p:nvSpPr>
         <p:spPr>
           <a:xfrm>
-            <a:off x="5029200" y="1188720"/>
-            <a:ext cx="1645920" cy="365760"/>
+            <a:off x="4465320" y="1188720"/>
+            <a:ext cx="1447800" cy="365760"/>
           </a:xfrm>
           <a:prstGeom prst="rect">
             <a:avLst/>
@@ -13868,8 +13868,8 @@
         </p:nvSpPr>
         <p:spPr>
           <a:xfrm>
-            <a:off x="6675120" y="1188720"/>
-            <a:ext cx="1645920" cy="365760"/>
+            <a:off x="5913120" y="1188720"/>
+            <a:ext cx="1447800" cy="365760"/>
           </a:xfrm>
           <a:prstGeom prst="rect">
             <a:avLst/>
@@ -13934,8 +13934,8 @@
         </p:nvSpPr>
         <p:spPr>
           <a:xfrm>
-            <a:off x="8321040" y="1188720"/>
-            <a:ext cx="1371600" cy="365760"/>
+            <a:off x="7360920" y="1188720"/>
+            <a:ext cx="1447800" cy="365760"/>
           </a:xfrm>
           <a:prstGeom prst="rect">
             <a:avLst/>
@@ -13994,14 +13994,14 @@
       </p:sp>
       <p:sp>
         <p:nvSpPr>
-          <p:cNvPr id="360" name="Google Shape;360;p15"/>
-          <p:cNvSpPr/>
-          <p:nvPr/>
-        </p:nvSpPr>
-        <p:spPr>
-          <a:xfrm>
-            <a:off x="9692640" y="1188720"/>
-            <a:ext cx="2011680" cy="365760"/>
+          <p:cNvPr id="401" name="Google Shape;359;p15"/>
+          <p:cNvSpPr/>
+          <p:nvPr/>
+        </p:nvSpPr>
+        <p:spPr>
+          <a:xfrm>
+            <a:off x="8808720" y="1188720"/>
+            <a:ext cx="1447800" cy="365760"/>
           </a:xfrm>
           <a:prstGeom prst="rect">
             <a:avLst/>
@@ -14044,7 +14044,7 @@
                 <a:cs typeface="Arial"/>
                 <a:sym typeface="Arial"/>
               </a:rPr>
-              <a:t>R² in-éch.</a:t>
+              <a:t>R² macro réelle</a:t>
             </a:r>
             <a:endParaRPr b="0" i="0" sz="1300" u="none" cap="none" strike="noStrike">
               <a:solidFill>
@@ -14060,6 +14060,72 @@
       </p:sp>
       <p:sp>
         <p:nvSpPr>
+          <p:cNvPr id="360" name="Google Shape;360;p15"/>
+          <p:cNvSpPr/>
+          <p:nvPr/>
+        </p:nvSpPr>
+        <p:spPr>
+          <a:xfrm>
+            <a:off x="10256520" y="1188720"/>
+            <a:ext cx="1447800" cy="365760"/>
+          </a:xfrm>
+          <a:prstGeom prst="rect">
+            <a:avLst/>
+          </a:prstGeom>
+          <a:noFill/>
+          <a:ln>
+            <a:noFill/>
+          </a:ln>
+        </p:spPr>
+        <p:txBody>
+          <a:bodyPr anchorCtr="0" anchor="ctr" bIns="27425" lIns="54850" spcFirstLastPara="1" rIns="54850" wrap="square" tIns="27425">
+            <a:noAutofit/>
+          </a:bodyPr>
+          <a:lstStyle/>
+          <a:p>
+            <a:pPr indent="0" lvl="0" marL="0" marR="0" rtl="0" algn="ctr">
+              <a:lnSpc>
+                <a:spcPct val="100000"/>
+              </a:lnSpc>
+              <a:spcBef>
+                <a:spcPts val="0"/>
+              </a:spcBef>
+              <a:spcAft>
+                <a:spcPts val="0"/>
+              </a:spcAft>
+              <a:buClr>
+                <a:srgbClr val="FFFFFF"/>
+              </a:buClr>
+              <a:buSzPts val="1300"/>
+              <a:buFont typeface="Calibri"/>
+              <a:buNone/>
+            </a:pPr>
+            <a:r>
+              <a:rPr b="1" i="0" lang="en-US" sz="1280" u="none" cap="none" strike="noStrike">
+                <a:solidFill>
+                  <a:srgbClr val="17324D"/>
+                </a:solidFill>
+                <a:latin typeface="Arial"/>
+                <a:ea typeface="Arial"/>
+                <a:cs typeface="Arial"/>
+                <a:sym typeface="Arial"/>
+              </a:rPr>
+              <a:t>R² in-éch.</a:t>
+            </a:r>
+            <a:endParaRPr b="0" i="0" sz="1300" u="none" cap="none" strike="noStrike">
+              <a:solidFill>
+                <a:schemeClr val="dk1"/>
+              </a:solidFill>
+              <a:latin typeface="Calibri"/>
+              <a:ea typeface="Calibri"/>
+              <a:cs typeface="Calibri"/>
+              <a:sym typeface="Calibri"/>
+            </a:endParaRPr>
+          </a:p>
+        </p:txBody>
+      </p:sp>
+      <p:sp>
+        <p:nvSpPr>
           <p:cNvPr id="361" name="Google Shape;361;p15"/>
           <p:cNvSpPr/>
           <p:nvPr/>
@@ -14126,7 +14192,7 @@
         <p:spPr>
           <a:xfrm>
             <a:off x="457200" y="1600200"/>
-            <a:ext cx="2926080" cy="438912"/>
+            <a:ext cx="2560320" cy="438912"/>
           </a:xfrm>
           <a:prstGeom prst="rect">
             <a:avLst/>
@@ -14191,8 +14257,8 @@
         </p:nvSpPr>
         <p:spPr>
           <a:xfrm>
-            <a:off x="3383280" y="1600200"/>
-            <a:ext cx="1645920" cy="438912"/>
+            <a:off x="3017520" y="1600200"/>
+            <a:ext cx="1447800" cy="438912"/>
           </a:xfrm>
           <a:prstGeom prst="rect">
             <a:avLst/>
@@ -14257,8 +14323,8 @@
         </p:nvSpPr>
         <p:spPr>
           <a:xfrm>
-            <a:off x="5029200" y="1600200"/>
-            <a:ext cx="1645920" cy="438912"/>
+            <a:off x="4465320" y="1600200"/>
+            <a:ext cx="1447800" cy="438912"/>
           </a:xfrm>
           <a:prstGeom prst="rect">
             <a:avLst/>
@@ -14323,8 +14389,8 @@
         </p:nvSpPr>
         <p:spPr>
           <a:xfrm>
-            <a:off x="6675120" y="1600200"/>
-            <a:ext cx="1645920" cy="438912"/>
+            <a:off x="5913120" y="1600200"/>
+            <a:ext cx="1447800" cy="438912"/>
           </a:xfrm>
           <a:prstGeom prst="rect">
             <a:avLst/>
@@ -14389,8 +14455,8 @@
         </p:nvSpPr>
         <p:spPr>
           <a:xfrm>
-            <a:off x="8321040" y="1600200"/>
-            <a:ext cx="1371600" cy="438912"/>
+            <a:off x="7360920" y="1600200"/>
+            <a:ext cx="1447800" cy="438912"/>
           </a:xfrm>
           <a:prstGeom prst="rect">
             <a:avLst/>
@@ -14449,14 +14515,14 @@
       </p:sp>
       <p:sp>
         <p:nvSpPr>
-          <p:cNvPr id="367" name="Google Shape;367;p15"/>
-          <p:cNvSpPr/>
-          <p:nvPr/>
-        </p:nvSpPr>
-        <p:spPr>
-          <a:xfrm>
-            <a:off x="9692640" y="1600200"/>
-            <a:ext cx="2011680" cy="438912"/>
+          <p:cNvPr id="402" name="Google Shape;366;p15"/>
+          <p:cNvSpPr/>
+          <p:nvPr/>
+        </p:nvSpPr>
+        <p:spPr>
+          <a:xfrm>
+            <a:off x="8808720" y="1600200"/>
+            <a:ext cx="1447800" cy="438912"/>
           </a:xfrm>
           <a:prstGeom prst="rect">
             <a:avLst/>
@@ -14499,7 +14565,7 @@
                 <a:cs typeface="Arial"/>
                 <a:sym typeface="Arial"/>
               </a:rPr>
-              <a:t>-0,14</a:t>
+              <a:t>-0,78</a:t>
             </a:r>
             <a:endParaRPr b="0" i="0" sz="1300" u="none" cap="none" strike="noStrike">
               <a:solidFill>
@@ -14515,6 +14581,72 @@
       </p:sp>
       <p:sp>
         <p:nvSpPr>
+          <p:cNvPr id="367" name="Google Shape;367;p15"/>
+          <p:cNvSpPr/>
+          <p:nvPr/>
+        </p:nvSpPr>
+        <p:spPr>
+          <a:xfrm>
+            <a:off x="10256520" y="1600200"/>
+            <a:ext cx="1447800" cy="438912"/>
+          </a:xfrm>
+          <a:prstGeom prst="rect">
+            <a:avLst/>
+          </a:prstGeom>
+          <a:noFill/>
+          <a:ln>
+            <a:noFill/>
+          </a:ln>
+        </p:spPr>
+        <p:txBody>
+          <a:bodyPr anchorCtr="0" anchor="ctr" bIns="27425" lIns="54850" spcFirstLastPara="1" rIns="54850" wrap="square" tIns="27425">
+            <a:noAutofit/>
+          </a:bodyPr>
+          <a:lstStyle/>
+          <a:p>
+            <a:pPr indent="0" lvl="0" marL="0" marR="0" rtl="0" algn="ctr">
+              <a:lnSpc>
+                <a:spcPct val="100000"/>
+              </a:lnSpc>
+              <a:spcBef>
+                <a:spcPts val="0"/>
+              </a:spcBef>
+              <a:spcAft>
+                <a:spcPts val="0"/>
+              </a:spcAft>
+              <a:buClr>
+                <a:srgbClr val="1F2937"/>
+              </a:buClr>
+              <a:buSzPts val="1300"/>
+              <a:buFont typeface="Calibri"/>
+              <a:buNone/>
+            </a:pPr>
+            <a:r>
+              <a:rPr b="0" i="0" lang="en-US" sz="1240" u="none" cap="none" strike="noStrike">
+                <a:solidFill>
+                  <a:srgbClr val="2F3A44"/>
+                </a:solidFill>
+                <a:latin typeface="Arial"/>
+                <a:ea typeface="Arial"/>
+                <a:cs typeface="Arial"/>
+                <a:sym typeface="Arial"/>
+              </a:rPr>
+              <a:t>-0,14</a:t>
+            </a:r>
+            <a:endParaRPr b="0" i="0" sz="1300" u="none" cap="none" strike="noStrike">
+              <a:solidFill>
+                <a:schemeClr val="dk1"/>
+              </a:solidFill>
+              <a:latin typeface="Calibri"/>
+              <a:ea typeface="Calibri"/>
+              <a:cs typeface="Calibri"/>
+              <a:sym typeface="Calibri"/>
+            </a:endParaRPr>
+          </a:p>
+        </p:txBody>
+      </p:sp>
+      <p:sp>
+        <p:nvSpPr>
           <p:cNvPr id="368" name="Google Shape;368;p15"/>
           <p:cNvSpPr/>
           <p:nvPr/>
@@ -14581,7 +14713,7 @@
         <p:spPr>
           <a:xfrm>
             <a:off x="457200" y="2039112"/>
-            <a:ext cx="2926080" cy="438912"/>
+            <a:ext cx="2560320" cy="438912"/>
           </a:xfrm>
           <a:prstGeom prst="rect">
             <a:avLst/>
@@ -14646,8 +14778,8 @@
         </p:nvSpPr>
         <p:spPr>
           <a:xfrm>
-            <a:off x="3383280" y="2039112"/>
-            <a:ext cx="1645920" cy="438912"/>
+            <a:off x="3017520" y="2039112"/>
+            <a:ext cx="1447800" cy="438912"/>
           </a:xfrm>
           <a:prstGeom prst="rect">
             <a:avLst/>
@@ -14712,8 +14844,8 @@
         </p:nvSpPr>
         <p:spPr>
           <a:xfrm>
-            <a:off x="5029200" y="2039112"/>
-            <a:ext cx="1645920" cy="438912"/>
+            <a:off x="4465320" y="2039112"/>
+            <a:ext cx="1447800" cy="438912"/>
           </a:xfrm>
           <a:prstGeom prst="rect">
             <a:avLst/>
@@ -14778,8 +14910,8 @@
         </p:nvSpPr>
         <p:spPr>
           <a:xfrm>
-            <a:off x="6675120" y="2039112"/>
-            <a:ext cx="1645920" cy="438912"/>
+            <a:off x="5913120" y="2039112"/>
+            <a:ext cx="1447800" cy="438912"/>
           </a:xfrm>
           <a:prstGeom prst="rect">
             <a:avLst/>
@@ -14844,8 +14976,8 @@
         </p:nvSpPr>
         <p:spPr>
           <a:xfrm>
-            <a:off x="8321040" y="2039112"/>
-            <a:ext cx="1371600" cy="438912"/>
+            <a:off x="7360920" y="2039112"/>
+            <a:ext cx="1447800" cy="438912"/>
           </a:xfrm>
           <a:prstGeom prst="rect">
             <a:avLst/>
@@ -14904,14 +15036,14 @@
       </p:sp>
       <p:sp>
         <p:nvSpPr>
-          <p:cNvPr id="374" name="Google Shape;374;p15"/>
-          <p:cNvSpPr/>
-          <p:nvPr/>
-        </p:nvSpPr>
-        <p:spPr>
-          <a:xfrm>
-            <a:off x="9692640" y="2039112"/>
-            <a:ext cx="2011680" cy="438912"/>
+          <p:cNvPr id="403" name="Google Shape;373;p15"/>
+          <p:cNvSpPr/>
+          <p:nvPr/>
+        </p:nvSpPr>
+        <p:spPr>
+          <a:xfrm>
+            <a:off x="8808720" y="2039112"/>
+            <a:ext cx="1447800" cy="438912"/>
           </a:xfrm>
           <a:prstGeom prst="rect">
             <a:avLst/>
@@ -14954,7 +15086,7 @@
                 <a:cs typeface="Arial"/>
                 <a:sym typeface="Arial"/>
               </a:rPr>
-              <a:t>+0,33</a:t>
+              <a:t>+0,46</a:t>
             </a:r>
             <a:endParaRPr b="0" i="0" sz="1300" u="none" cap="none" strike="noStrike">
               <a:solidFill>
@@ -14970,6 +15102,72 @@
       </p:sp>
       <p:sp>
         <p:nvSpPr>
+          <p:cNvPr id="374" name="Google Shape;374;p15"/>
+          <p:cNvSpPr/>
+          <p:nvPr/>
+        </p:nvSpPr>
+        <p:spPr>
+          <a:xfrm>
+            <a:off x="10256520" y="2039112"/>
+            <a:ext cx="1447800" cy="438912"/>
+          </a:xfrm>
+          <a:prstGeom prst="rect">
+            <a:avLst/>
+          </a:prstGeom>
+          <a:noFill/>
+          <a:ln>
+            <a:noFill/>
+          </a:ln>
+        </p:spPr>
+        <p:txBody>
+          <a:bodyPr anchorCtr="0" anchor="ctr" bIns="27425" lIns="54850" spcFirstLastPara="1" rIns="54850" wrap="square" tIns="27425">
+            <a:noAutofit/>
+          </a:bodyPr>
+          <a:lstStyle/>
+          <a:p>
+            <a:pPr indent="0" lvl="0" marL="0" marR="0" rtl="0" algn="ctr">
+              <a:lnSpc>
+                <a:spcPct val="100000"/>
+              </a:lnSpc>
+              <a:spcBef>
+                <a:spcPts val="0"/>
+              </a:spcBef>
+              <a:spcAft>
+                <a:spcPts val="0"/>
+              </a:spcAft>
+              <a:buClr>
+                <a:srgbClr val="1F2937"/>
+              </a:buClr>
+              <a:buSzPts val="1300"/>
+              <a:buFont typeface="Calibri"/>
+              <a:buNone/>
+            </a:pPr>
+            <a:r>
+              <a:rPr b="0" i="0" lang="en-US" sz="1240" u="none" cap="none" strike="noStrike">
+                <a:solidFill>
+                  <a:srgbClr val="2F3A44"/>
+                </a:solidFill>
+                <a:latin typeface="Arial"/>
+                <a:ea typeface="Arial"/>
+                <a:cs typeface="Arial"/>
+                <a:sym typeface="Arial"/>
+              </a:rPr>
+              <a:t>+0,33</a:t>
+            </a:r>
+            <a:endParaRPr b="0" i="0" sz="1300" u="none" cap="none" strike="noStrike">
+              <a:solidFill>
+                <a:schemeClr val="dk1"/>
+              </a:solidFill>
+              <a:latin typeface="Calibri"/>
+              <a:ea typeface="Calibri"/>
+              <a:cs typeface="Calibri"/>
+              <a:sym typeface="Calibri"/>
+            </a:endParaRPr>
+          </a:p>
+        </p:txBody>
+      </p:sp>
+      <p:sp>
+        <p:nvSpPr>
           <p:cNvPr id="375" name="Google Shape;375;p15"/>
           <p:cNvSpPr/>
           <p:nvPr/>
@@ -14983,7 +15181,7 @@
             <a:avLst/>
           </a:prstGeom>
           <a:solidFill>
-            <a:srgbClr val="EDF4F7"/>
+            <a:srgbClr val="E5EFF3"/>
           </a:solidFill>
           <a:ln>
             <a:noFill/>
@@ -15036,7 +15234,7 @@
         <p:spPr>
           <a:xfrm>
             <a:off x="457200" y="2478024"/>
-            <a:ext cx="2926080" cy="438912"/>
+            <a:ext cx="2560320" cy="438912"/>
           </a:xfrm>
           <a:prstGeom prst="rect">
             <a:avLst/>
@@ -15052,7 +15250,7 @@
           </a:bodyPr>
           <a:lstStyle/>
           <a:p>
-            <a:pPr indent="0" lvl="0" marL="0" marR="0" rtl="0" algn="l">
+            <a:pPr indent="0" lvl="0" marL="0" marR="0" rtl="0" algn="ctr">
               <a:lnSpc>
                 <a:spcPct val="100000"/>
               </a:lnSpc>
@@ -15070,7 +15268,7 @@
               <a:buNone/>
             </a:pPr>
             <a:r>
-              <a:rPr b="1" i="0" lang="en-US" sz="1240" u="none" cap="none" strike="noStrike">
+              <a:rPr b="0" i="0" lang="en-US" sz="1240" u="none" cap="none" strike="noStrike">
                 <a:solidFill>
                   <a:srgbClr val="17324D"/>
                 </a:solidFill>
@@ -15101,8 +15299,8 @@
         </p:nvSpPr>
         <p:spPr>
           <a:xfrm>
-            <a:off x="3383280" y="2478024"/>
-            <a:ext cx="1645920" cy="438912"/>
+            <a:off x="3017520" y="2478024"/>
+            <a:ext cx="1447800" cy="438912"/>
           </a:xfrm>
           <a:prstGeom prst="rect">
             <a:avLst/>
@@ -15167,8 +15365,8 @@
         </p:nvSpPr>
         <p:spPr>
           <a:xfrm>
-            <a:off x="5029200" y="2478024"/>
-            <a:ext cx="1645920" cy="438912"/>
+            <a:off x="4465320" y="2478024"/>
+            <a:ext cx="1447800" cy="438912"/>
           </a:xfrm>
           <a:prstGeom prst="rect">
             <a:avLst/>
@@ -15233,8 +15431,8 @@
         </p:nvSpPr>
         <p:spPr>
           <a:xfrm>
-            <a:off x="6675120" y="2478024"/>
-            <a:ext cx="1645920" cy="438912"/>
+            <a:off x="5913120" y="2478024"/>
+            <a:ext cx="1447800" cy="438912"/>
           </a:xfrm>
           <a:prstGeom prst="rect">
             <a:avLst/>
@@ -15299,8 +15497,8 @@
         </p:nvSpPr>
         <p:spPr>
           <a:xfrm>
-            <a:off x="8321040" y="2478024"/>
-            <a:ext cx="1371600" cy="438912"/>
+            <a:off x="7360920" y="2478024"/>
+            <a:ext cx="1447800" cy="438912"/>
           </a:xfrm>
           <a:prstGeom prst="rect">
             <a:avLst/>
@@ -15359,14 +15557,14 @@
       </p:sp>
       <p:sp>
         <p:nvSpPr>
-          <p:cNvPr id="381" name="Google Shape;381;p15"/>
-          <p:cNvSpPr/>
-          <p:nvPr/>
-        </p:nvSpPr>
-        <p:spPr>
-          <a:xfrm>
-            <a:off x="9692640" y="2478024"/>
-            <a:ext cx="2011680" cy="438912"/>
+          <p:cNvPr id="404" name="Google Shape;380;p15"/>
+          <p:cNvSpPr/>
+          <p:nvPr/>
+        </p:nvSpPr>
+        <p:spPr>
+          <a:xfrm>
+            <a:off x="8808720" y="2478024"/>
+            <a:ext cx="1447800" cy="438912"/>
           </a:xfrm>
           <a:prstGeom prst="rect">
             <a:avLst/>
@@ -15409,7 +15607,7 @@
                 <a:cs typeface="Arial"/>
                 <a:sym typeface="Arial"/>
               </a:rPr>
-              <a:t>1,00 *</a:t>
+              <a:t>-0,32</a:t>
             </a:r>
             <a:endParaRPr b="0" i="0" sz="1300" u="none" cap="none" strike="noStrike">
               <a:solidFill>
@@ -15425,6 +15623,72 @@
       </p:sp>
       <p:sp>
         <p:nvSpPr>
+          <p:cNvPr id="381" name="Google Shape;381;p15"/>
+          <p:cNvSpPr/>
+          <p:nvPr/>
+        </p:nvSpPr>
+        <p:spPr>
+          <a:xfrm>
+            <a:off x="10256520" y="2478024"/>
+            <a:ext cx="1447800" cy="438912"/>
+          </a:xfrm>
+          <a:prstGeom prst="rect">
+            <a:avLst/>
+          </a:prstGeom>
+          <a:noFill/>
+          <a:ln>
+            <a:noFill/>
+          </a:ln>
+        </p:spPr>
+        <p:txBody>
+          <a:bodyPr anchorCtr="0" anchor="ctr" bIns="27425" lIns="54850" spcFirstLastPara="1" rIns="54850" wrap="square" tIns="27425">
+            <a:noAutofit/>
+          </a:bodyPr>
+          <a:lstStyle/>
+          <a:p>
+            <a:pPr indent="0" lvl="0" marL="0" marR="0" rtl="0" algn="ctr">
+              <a:lnSpc>
+                <a:spcPct val="100000"/>
+              </a:lnSpc>
+              <a:spcBef>
+                <a:spcPts val="0"/>
+              </a:spcBef>
+              <a:spcAft>
+                <a:spcPts val="0"/>
+              </a:spcAft>
+              <a:buClr>
+                <a:srgbClr val="1F2937"/>
+              </a:buClr>
+              <a:buSzPts val="1300"/>
+              <a:buFont typeface="Calibri"/>
+              <a:buNone/>
+            </a:pPr>
+            <a:r>
+              <a:rPr b="0" i="0" lang="en-US" sz="1240" u="none" cap="none" strike="noStrike">
+                <a:solidFill>
+                  <a:srgbClr val="2F3A44"/>
+                </a:solidFill>
+                <a:latin typeface="Arial"/>
+                <a:ea typeface="Arial"/>
+                <a:cs typeface="Arial"/>
+                <a:sym typeface="Arial"/>
+              </a:rPr>
+              <a:t>1,00 *</a:t>
+            </a:r>
+            <a:endParaRPr b="0" i="0" sz="1300" u="none" cap="none" strike="noStrike">
+              <a:solidFill>
+                <a:schemeClr val="dk1"/>
+              </a:solidFill>
+              <a:latin typeface="Calibri"/>
+              <a:ea typeface="Calibri"/>
+              <a:cs typeface="Calibri"/>
+              <a:sym typeface="Calibri"/>
+            </a:endParaRPr>
+          </a:p>
+        </p:txBody>
+      </p:sp>
+      <p:sp>
+        <p:nvSpPr>
           <p:cNvPr id="382" name="Google Shape;382;p15"/>
           <p:cNvSpPr/>
           <p:nvPr/>
@@ -15491,7 +15755,7 @@
         <p:spPr>
           <a:xfrm>
             <a:off x="457200" y="2916936"/>
-            <a:ext cx="2926080" cy="438912"/>
+            <a:ext cx="2560320" cy="438912"/>
           </a:xfrm>
           <a:prstGeom prst="rect">
             <a:avLst/>
@@ -15556,8 +15820,8 @@
         </p:nvSpPr>
         <p:spPr>
           <a:xfrm>
-            <a:off x="3383280" y="2916936"/>
-            <a:ext cx="1645920" cy="438912"/>
+            <a:off x="3017520" y="2916936"/>
+            <a:ext cx="1447800" cy="438912"/>
           </a:xfrm>
           <a:prstGeom prst="rect">
             <a:avLst/>
@@ -15622,8 +15886,8 @@
         </p:nvSpPr>
         <p:spPr>
           <a:xfrm>
-            <a:off x="5029200" y="2916936"/>
-            <a:ext cx="1645920" cy="438912"/>
+            <a:off x="4465320" y="2916936"/>
+            <a:ext cx="1447800" cy="438912"/>
           </a:xfrm>
           <a:prstGeom prst="rect">
             <a:avLst/>
@@ -15688,8 +15952,8 @@
         </p:nvSpPr>
         <p:spPr>
           <a:xfrm>
-            <a:off x="6675120" y="2916936"/>
-            <a:ext cx="1645920" cy="438912"/>
+            <a:off x="5913120" y="2916936"/>
+            <a:ext cx="1447800" cy="438912"/>
           </a:xfrm>
           <a:prstGeom prst="rect">
             <a:avLst/>
@@ -15754,8 +16018,8 @@
         </p:nvSpPr>
         <p:spPr>
           <a:xfrm>
-            <a:off x="8321040" y="2916936"/>
-            <a:ext cx="1371600" cy="438912"/>
+            <a:off x="7360920" y="2916936"/>
+            <a:ext cx="1447800" cy="438912"/>
           </a:xfrm>
           <a:prstGeom prst="rect">
             <a:avLst/>
@@ -15814,14 +16078,14 @@
       </p:sp>
       <p:sp>
         <p:nvSpPr>
-          <p:cNvPr id="388" name="Google Shape;388;p15"/>
-          <p:cNvSpPr/>
-          <p:nvPr/>
-        </p:nvSpPr>
-        <p:spPr>
-          <a:xfrm>
-            <a:off x="9692640" y="2916936"/>
-            <a:ext cx="2011680" cy="438912"/>
+          <p:cNvPr id="405" name="Google Shape;387;p15"/>
+          <p:cNvSpPr/>
+          <p:nvPr/>
+        </p:nvSpPr>
+        <p:spPr>
+          <a:xfrm>
+            <a:off x="8808720" y="2916936"/>
+            <a:ext cx="1447800" cy="438912"/>
           </a:xfrm>
           <a:prstGeom prst="rect">
             <a:avLst/>
@@ -15864,7 +16128,7 @@
                 <a:cs typeface="Arial"/>
                 <a:sym typeface="Arial"/>
               </a:rPr>
-              <a:t>+0,78</a:t>
+              <a:t>+0,56</a:t>
             </a:r>
             <a:endParaRPr b="0" i="0" sz="1300" u="none" cap="none" strike="noStrike">
               <a:solidFill>
@@ -15880,6 +16144,72 @@
       </p:sp>
       <p:sp>
         <p:nvSpPr>
+          <p:cNvPr id="388" name="Google Shape;388;p15"/>
+          <p:cNvSpPr/>
+          <p:nvPr/>
+        </p:nvSpPr>
+        <p:spPr>
+          <a:xfrm>
+            <a:off x="10256520" y="2916936"/>
+            <a:ext cx="1447800" cy="438912"/>
+          </a:xfrm>
+          <a:prstGeom prst="rect">
+            <a:avLst/>
+          </a:prstGeom>
+          <a:noFill/>
+          <a:ln>
+            <a:noFill/>
+          </a:ln>
+        </p:spPr>
+        <p:txBody>
+          <a:bodyPr anchorCtr="0" anchor="ctr" bIns="27425" lIns="54850" spcFirstLastPara="1" rIns="54850" wrap="square" tIns="27425">
+            <a:noAutofit/>
+          </a:bodyPr>
+          <a:lstStyle/>
+          <a:p>
+            <a:pPr indent="0" lvl="0" marL="0" marR="0" rtl="0" algn="ctr">
+              <a:lnSpc>
+                <a:spcPct val="100000"/>
+              </a:lnSpc>
+              <a:spcBef>
+                <a:spcPts val="0"/>
+              </a:spcBef>
+              <a:spcAft>
+                <a:spcPts val="0"/>
+              </a:spcAft>
+              <a:buClr>
+                <a:srgbClr val="1F2937"/>
+              </a:buClr>
+              <a:buSzPts val="1300"/>
+              <a:buFont typeface="Calibri"/>
+              <a:buNone/>
+            </a:pPr>
+            <a:r>
+              <a:rPr b="0" i="0" lang="en-US" sz="1240" u="none" cap="none" strike="noStrike">
+                <a:solidFill>
+                  <a:srgbClr val="2F3A44"/>
+                </a:solidFill>
+                <a:latin typeface="Arial"/>
+                <a:ea typeface="Arial"/>
+                <a:cs typeface="Arial"/>
+                <a:sym typeface="Arial"/>
+              </a:rPr>
+              <a:t>+0,78</a:t>
+            </a:r>
+            <a:endParaRPr b="0" i="0" sz="1300" u="none" cap="none" strike="noStrike">
+              <a:solidFill>
+                <a:schemeClr val="dk1"/>
+              </a:solidFill>
+              <a:latin typeface="Calibri"/>
+              <a:ea typeface="Calibri"/>
+              <a:cs typeface="Calibri"/>
+              <a:sym typeface="Calibri"/>
+            </a:endParaRPr>
+          </a:p>
+        </p:txBody>
+      </p:sp>
+      <p:sp>
+        <p:nvSpPr>
           <p:cNvPr id="394" name="Google Shape;382;p15"/>
           <p:cNvSpPr/>
           <p:nvPr/>
@@ -15946,7 +16276,7 @@
         <p:spPr>
           <a:xfrm>
             <a:off x="457200" y="3355848"/>
-            <a:ext cx="2926080" cy="438912"/>
+            <a:ext cx="2560320" cy="438912"/>
           </a:xfrm>
           <a:prstGeom prst="rect">
             <a:avLst/>
@@ -16011,8 +16341,8 @@
         </p:nvSpPr>
         <p:spPr>
           <a:xfrm>
-            <a:off x="3383280" y="3355848"/>
-            <a:ext cx="1645920" cy="438912"/>
+            <a:off x="3017520" y="3355848"/>
+            <a:ext cx="1447800" cy="438912"/>
           </a:xfrm>
           <a:prstGeom prst="rect">
             <a:avLst/>
@@ -16077,8 +16407,8 @@
         </p:nvSpPr>
         <p:spPr>
           <a:xfrm>
-            <a:off x="5029200" y="3355848"/>
-            <a:ext cx="1645920" cy="438912"/>
+            <a:off x="4465320" y="3355848"/>
+            <a:ext cx="1447800" cy="438912"/>
           </a:xfrm>
           <a:prstGeom prst="rect">
             <a:avLst/>
@@ -16143,8 +16473,8 @@
         </p:nvSpPr>
         <p:spPr>
           <a:xfrm>
-            <a:off x="6675120" y="3355848"/>
-            <a:ext cx="1645920" cy="438912"/>
+            <a:off x="5913120" y="3355848"/>
+            <a:ext cx="1447800" cy="438912"/>
           </a:xfrm>
           <a:prstGeom prst="rect">
             <a:avLst/>
@@ -16209,8 +16539,8 @@
         </p:nvSpPr>
         <p:spPr>
           <a:xfrm>
-            <a:off x="8321040" y="3355848"/>
-            <a:ext cx="1371600" cy="438912"/>
+            <a:off x="7360920" y="3355848"/>
+            <a:ext cx="1447800" cy="438912"/>
           </a:xfrm>
           <a:prstGeom prst="rect">
             <a:avLst/>
@@ -16269,14 +16599,14 @@
       </p:sp>
       <p:sp>
         <p:nvSpPr>
-          <p:cNvPr id="400" name="Google Shape;388;p15"/>
-          <p:cNvSpPr/>
-          <p:nvPr/>
-        </p:nvSpPr>
-        <p:spPr>
-          <a:xfrm>
-            <a:off x="9692640" y="3355848"/>
-            <a:ext cx="2011680" cy="438912"/>
+          <p:cNvPr id="406" name="Google Shape;387;p15"/>
+          <p:cNvSpPr/>
+          <p:nvPr/>
+        </p:nvSpPr>
+        <p:spPr>
+          <a:xfrm>
+            <a:off x="8808720" y="3355848"/>
+            <a:ext cx="1447800" cy="438912"/>
           </a:xfrm>
           <a:prstGeom prst="rect">
             <a:avLst/>
@@ -16319,7 +16649,7 @@
                 <a:cs typeface="Arial"/>
                 <a:sym typeface="Arial"/>
               </a:rPr>
-              <a:t>+0,88</a:t>
+              <a:t>-0,55</a:t>
             </a:r>
             <a:endParaRPr b="0" i="0" sz="1300" u="none" cap="none" strike="noStrike">
               <a:solidFill>
@@ -16335,14 +16665,14 @@
       </p:sp>
       <p:sp>
         <p:nvSpPr>
-          <p:cNvPr id="389" name="Google Shape;389;p15"/>
-          <p:cNvSpPr/>
-          <p:nvPr/>
-        </p:nvSpPr>
-        <p:spPr>
-          <a:xfrm>
-            <a:off x="457200" y="3931920"/>
-            <a:ext cx="10972800" cy="274320"/>
+          <p:cNvPr id="400" name="Google Shape;388;p15"/>
+          <p:cNvSpPr/>
+          <p:nvPr/>
+        </p:nvSpPr>
+        <p:spPr>
+          <a:xfrm>
+            <a:off x="10256520" y="3355848"/>
+            <a:ext cx="1447800" cy="438912"/>
           </a:xfrm>
           <a:prstGeom prst="rect">
             <a:avLst/>
@@ -16358,34 +16688,100 @@
           </a:bodyPr>
           <a:lstStyle/>
           <a:p>
-            <a:pPr indent="0" lvl="0" marL="0" marR="0" rtl="0" algn="l">
-              <a:lnSpc>
-                <a:spcPct val="100000"/>
-              </a:lnSpc>
-              <a:spcBef>
-                <a:spcPts val="0"/>
-              </a:spcBef>
-              <a:spcAft>
-                <a:spcPts val="0"/>
-              </a:spcAft>
-              <a:buClr>
-                <a:srgbClr val="4B5563"/>
-              </a:buClr>
-              <a:buSzPts val="1200"/>
+            <a:pPr indent="0" lvl="0" marL="0" marR="0" rtl="0" algn="ctr">
+              <a:lnSpc>
+                <a:spcPct val="100000"/>
+              </a:lnSpc>
+              <a:spcBef>
+                <a:spcPts val="0"/>
+              </a:spcBef>
+              <a:spcAft>
+                <a:spcPts val="0"/>
+              </a:spcAft>
+              <a:buClr>
+                <a:srgbClr val="1F2937"/>
+              </a:buClr>
+              <a:buSzPts val="1300"/>
               <a:buFont typeface="Calibri"/>
               <a:buNone/>
             </a:pPr>
             <a:r>
-              <a:rPr b="0" i="0" lang="en-US" sz="1050" u="none" cap="none" strike="noStrike">
-                <a:solidFill>
-                  <a:srgbClr val="6F7A84"/>
+              <a:rPr b="0" i="0" lang="en-US" sz="1240" u="none" cap="none" strike="noStrike">
+                <a:solidFill>
+                  <a:srgbClr val="2F3A44"/>
                 </a:solidFill>
                 <a:latin typeface="Arial"/>
                 <a:ea typeface="Arial"/>
                 <a:cs typeface="Arial"/>
                 <a:sym typeface="Arial"/>
               </a:rPr>
-              <a:t>* R² in-échantillon = 1 par construction : Kenza indexé inverse la distribution à partir du trafic observé. Seule la colonne hors échantillon mesure un pouvoir prédictif.</a:t>
+              <a:t>+0,88</a:t>
+            </a:r>
+            <a:endParaRPr b="0" i="0" sz="1300" u="none" cap="none" strike="noStrike">
+              <a:solidFill>
+                <a:schemeClr val="dk1"/>
+              </a:solidFill>
+              <a:latin typeface="Calibri"/>
+              <a:ea typeface="Calibri"/>
+              <a:cs typeface="Calibri"/>
+              <a:sym typeface="Calibri"/>
+            </a:endParaRPr>
+          </a:p>
+        </p:txBody>
+      </p:sp>
+      <p:sp>
+        <p:nvSpPr>
+          <p:cNvPr id="389" name="Google Shape;389;p15"/>
+          <p:cNvSpPr/>
+          <p:nvPr/>
+        </p:nvSpPr>
+        <p:spPr>
+          <a:xfrm>
+            <a:off x="457200" y="3931920"/>
+            <a:ext cx="10972800" cy="274320"/>
+          </a:xfrm>
+          <a:prstGeom prst="rect">
+            <a:avLst/>
+          </a:prstGeom>
+          <a:noFill/>
+          <a:ln>
+            <a:noFill/>
+          </a:ln>
+        </p:spPr>
+        <p:txBody>
+          <a:bodyPr anchorCtr="0" anchor="ctr" bIns="27425" lIns="54850" spcFirstLastPara="1" rIns="54850" wrap="square" tIns="27425">
+            <a:noAutofit/>
+          </a:bodyPr>
+          <a:lstStyle/>
+          <a:p>
+            <a:pPr indent="0" lvl="0" marL="0" marR="0" rtl="0" algn="l">
+              <a:lnSpc>
+                <a:spcPct val="100000"/>
+              </a:lnSpc>
+              <a:spcBef>
+                <a:spcPts val="0"/>
+              </a:spcBef>
+              <a:spcAft>
+                <a:spcPts val="0"/>
+              </a:spcAft>
+              <a:buClr>
+                <a:srgbClr val="4B5563"/>
+              </a:buClr>
+              <a:buSzPts val="1200"/>
+              <a:buFont typeface="Calibri"/>
+              <a:buNone/>
+            </a:pPr>
+            <a:r>
+              <a:rPr b="0" i="0" lang="en-US" sz="1050" u="none" cap="none" strike="noStrike">
+                <a:solidFill>
+                  <a:srgbClr val="6F7A84"/>
+                </a:solidFill>
+                <a:latin typeface="Arial"/>
+                <a:ea typeface="Arial"/>
+                <a:cs typeface="Arial"/>
+                <a:sym typeface="Arial"/>
+              </a:rPr>
+              <a:t>* R² in-échantillon = 1 par construction : Kenza indexé inverse la distribution à partir du trafic observé. « R² hors éch. » projette la macro aux hypothèses par défaut du code (population +1 %, PIB +3 %, prix +2 % par an) ; « R² macro réelle » rejoue la même prévision avec la macro observée sur 2012-2019 (+0,73 %, +1,25 %, −0,69 %).</a:t>
             </a:r>
             <a:endParaRPr b="0" i="0" sz="1200" u="none" cap="none" strike="noStrike">
               <a:solidFill>
@@ -16584,7 +16980,7 @@
                 <a:cs typeface="Arial"/>
                 <a:sym typeface="Arial"/>
               </a:rPr>
-              <a:t>Calage 1990-2011, validation 2012-2019. Hors échantillon, les variantes indexées dominent nettement ; Kenza simplifié, sur les coefficients calibrés du classeur Excel, ne fait pas mieux que la moyenne (R² ≈ 0). Un score « sur historique » ne classe pas les modèles : Kenza indexé y affiche un R² de 1 sans qu'il mesure quoi que ce soit. Le choix final dépendra des données disponibles (prix ou non) et des besoins de scénarios.</a:t>
+              <a:t>Calage 1990-2011, validation 2012-2019. Les deux colonnes hors échantillon rejouent la même prévision sous des hypothèses macro différentes, et le classement s'inverse : Kenza indexé passe de +0,66 à −0,32, Kenza simplifié de −0,05 à +0,46. À huit ans d'horizon, l'écart entre un PIB supposé à +3 % par an et le +1,25 % observé pèse plus lourd que le choix du modèle. Aucune de ces colonnes ne classe donc les variantes — la diapositive suivante s'y emploie, à horizon plus court.</a:t>
             </a:r>
             <a:endParaRPr b="0" i="0" sz="1400" u="none" cap="none" strike="noStrike">
               <a:solidFill>
@@ -22739,7 +23135,7 @@
         <p:spPr>
           <a:xfrm>
             <a:off x="457200" y="1188720"/>
-            <a:ext cx="2926080" cy="365760"/>
+            <a:ext cx="2560320" cy="365760"/>
           </a:xfrm>
           <a:prstGeom prst="rect">
             <a:avLst/>
@@ -22804,8 +23200,8 @@
         </p:nvSpPr>
         <p:spPr>
           <a:xfrm>
-            <a:off x="3383280" y="1188720"/>
-            <a:ext cx="1645920" cy="365760"/>
+            <a:off x="3017520" y="1188720"/>
+            <a:ext cx="1447800" cy="365760"/>
           </a:xfrm>
           <a:prstGeom prst="rect">
             <a:avLst/>
@@ -22870,8 +23266,8 @@
         </p:nvSpPr>
         <p:spPr>
           <a:xfrm>
-            <a:off x="5029200" y="1188720"/>
-            <a:ext cx="1645920" cy="365760"/>
+            <a:off x="4465320" y="1188720"/>
+            <a:ext cx="1447800" cy="365760"/>
           </a:xfrm>
           <a:prstGeom prst="rect">
             <a:avLst/>
@@ -22936,8 +23332,8 @@
         </p:nvSpPr>
         <p:spPr>
           <a:xfrm>
-            <a:off x="6675120" y="1188720"/>
-            <a:ext cx="1645920" cy="365760"/>
+            <a:off x="5913120" y="1188720"/>
+            <a:ext cx="1447800" cy="365760"/>
           </a:xfrm>
           <a:prstGeom prst="rect">
             <a:avLst/>
@@ -23002,8 +23398,8 @@
         </p:nvSpPr>
         <p:spPr>
           <a:xfrm>
-            <a:off x="8321040" y="1188720"/>
-            <a:ext cx="1371600" cy="365760"/>
+            <a:off x="7360920" y="1188720"/>
+            <a:ext cx="1447800" cy="365760"/>
           </a:xfrm>
           <a:prstGeom prst="rect">
             <a:avLst/>
@@ -23062,14 +23458,14 @@
       </p:sp>
       <p:sp>
         <p:nvSpPr>
-          <p:cNvPr id="360" name="Google Shape;360;p15"/>
-          <p:cNvSpPr/>
-          <p:nvPr/>
-        </p:nvSpPr>
-        <p:spPr>
-          <a:xfrm>
-            <a:off x="9692640" y="1188720"/>
-            <a:ext cx="2011680" cy="365760"/>
+          <p:cNvPr id="401" name="Google Shape;359;p15"/>
+          <p:cNvSpPr/>
+          <p:nvPr/>
+        </p:nvSpPr>
+        <p:spPr>
+          <a:xfrm>
+            <a:off x="8808720" y="1188720"/>
+            <a:ext cx="1447800" cy="365760"/>
           </a:xfrm>
           <a:prstGeom prst="rect">
             <a:avLst/>
@@ -23112,7 +23508,7 @@
                 <a:cs typeface="Arial"/>
                 <a:sym typeface="Arial"/>
               </a:rPr>
-              <a:t>R² 1 coupure</a:t>
+              <a:t>R² macro réelle</a:t>
             </a:r>
             <a:endParaRPr b="0" i="0" sz="1300" u="none" cap="none" strike="noStrike">
               <a:solidFill>
@@ -23128,6 +23524,72 @@
       </p:sp>
       <p:sp>
         <p:nvSpPr>
+          <p:cNvPr id="360" name="Google Shape;360;p15"/>
+          <p:cNvSpPr/>
+          <p:nvPr/>
+        </p:nvSpPr>
+        <p:spPr>
+          <a:xfrm>
+            <a:off x="10256520" y="1188720"/>
+            <a:ext cx="1447800" cy="365760"/>
+          </a:xfrm>
+          <a:prstGeom prst="rect">
+            <a:avLst/>
+          </a:prstGeom>
+          <a:noFill/>
+          <a:ln>
+            <a:noFill/>
+          </a:ln>
+        </p:spPr>
+        <p:txBody>
+          <a:bodyPr anchorCtr="0" anchor="ctr" bIns="27425" lIns="54850" spcFirstLastPara="1" rIns="54850" wrap="square" tIns="27425">
+            <a:noAutofit/>
+          </a:bodyPr>
+          <a:lstStyle/>
+          <a:p>
+            <a:pPr indent="0" lvl="0" marL="0" marR="0" rtl="0" algn="ctr">
+              <a:lnSpc>
+                <a:spcPct val="100000"/>
+              </a:lnSpc>
+              <a:spcBef>
+                <a:spcPts val="0"/>
+              </a:spcBef>
+              <a:spcAft>
+                <a:spcPts val="0"/>
+              </a:spcAft>
+              <a:buClr>
+                <a:srgbClr val="FFFFFF"/>
+              </a:buClr>
+              <a:buSzPts val="1300"/>
+              <a:buFont typeface="Calibri"/>
+              <a:buNone/>
+            </a:pPr>
+            <a:r>
+              <a:rPr b="1" i="0" lang="en-US" sz="1280" u="none" cap="none" strike="noStrike">
+                <a:solidFill>
+                  <a:srgbClr val="17324D"/>
+                </a:solidFill>
+                <a:latin typeface="Arial"/>
+                <a:ea typeface="Arial"/>
+                <a:cs typeface="Arial"/>
+                <a:sym typeface="Arial"/>
+              </a:rPr>
+              <a:t>R² 1 coupure</a:t>
+            </a:r>
+            <a:endParaRPr b="0" i="0" sz="1300" u="none" cap="none" strike="noStrike">
+              <a:solidFill>
+                <a:schemeClr val="dk1"/>
+              </a:solidFill>
+              <a:latin typeface="Calibri"/>
+              <a:ea typeface="Calibri"/>
+              <a:cs typeface="Calibri"/>
+              <a:sym typeface="Calibri"/>
+            </a:endParaRPr>
+          </a:p>
+        </p:txBody>
+      </p:sp>
+      <p:sp>
+        <p:nvSpPr>
           <p:cNvPr id="361" name="Google Shape;361;p15"/>
           <p:cNvSpPr/>
           <p:nvPr/>
@@ -23194,7 +23656,7 @@
         <p:spPr>
           <a:xfrm>
             <a:off x="457200" y="1600200"/>
-            <a:ext cx="2926080" cy="438912"/>
+            <a:ext cx="2560320" cy="438912"/>
           </a:xfrm>
           <a:prstGeom prst="rect">
             <a:avLst/>
@@ -23259,8 +23721,8 @@
         </p:nvSpPr>
         <p:spPr>
           <a:xfrm>
-            <a:off x="3383280" y="1600200"/>
-            <a:ext cx="1645920" cy="438912"/>
+            <a:off x="3017520" y="1600200"/>
+            <a:ext cx="1447800" cy="438912"/>
           </a:xfrm>
           <a:prstGeom prst="rect">
             <a:avLst/>
@@ -23325,8 +23787,8 @@
         </p:nvSpPr>
         <p:spPr>
           <a:xfrm>
-            <a:off x="5029200" y="1600200"/>
-            <a:ext cx="1645920" cy="438912"/>
+            <a:off x="4465320" y="1600200"/>
+            <a:ext cx="1447800" cy="438912"/>
           </a:xfrm>
           <a:prstGeom prst="rect">
             <a:avLst/>
@@ -23391,8 +23853,8 @@
         </p:nvSpPr>
         <p:spPr>
           <a:xfrm>
-            <a:off x="6675120" y="1600200"/>
-            <a:ext cx="1645920" cy="438912"/>
+            <a:off x="5913120" y="1600200"/>
+            <a:ext cx="1447800" cy="438912"/>
           </a:xfrm>
           <a:prstGeom prst="rect">
             <a:avLst/>
@@ -23457,8 +23919,8 @@
         </p:nvSpPr>
         <p:spPr>
           <a:xfrm>
-            <a:off x="8321040" y="1600200"/>
-            <a:ext cx="1371600" cy="438912"/>
+            <a:off x="7360920" y="1600200"/>
+            <a:ext cx="1447800" cy="438912"/>
           </a:xfrm>
           <a:prstGeom prst="rect">
             <a:avLst/>
@@ -23517,14 +23979,14 @@
       </p:sp>
       <p:sp>
         <p:nvSpPr>
-          <p:cNvPr id="367" name="Google Shape;367;p15"/>
-          <p:cNvSpPr/>
-          <p:nvPr/>
-        </p:nvSpPr>
-        <p:spPr>
-          <a:xfrm>
-            <a:off x="9692640" y="1600200"/>
-            <a:ext cx="2011680" cy="438912"/>
+          <p:cNvPr id="402" name="Google Shape;366;p15"/>
+          <p:cNvSpPr/>
+          <p:nvPr/>
+        </p:nvSpPr>
+        <p:spPr>
+          <a:xfrm>
+            <a:off x="8808720" y="1600200"/>
+            <a:ext cx="1447800" cy="438912"/>
           </a:xfrm>
           <a:prstGeom prst="rect">
             <a:avLst/>
@@ -23567,7 +24029,7 @@
                 <a:cs typeface="Arial"/>
                 <a:sym typeface="Arial"/>
               </a:rPr>
-              <a:t>-0,82</a:t>
+              <a:t>+0,54</a:t>
             </a:r>
             <a:endParaRPr b="0" i="0" sz="1300" u="none" cap="none" strike="noStrike">
               <a:solidFill>
@@ -23583,6 +24045,72 @@
       </p:sp>
       <p:sp>
         <p:nvSpPr>
+          <p:cNvPr id="367" name="Google Shape;367;p15"/>
+          <p:cNvSpPr/>
+          <p:nvPr/>
+        </p:nvSpPr>
+        <p:spPr>
+          <a:xfrm>
+            <a:off x="10256520" y="1600200"/>
+            <a:ext cx="1447800" cy="438912"/>
+          </a:xfrm>
+          <a:prstGeom prst="rect">
+            <a:avLst/>
+          </a:prstGeom>
+          <a:noFill/>
+          <a:ln>
+            <a:noFill/>
+          </a:ln>
+        </p:spPr>
+        <p:txBody>
+          <a:bodyPr anchorCtr="0" anchor="ctr" bIns="27425" lIns="54850" spcFirstLastPara="1" rIns="54850" wrap="square" tIns="27425">
+            <a:noAutofit/>
+          </a:bodyPr>
+          <a:lstStyle/>
+          <a:p>
+            <a:pPr indent="0" lvl="0" marL="0" marR="0" rtl="0" algn="ctr">
+              <a:lnSpc>
+                <a:spcPct val="100000"/>
+              </a:lnSpc>
+              <a:spcBef>
+                <a:spcPts val="0"/>
+              </a:spcBef>
+              <a:spcAft>
+                <a:spcPts val="0"/>
+              </a:spcAft>
+              <a:buClr>
+                <a:srgbClr val="1F2937"/>
+              </a:buClr>
+              <a:buSzPts val="1300"/>
+              <a:buFont typeface="Calibri"/>
+              <a:buNone/>
+            </a:pPr>
+            <a:r>
+              <a:rPr b="0" i="0" lang="en-US" sz="1240" u="none" cap="none" strike="noStrike">
+                <a:solidFill>
+                  <a:srgbClr val="2F3A44"/>
+                </a:solidFill>
+                <a:latin typeface="Arial"/>
+                <a:ea typeface="Arial"/>
+                <a:cs typeface="Arial"/>
+                <a:sym typeface="Arial"/>
+              </a:rPr>
+              <a:t>-0,82</a:t>
+            </a:r>
+            <a:endParaRPr b="0" i="0" sz="1300" u="none" cap="none" strike="noStrike">
+              <a:solidFill>
+                <a:schemeClr val="dk1"/>
+              </a:solidFill>
+              <a:latin typeface="Calibri"/>
+              <a:ea typeface="Calibri"/>
+              <a:cs typeface="Calibri"/>
+              <a:sym typeface="Calibri"/>
+            </a:endParaRPr>
+          </a:p>
+        </p:txBody>
+      </p:sp>
+      <p:sp>
+        <p:nvSpPr>
           <p:cNvPr id="368" name="Google Shape;368;p15"/>
           <p:cNvSpPr/>
           <p:nvPr/>
@@ -23649,7 +24177,7 @@
         <p:spPr>
           <a:xfrm>
             <a:off x="457200" y="2039112"/>
-            <a:ext cx="2926080" cy="438912"/>
+            <a:ext cx="2560320" cy="438912"/>
           </a:xfrm>
           <a:prstGeom prst="rect">
             <a:avLst/>
@@ -23714,8 +24242,8 @@
         </p:nvSpPr>
         <p:spPr>
           <a:xfrm>
-            <a:off x="3383280" y="2039112"/>
-            <a:ext cx="1645920" cy="438912"/>
+            <a:off x="3017520" y="2039112"/>
+            <a:ext cx="1447800" cy="438912"/>
           </a:xfrm>
           <a:prstGeom prst="rect">
             <a:avLst/>
@@ -23780,8 +24308,8 @@
         </p:nvSpPr>
         <p:spPr>
           <a:xfrm>
-            <a:off x="5029200" y="2039112"/>
-            <a:ext cx="1645920" cy="438912"/>
+            <a:off x="4465320" y="2039112"/>
+            <a:ext cx="1447800" cy="438912"/>
           </a:xfrm>
           <a:prstGeom prst="rect">
             <a:avLst/>
@@ -23846,8 +24374,8 @@
         </p:nvSpPr>
         <p:spPr>
           <a:xfrm>
-            <a:off x="6675120" y="2039112"/>
-            <a:ext cx="1645920" cy="438912"/>
+            <a:off x="5913120" y="2039112"/>
+            <a:ext cx="1447800" cy="438912"/>
           </a:xfrm>
           <a:prstGeom prst="rect">
             <a:avLst/>
@@ -23912,8 +24440,8 @@
         </p:nvSpPr>
         <p:spPr>
           <a:xfrm>
-            <a:off x="8321040" y="2039112"/>
-            <a:ext cx="1371600" cy="438912"/>
+            <a:off x="7360920" y="2039112"/>
+            <a:ext cx="1447800" cy="438912"/>
           </a:xfrm>
           <a:prstGeom prst="rect">
             <a:avLst/>
@@ -23972,14 +24500,14 @@
       </p:sp>
       <p:sp>
         <p:nvSpPr>
-          <p:cNvPr id="374" name="Google Shape;374;p15"/>
-          <p:cNvSpPr/>
-          <p:nvPr/>
-        </p:nvSpPr>
-        <p:spPr>
-          <a:xfrm>
-            <a:off x="9692640" y="2039112"/>
-            <a:ext cx="2011680" cy="438912"/>
+          <p:cNvPr id="403" name="Google Shape;373;p15"/>
+          <p:cNvSpPr/>
+          <p:nvPr/>
+        </p:nvSpPr>
+        <p:spPr>
+          <a:xfrm>
+            <a:off x="8808720" y="2039112"/>
+            <a:ext cx="1447800" cy="438912"/>
           </a:xfrm>
           <a:prstGeom prst="rect">
             <a:avLst/>
@@ -24022,7 +24550,7 @@
                 <a:cs typeface="Arial"/>
                 <a:sym typeface="Arial"/>
               </a:rPr>
-              <a:t>-0,05</a:t>
+              <a:t>+0,62</a:t>
             </a:r>
             <a:endParaRPr b="0" i="0" sz="1300" u="none" cap="none" strike="noStrike">
               <a:solidFill>
@@ -24038,6 +24566,72 @@
       </p:sp>
       <p:sp>
         <p:nvSpPr>
+          <p:cNvPr id="374" name="Google Shape;374;p15"/>
+          <p:cNvSpPr/>
+          <p:nvPr/>
+        </p:nvSpPr>
+        <p:spPr>
+          <a:xfrm>
+            <a:off x="10256520" y="2039112"/>
+            <a:ext cx="1447800" cy="438912"/>
+          </a:xfrm>
+          <a:prstGeom prst="rect">
+            <a:avLst/>
+          </a:prstGeom>
+          <a:noFill/>
+          <a:ln>
+            <a:noFill/>
+          </a:ln>
+        </p:spPr>
+        <p:txBody>
+          <a:bodyPr anchorCtr="0" anchor="ctr" bIns="27425" lIns="54850" spcFirstLastPara="1" rIns="54850" wrap="square" tIns="27425">
+            <a:noAutofit/>
+          </a:bodyPr>
+          <a:lstStyle/>
+          <a:p>
+            <a:pPr indent="0" lvl="0" marL="0" marR="0" rtl="0" algn="ctr">
+              <a:lnSpc>
+                <a:spcPct val="100000"/>
+              </a:lnSpc>
+              <a:spcBef>
+                <a:spcPts val="0"/>
+              </a:spcBef>
+              <a:spcAft>
+                <a:spcPts val="0"/>
+              </a:spcAft>
+              <a:buClr>
+                <a:srgbClr val="1F2937"/>
+              </a:buClr>
+              <a:buSzPts val="1300"/>
+              <a:buFont typeface="Calibri"/>
+              <a:buNone/>
+            </a:pPr>
+            <a:r>
+              <a:rPr b="0" i="0" lang="en-US" sz="1240" u="none" cap="none" strike="noStrike">
+                <a:solidFill>
+                  <a:srgbClr val="2F3A44"/>
+                </a:solidFill>
+                <a:latin typeface="Arial"/>
+                <a:ea typeface="Arial"/>
+                <a:cs typeface="Arial"/>
+                <a:sym typeface="Arial"/>
+              </a:rPr>
+              <a:t>-0,05</a:t>
+            </a:r>
+            <a:endParaRPr b="0" i="0" sz="1300" u="none" cap="none" strike="noStrike">
+              <a:solidFill>
+                <a:schemeClr val="dk1"/>
+              </a:solidFill>
+              <a:latin typeface="Calibri"/>
+              <a:ea typeface="Calibri"/>
+              <a:cs typeface="Calibri"/>
+              <a:sym typeface="Calibri"/>
+            </a:endParaRPr>
+          </a:p>
+        </p:txBody>
+      </p:sp>
+      <p:sp>
+        <p:nvSpPr>
           <p:cNvPr id="375" name="Google Shape;375;p15"/>
           <p:cNvSpPr/>
           <p:nvPr/>
@@ -24051,7 +24645,7 @@
             <a:avLst/>
           </a:prstGeom>
           <a:solidFill>
-            <a:srgbClr val="EDF4F7"/>
+            <a:srgbClr val="E5EFF3"/>
           </a:solidFill>
           <a:ln>
             <a:noFill/>
@@ -24104,7 +24698,7 @@
         <p:spPr>
           <a:xfrm>
             <a:off x="457200" y="2478024"/>
-            <a:ext cx="2926080" cy="438912"/>
+            <a:ext cx="2560320" cy="438912"/>
           </a:xfrm>
           <a:prstGeom prst="rect">
             <a:avLst/>
@@ -24120,7 +24714,7 @@
           </a:bodyPr>
           <a:lstStyle/>
           <a:p>
-            <a:pPr indent="0" lvl="0" marL="0" marR="0" rtl="0" algn="l">
+            <a:pPr indent="0" lvl="0" marL="0" marR="0" rtl="0" algn="ctr">
               <a:lnSpc>
                 <a:spcPct val="100000"/>
               </a:lnSpc>
@@ -24138,7 +24732,7 @@
               <a:buNone/>
             </a:pPr>
             <a:r>
-              <a:rPr b="1" i="0" lang="en-US" sz="1240" u="none" cap="none" strike="noStrike">
+              <a:rPr b="0" i="0" lang="en-US" sz="1240" u="none" cap="none" strike="noStrike">
                 <a:solidFill>
                   <a:srgbClr val="17324D"/>
                 </a:solidFill>
@@ -24169,8 +24763,8 @@
         </p:nvSpPr>
         <p:spPr>
           <a:xfrm>
-            <a:off x="3383280" y="2478024"/>
-            <a:ext cx="1645920" cy="438912"/>
+            <a:off x="3017520" y="2478024"/>
+            <a:ext cx="1447800" cy="438912"/>
           </a:xfrm>
           <a:prstGeom prst="rect">
             <a:avLst/>
@@ -24235,8 +24829,8 @@
         </p:nvSpPr>
         <p:spPr>
           <a:xfrm>
-            <a:off x="5029200" y="2478024"/>
-            <a:ext cx="1645920" cy="438912"/>
+            <a:off x="4465320" y="2478024"/>
+            <a:ext cx="1447800" cy="438912"/>
           </a:xfrm>
           <a:prstGeom prst="rect">
             <a:avLst/>
@@ -24301,8 +24895,8 @@
         </p:nvSpPr>
         <p:spPr>
           <a:xfrm>
-            <a:off x="6675120" y="2478024"/>
-            <a:ext cx="1645920" cy="438912"/>
+            <a:off x="5913120" y="2478024"/>
+            <a:ext cx="1447800" cy="438912"/>
           </a:xfrm>
           <a:prstGeom prst="rect">
             <a:avLst/>
@@ -24367,8 +24961,8 @@
         </p:nvSpPr>
         <p:spPr>
           <a:xfrm>
-            <a:off x="8321040" y="2478024"/>
-            <a:ext cx="1371600" cy="438912"/>
+            <a:off x="7360920" y="2478024"/>
+            <a:ext cx="1447800" cy="438912"/>
           </a:xfrm>
           <a:prstGeom prst="rect">
             <a:avLst/>
@@ -24427,14 +25021,14 @@
       </p:sp>
       <p:sp>
         <p:nvSpPr>
-          <p:cNvPr id="381" name="Google Shape;381;p15"/>
-          <p:cNvSpPr/>
-          <p:nvPr/>
-        </p:nvSpPr>
-        <p:spPr>
-          <a:xfrm>
-            <a:off x="9692640" y="2478024"/>
-            <a:ext cx="2011680" cy="438912"/>
+          <p:cNvPr id="404" name="Google Shape;380;p15"/>
+          <p:cNvSpPr/>
+          <p:nvPr/>
+        </p:nvSpPr>
+        <p:spPr>
+          <a:xfrm>
+            <a:off x="8808720" y="2478024"/>
+            <a:ext cx="1447800" cy="438912"/>
           </a:xfrm>
           <a:prstGeom prst="rect">
             <a:avLst/>
@@ -24477,7 +25071,7 @@
                 <a:cs typeface="Arial"/>
                 <a:sym typeface="Arial"/>
               </a:rPr>
-              <a:t>+0,66</a:t>
+              <a:t>+0,68</a:t>
             </a:r>
             <a:endParaRPr b="0" i="0" sz="1300" u="none" cap="none" strike="noStrike">
               <a:solidFill>
@@ -24493,6 +25087,72 @@
       </p:sp>
       <p:sp>
         <p:nvSpPr>
+          <p:cNvPr id="381" name="Google Shape;381;p15"/>
+          <p:cNvSpPr/>
+          <p:nvPr/>
+        </p:nvSpPr>
+        <p:spPr>
+          <a:xfrm>
+            <a:off x="10256520" y="2478024"/>
+            <a:ext cx="1447800" cy="438912"/>
+          </a:xfrm>
+          <a:prstGeom prst="rect">
+            <a:avLst/>
+          </a:prstGeom>
+          <a:noFill/>
+          <a:ln>
+            <a:noFill/>
+          </a:ln>
+        </p:spPr>
+        <p:txBody>
+          <a:bodyPr anchorCtr="0" anchor="ctr" bIns="27425" lIns="54850" spcFirstLastPara="1" rIns="54850" wrap="square" tIns="27425">
+            <a:noAutofit/>
+          </a:bodyPr>
+          <a:lstStyle/>
+          <a:p>
+            <a:pPr indent="0" lvl="0" marL="0" marR="0" rtl="0" algn="ctr">
+              <a:lnSpc>
+                <a:spcPct val="100000"/>
+              </a:lnSpc>
+              <a:spcBef>
+                <a:spcPts val="0"/>
+              </a:spcBef>
+              <a:spcAft>
+                <a:spcPts val="0"/>
+              </a:spcAft>
+              <a:buClr>
+                <a:srgbClr val="1F2937"/>
+              </a:buClr>
+              <a:buSzPts val="1300"/>
+              <a:buFont typeface="Calibri"/>
+              <a:buNone/>
+            </a:pPr>
+            <a:r>
+              <a:rPr b="0" i="0" lang="en-US" sz="1240" u="none" cap="none" strike="noStrike">
+                <a:solidFill>
+                  <a:srgbClr val="2F3A44"/>
+                </a:solidFill>
+                <a:latin typeface="Arial"/>
+                <a:ea typeface="Arial"/>
+                <a:cs typeface="Arial"/>
+                <a:sym typeface="Arial"/>
+              </a:rPr>
+              <a:t>+0,66</a:t>
+            </a:r>
+            <a:endParaRPr b="0" i="0" sz="1300" u="none" cap="none" strike="noStrike">
+              <a:solidFill>
+                <a:schemeClr val="dk1"/>
+              </a:solidFill>
+              <a:latin typeface="Calibri"/>
+              <a:ea typeface="Calibri"/>
+              <a:cs typeface="Calibri"/>
+              <a:sym typeface="Calibri"/>
+            </a:endParaRPr>
+          </a:p>
+        </p:txBody>
+      </p:sp>
+      <p:sp>
+        <p:nvSpPr>
           <p:cNvPr id="382" name="Google Shape;382;p15"/>
           <p:cNvSpPr/>
           <p:nvPr/>
@@ -24559,7 +25219,7 @@
         <p:spPr>
           <a:xfrm>
             <a:off x="457200" y="2916936"/>
-            <a:ext cx="2926080" cy="438912"/>
+            <a:ext cx="2560320" cy="438912"/>
           </a:xfrm>
           <a:prstGeom prst="rect">
             <a:avLst/>
@@ -24624,8 +25284,8 @@
         </p:nvSpPr>
         <p:spPr>
           <a:xfrm>
-            <a:off x="3383280" y="2916936"/>
-            <a:ext cx="1645920" cy="438912"/>
+            <a:off x="3017520" y="2916936"/>
+            <a:ext cx="1447800" cy="438912"/>
           </a:xfrm>
           <a:prstGeom prst="rect">
             <a:avLst/>
@@ -24690,8 +25350,8 @@
         </p:nvSpPr>
         <p:spPr>
           <a:xfrm>
-            <a:off x="5029200" y="2916936"/>
-            <a:ext cx="1645920" cy="438912"/>
+            <a:off x="4465320" y="2916936"/>
+            <a:ext cx="1447800" cy="438912"/>
           </a:xfrm>
           <a:prstGeom prst="rect">
             <a:avLst/>
@@ -24756,8 +25416,8 @@
         </p:nvSpPr>
         <p:spPr>
           <a:xfrm>
-            <a:off x="6675120" y="2916936"/>
-            <a:ext cx="1645920" cy="438912"/>
+            <a:off x="5913120" y="2916936"/>
+            <a:ext cx="1447800" cy="438912"/>
           </a:xfrm>
           <a:prstGeom prst="rect">
             <a:avLst/>
@@ -24822,8 +25482,8 @@
         </p:nvSpPr>
         <p:spPr>
           <a:xfrm>
-            <a:off x="8321040" y="2916936"/>
-            <a:ext cx="1371600" cy="438912"/>
+            <a:off x="7360920" y="2916936"/>
+            <a:ext cx="1447800" cy="438912"/>
           </a:xfrm>
           <a:prstGeom prst="rect">
             <a:avLst/>
@@ -24882,14 +25542,14 @@
       </p:sp>
       <p:sp>
         <p:nvSpPr>
-          <p:cNvPr id="388" name="Google Shape;388;p15"/>
-          <p:cNvSpPr/>
-          <p:nvPr/>
-        </p:nvSpPr>
-        <p:spPr>
-          <a:xfrm>
-            <a:off x="9692640" y="2916936"/>
-            <a:ext cx="2011680" cy="438912"/>
+          <p:cNvPr id="405" name="Google Shape;387;p15"/>
+          <p:cNvSpPr/>
+          <p:nvPr/>
+        </p:nvSpPr>
+        <p:spPr>
+          <a:xfrm>
+            <a:off x="8808720" y="2916936"/>
+            <a:ext cx="1447800" cy="438912"/>
           </a:xfrm>
           <a:prstGeom prst="rect">
             <a:avLst/>
@@ -24932,7 +25592,7 @@
                 <a:cs typeface="Arial"/>
                 <a:sym typeface="Arial"/>
               </a:rPr>
-              <a:t>+0,33</a:t>
+              <a:t>+0,67</a:t>
             </a:r>
             <a:endParaRPr b="0" i="0" sz="1300" u="none" cap="none" strike="noStrike">
               <a:solidFill>
@@ -24948,6 +25608,72 @@
       </p:sp>
       <p:sp>
         <p:nvSpPr>
+          <p:cNvPr id="388" name="Google Shape;388;p15"/>
+          <p:cNvSpPr/>
+          <p:nvPr/>
+        </p:nvSpPr>
+        <p:spPr>
+          <a:xfrm>
+            <a:off x="10256520" y="2916936"/>
+            <a:ext cx="1447800" cy="438912"/>
+          </a:xfrm>
+          <a:prstGeom prst="rect">
+            <a:avLst/>
+          </a:prstGeom>
+          <a:noFill/>
+          <a:ln>
+            <a:noFill/>
+          </a:ln>
+        </p:spPr>
+        <p:txBody>
+          <a:bodyPr anchorCtr="0" anchor="ctr" bIns="27425" lIns="54850" spcFirstLastPara="1" rIns="54850" wrap="square" tIns="27425">
+            <a:noAutofit/>
+          </a:bodyPr>
+          <a:lstStyle/>
+          <a:p>
+            <a:pPr indent="0" lvl="0" marL="0" marR="0" rtl="0" algn="ctr">
+              <a:lnSpc>
+                <a:spcPct val="100000"/>
+              </a:lnSpc>
+              <a:spcBef>
+                <a:spcPts val="0"/>
+              </a:spcBef>
+              <a:spcAft>
+                <a:spcPts val="0"/>
+              </a:spcAft>
+              <a:buClr>
+                <a:srgbClr val="1F2937"/>
+              </a:buClr>
+              <a:buSzPts val="1300"/>
+              <a:buFont typeface="Calibri"/>
+              <a:buNone/>
+            </a:pPr>
+            <a:r>
+              <a:rPr b="0" i="0" lang="en-US" sz="1240" u="none" cap="none" strike="noStrike">
+                <a:solidFill>
+                  <a:srgbClr val="2F3A44"/>
+                </a:solidFill>
+                <a:latin typeface="Arial"/>
+                <a:ea typeface="Arial"/>
+                <a:cs typeface="Arial"/>
+                <a:sym typeface="Arial"/>
+              </a:rPr>
+              <a:t>+0,33</a:t>
+            </a:r>
+            <a:endParaRPr b="0" i="0" sz="1300" u="none" cap="none" strike="noStrike">
+              <a:solidFill>
+                <a:schemeClr val="dk1"/>
+              </a:solidFill>
+              <a:latin typeface="Calibri"/>
+              <a:ea typeface="Calibri"/>
+              <a:cs typeface="Calibri"/>
+              <a:sym typeface="Calibri"/>
+            </a:endParaRPr>
+          </a:p>
+        </p:txBody>
+      </p:sp>
+      <p:sp>
+        <p:nvSpPr>
           <p:cNvPr id="394" name="Google Shape;382;p15"/>
           <p:cNvSpPr/>
           <p:nvPr/>
@@ -25014,7 +25740,7 @@
         <p:spPr>
           <a:xfrm>
             <a:off x="457200" y="3355848"/>
-            <a:ext cx="2926080" cy="438912"/>
+            <a:ext cx="2560320" cy="438912"/>
           </a:xfrm>
           <a:prstGeom prst="rect">
             <a:avLst/>
@@ -25079,8 +25805,8 @@
         </p:nvSpPr>
         <p:spPr>
           <a:xfrm>
-            <a:off x="3383280" y="3355848"/>
-            <a:ext cx="1645920" cy="438912"/>
+            <a:off x="3017520" y="3355848"/>
+            <a:ext cx="1447800" cy="438912"/>
           </a:xfrm>
           <a:prstGeom prst="rect">
             <a:avLst/>
@@ -25145,8 +25871,8 @@
         </p:nvSpPr>
         <p:spPr>
           <a:xfrm>
-            <a:off x="5029200" y="3355848"/>
-            <a:ext cx="1645920" cy="438912"/>
+            <a:off x="4465320" y="3355848"/>
+            <a:ext cx="1447800" cy="438912"/>
           </a:xfrm>
           <a:prstGeom prst="rect">
             <a:avLst/>
@@ -25211,8 +25937,8 @@
         </p:nvSpPr>
         <p:spPr>
           <a:xfrm>
-            <a:off x="6675120" y="3355848"/>
-            <a:ext cx="1645920" cy="438912"/>
+            <a:off x="5913120" y="3355848"/>
+            <a:ext cx="1447800" cy="438912"/>
           </a:xfrm>
           <a:prstGeom prst="rect">
             <a:avLst/>
@@ -25277,8 +26003,8 @@
         </p:nvSpPr>
         <p:spPr>
           <a:xfrm>
-            <a:off x="8321040" y="3355848"/>
-            <a:ext cx="1371600" cy="438912"/>
+            <a:off x="7360920" y="3355848"/>
+            <a:ext cx="1447800" cy="438912"/>
           </a:xfrm>
           <a:prstGeom prst="rect">
             <a:avLst/>
@@ -25337,14 +26063,14 @@
       </p:sp>
       <p:sp>
         <p:nvSpPr>
-          <p:cNvPr id="400" name="Google Shape;388;p15"/>
-          <p:cNvSpPr/>
-          <p:nvPr/>
-        </p:nvSpPr>
-        <p:spPr>
-          <a:xfrm>
-            <a:off x="9692640" y="3355848"/>
-            <a:ext cx="2011680" cy="438912"/>
+          <p:cNvPr id="406" name="Google Shape;387;p15"/>
+          <p:cNvSpPr/>
+          <p:nvPr/>
+        </p:nvSpPr>
+        <p:spPr>
+          <a:xfrm>
+            <a:off x="8808720" y="3355848"/>
+            <a:ext cx="1447800" cy="438912"/>
           </a:xfrm>
           <a:prstGeom prst="rect">
             <a:avLst/>
@@ -25387,7 +26113,7 @@
                 <a:cs typeface="Arial"/>
                 <a:sym typeface="Arial"/>
               </a:rPr>
-              <a:t>+0,31</a:t>
+              <a:t>+0,66</a:t>
             </a:r>
             <a:endParaRPr b="0" i="0" sz="1300" u="none" cap="none" strike="noStrike">
               <a:solidFill>
@@ -25403,14 +26129,14 @@
       </p:sp>
       <p:sp>
         <p:nvSpPr>
-          <p:cNvPr id="389" name="Google Shape;389;p15"/>
-          <p:cNvSpPr/>
-          <p:nvPr/>
-        </p:nvSpPr>
-        <p:spPr>
-          <a:xfrm>
-            <a:off x="457200" y="3931920"/>
-            <a:ext cx="10972800" cy="274320"/>
+          <p:cNvPr id="400" name="Google Shape;388;p15"/>
+          <p:cNvSpPr/>
+          <p:nvPr/>
+        </p:nvSpPr>
+        <p:spPr>
+          <a:xfrm>
+            <a:off x="10256520" y="3355848"/>
+            <a:ext cx="1447800" cy="438912"/>
           </a:xfrm>
           <a:prstGeom prst="rect">
             <a:avLst/>
@@ -25426,34 +26152,100 @@
           </a:bodyPr>
           <a:lstStyle/>
           <a:p>
-            <a:pPr indent="0" lvl="0" marL="0" marR="0" rtl="0" algn="l">
-              <a:lnSpc>
-                <a:spcPct val="100000"/>
-              </a:lnSpc>
-              <a:spcBef>
-                <a:spcPts val="0"/>
-              </a:spcBef>
-              <a:spcAft>
-                <a:spcPts val="0"/>
-              </a:spcAft>
-              <a:buClr>
-                <a:srgbClr val="4B5563"/>
-              </a:buClr>
-              <a:buSzPts val="1200"/>
+            <a:pPr indent="0" lvl="0" marL="0" marR="0" rtl="0" algn="ctr">
+              <a:lnSpc>
+                <a:spcPct val="100000"/>
+              </a:lnSpc>
+              <a:spcBef>
+                <a:spcPts val="0"/>
+              </a:spcBef>
+              <a:spcAft>
+                <a:spcPts val="0"/>
+              </a:spcAft>
+              <a:buClr>
+                <a:srgbClr val="1F2937"/>
+              </a:buClr>
+              <a:buSzPts val="1300"/>
               <a:buFont typeface="Calibri"/>
               <a:buNone/>
             </a:pPr>
             <a:r>
-              <a:rPr b="0" i="0" lang="en-US" sz="1050" u="none" cap="none" strike="noStrike">
-                <a:solidFill>
-                  <a:srgbClr val="6F7A84"/>
+              <a:rPr b="0" i="0" lang="en-US" sz="1240" u="none" cap="none" strike="noStrike">
+                <a:solidFill>
+                  <a:srgbClr val="2F3A44"/>
                 </a:solidFill>
                 <a:latin typeface="Arial"/>
                 <a:ea typeface="Arial"/>
                 <a:cs typeface="Arial"/>
                 <a:sym typeface="Arial"/>
               </a:rPr>
-              <a:t>Backtest glissant : calage initial de 10 ans, puis toutes les coupures jusqu'en 2019, horizon 5 ans — environ 19 fenêtres. RMSE, MAE et MAPE sont ceux du glissant ; la dernière colonne reprend la diapositive précédente (calage unique 1990-2011, horizon jusqu'à 8 ans).</a:t>
+              <a:t>+0,31</a:t>
+            </a:r>
+            <a:endParaRPr b="0" i="0" sz="1300" u="none" cap="none" strike="noStrike">
+              <a:solidFill>
+                <a:schemeClr val="dk1"/>
+              </a:solidFill>
+              <a:latin typeface="Calibri"/>
+              <a:ea typeface="Calibri"/>
+              <a:cs typeface="Calibri"/>
+              <a:sym typeface="Calibri"/>
+            </a:endParaRPr>
+          </a:p>
+        </p:txBody>
+      </p:sp>
+      <p:sp>
+        <p:nvSpPr>
+          <p:cNvPr id="389" name="Google Shape;389;p15"/>
+          <p:cNvSpPr/>
+          <p:nvPr/>
+        </p:nvSpPr>
+        <p:spPr>
+          <a:xfrm>
+            <a:off x="457200" y="3931920"/>
+            <a:ext cx="10972800" cy="274320"/>
+          </a:xfrm>
+          <a:prstGeom prst="rect">
+            <a:avLst/>
+          </a:prstGeom>
+          <a:noFill/>
+          <a:ln>
+            <a:noFill/>
+          </a:ln>
+        </p:spPr>
+        <p:txBody>
+          <a:bodyPr anchorCtr="0" anchor="ctr" bIns="27425" lIns="54850" spcFirstLastPara="1" rIns="54850" wrap="square" tIns="27425">
+            <a:noAutofit/>
+          </a:bodyPr>
+          <a:lstStyle/>
+          <a:p>
+            <a:pPr indent="0" lvl="0" marL="0" marR="0" rtl="0" algn="l">
+              <a:lnSpc>
+                <a:spcPct val="100000"/>
+              </a:lnSpc>
+              <a:spcBef>
+                <a:spcPts val="0"/>
+              </a:spcBef>
+              <a:spcAft>
+                <a:spcPts val="0"/>
+              </a:spcAft>
+              <a:buClr>
+                <a:srgbClr val="4B5563"/>
+              </a:buClr>
+              <a:buSzPts val="1200"/>
+              <a:buFont typeface="Calibri"/>
+              <a:buNone/>
+            </a:pPr>
+            <a:r>
+              <a:rPr b="0" i="0" lang="en-US" sz="1050" u="none" cap="none" strike="noStrike">
+                <a:solidFill>
+                  <a:srgbClr val="6F7A84"/>
+                </a:solidFill>
+                <a:latin typeface="Arial"/>
+                <a:ea typeface="Arial"/>
+                <a:cs typeface="Arial"/>
+                <a:sym typeface="Arial"/>
+              </a:rPr>
+              <a:t>Backtest glissant : calage initial de 10 ans, puis toutes les coupures jusqu'en 2019, horizon 5 ans — environ 19 fenêtres. « R² macro réelle » rejoue le même backtest avec la macro observée sur 1990-2019 (population +0,67 %, PIB +1,42 %, prix +0,85 % par an). La dernière colonne reprend la diapositive précédente.</a:t>
             </a:r>
             <a:endParaRPr b="0" i="0" sz="1200" u="none" cap="none" strike="noStrike">
               <a:solidFill>
@@ -25652,7 +26444,7 @@
                 <a:cs typeface="Arial"/>
                 <a:sym typeface="Arial"/>
               </a:rPr>
-              <a:t>Le classement de la diapositive précédente tient à une seule coupure : un calage 1990-2011, puis huit années prédites d'affilée. En moyennant toutes les coupures possibles à horizon 5 ans, les cinq variantes expliquent 60 à 77 % de la variance hors échantillon, pour 5,5 à 6,4 % d'erreur relative moyenne. La seconde mesure est plus robuste, mais porte sur un horizon plus court.
+              <a:t>En moyennant toutes les coupures possibles à horizon 5 ans, les cinq variantes expliquent 60 à 77 % de la variance hors échantillon, pour 5,5 à 6,4 % d'erreur relative. Ce classement-ci résiste à l'hypothèse macro : il perd 0,06 à 0,09 point avec la macro observée, sans changer d'ordre, là où celui de la diapositive précédente s'inversait.
 Réserve : sur ce jeu synthétique, le trafic 2012-2019 croît de 5,0 % par an quand la population avance de 0,7 % et le PIB par habitant de 1,25 %. Aucun modèle fondé sur ces moteurs ne peut suivre — ces R² mesurent donc d'abord l'écart entre une trajectoire fabriquée et ses propres régresseurs.</a:t>
             </a:r>
             <a:endParaRPr b="0" i="0" sz="1400" u="none" cap="none" strike="noStrike">

--- a/docs/Presentation_methode_Kenza.pptx
+++ b/docs/Presentation_methode_Kenza.pptx
@@ -26445,7 +26445,7 @@
                 <a:sym typeface="Arial"/>
               </a:rPr>
               <a:t>En moyennant toutes les coupures possibles à horizon 5 ans, les cinq variantes expliquent 60 à 77 % de la variance hors échantillon, pour 5,5 à 6,4 % d'erreur relative. Ce classement-ci résiste à l'hypothèse macro : il perd 0,06 à 0,09 point avec la macro observée, sans changer d'ordre, là où celui de la diapositive précédente s'inversait.
-Réserve : sur ce jeu synthétique, le trafic 2012-2019 croît de 5,0 % par an quand la population avance de 0,7 % et le PIB par habitant de 1,25 %. Aucun modèle fondé sur ces moteurs ne peut suivre — ces R² mesurent donc d'abord l'écart entre une trajectoire fabriquée et ses propres régresseurs.</a:t>
+Réserve : le trafic 2012-2019 croît de 5,0 % par an quand la population avance de 0,7 % et le PIB par habitant de 1,25 %. YUL surperforme donc les prévisions, et l'écart s'ouvre d'année en année. Le combler demande des variables explicatives supplémentaires — par exemple des transferts de demande entre aéroports — plutôt qu'un recalibrage.</a:t>
             </a:r>
             <a:endParaRPr b="0" i="0" sz="1400" u="none" cap="none" strike="noStrike">
               <a:solidFill>
